--- a/app/assets/templates/standard-classroom.pptx
+++ b/app/assets/templates/standard-classroom.pptx
@@ -2,26 +2,26 @@
 <file path=ppt/presentation.xml><?xml version="1.0" encoding="utf-8"?>
 <p:presentation xmlns:p="http://schemas.openxmlformats.org/presentationml/2006/main">
   <p:sldMasterIdLst>
-    <p:sldMasterId xmlns:r="http://schemas.openxmlformats.org/officeDocument/2006/relationships" id="2147483648" r:id="R0e9db5f22496491b"/>
+    <p:sldMasterId xmlns:r="http://schemas.openxmlformats.org/officeDocument/2006/relationships" id="2147483648" r:id="Raf29a5dab22d492c"/>
   </p:sldMasterIdLst>
   <p:notesMasterIdLst>
-    <p:notesMasterId xmlns:r="http://schemas.openxmlformats.org/officeDocument/2006/relationships" r:id="R20897316c1d64677"/>
+    <p:notesMasterId xmlns:r="http://schemas.openxmlformats.org/officeDocument/2006/relationships" r:id="Rb9b21eaaf69c4b41"/>
   </p:notesMasterIdLst>
   <p:sldIdLst>
-    <p:sldId xmlns:r="http://schemas.openxmlformats.org/officeDocument/2006/relationships" id="256" r:id="Rf35cd802a9a44546"/>
-    <p:sldId xmlns:r="http://schemas.openxmlformats.org/officeDocument/2006/relationships" id="257" r:id="Ra128e1d2c9b842d0"/>
-    <p:sldId xmlns:r="http://schemas.openxmlformats.org/officeDocument/2006/relationships" id="258" r:id="R4980ee64635441ac"/>
-    <p:sldId xmlns:r="http://schemas.openxmlformats.org/officeDocument/2006/relationships" id="259" r:id="R66b1b57325c4487d"/>
-    <p:sldId xmlns:r="http://schemas.openxmlformats.org/officeDocument/2006/relationships" id="260" r:id="Ra664c4ce6b154f6b"/>
-    <p:sldId xmlns:r="http://schemas.openxmlformats.org/officeDocument/2006/relationships" id="261" r:id="Rdc507cd3f8644321"/>
-    <p:sldId xmlns:r="http://schemas.openxmlformats.org/officeDocument/2006/relationships" id="262" r:id="R8dae9ff1bcee4a4d"/>
-    <p:sldId xmlns:r="http://schemas.openxmlformats.org/officeDocument/2006/relationships" id="263" r:id="Rf891854a4d754731"/>
-    <p:sldId xmlns:r="http://schemas.openxmlformats.org/officeDocument/2006/relationships" id="264" r:id="R352e0bafae104e57"/>
-    <p:sldId xmlns:r="http://schemas.openxmlformats.org/officeDocument/2006/relationships" id="265" r:id="R56c3660759f446e7"/>
-    <p:sldId xmlns:r="http://schemas.openxmlformats.org/officeDocument/2006/relationships" id="266" r:id="Rfb16c190fe754c8d"/>
-    <p:sldId xmlns:r="http://schemas.openxmlformats.org/officeDocument/2006/relationships" id="267" r:id="Rd936ae7045a044ac"/>
-    <p:sldId xmlns:r="http://schemas.openxmlformats.org/officeDocument/2006/relationships" id="268" r:id="R9f6e73eba00d4afc"/>
-    <p:sldId xmlns:r="http://schemas.openxmlformats.org/officeDocument/2006/relationships" id="269" r:id="Rc2818ab77006455e"/>
+    <p:sldId xmlns:r="http://schemas.openxmlformats.org/officeDocument/2006/relationships" id="256" r:id="R8aa9d4b8ee364e7d"/>
+    <p:sldId xmlns:r="http://schemas.openxmlformats.org/officeDocument/2006/relationships" id="257" r:id="R0d79142170b34759"/>
+    <p:sldId xmlns:r="http://schemas.openxmlformats.org/officeDocument/2006/relationships" id="258" r:id="R1dd8877f612e458a"/>
+    <p:sldId xmlns:r="http://schemas.openxmlformats.org/officeDocument/2006/relationships" id="259" r:id="R8afc62d7f7354db4"/>
+    <p:sldId xmlns:r="http://schemas.openxmlformats.org/officeDocument/2006/relationships" id="260" r:id="R2d6ff4fdb4aa4b06"/>
+    <p:sldId xmlns:r="http://schemas.openxmlformats.org/officeDocument/2006/relationships" id="261" r:id="R665637ab8ea44304"/>
+    <p:sldId xmlns:r="http://schemas.openxmlformats.org/officeDocument/2006/relationships" id="262" r:id="Rf9e2812f151d4ffd"/>
+    <p:sldId xmlns:r="http://schemas.openxmlformats.org/officeDocument/2006/relationships" id="263" r:id="R85866cbd1cf344c4"/>
+    <p:sldId xmlns:r="http://schemas.openxmlformats.org/officeDocument/2006/relationships" id="264" r:id="Re76d567578ca4ec0"/>
+    <p:sldId xmlns:r="http://schemas.openxmlformats.org/officeDocument/2006/relationships" id="265" r:id="Rdde9b3a5a01e4922"/>
+    <p:sldId xmlns:r="http://schemas.openxmlformats.org/officeDocument/2006/relationships" id="266" r:id="R65297ae4ffc943fd"/>
+    <p:sldId xmlns:r="http://schemas.openxmlformats.org/officeDocument/2006/relationships" id="267" r:id="R599b54ee7fdf4879"/>
+    <p:sldId xmlns:r="http://schemas.openxmlformats.org/officeDocument/2006/relationships" id="268" r:id="R52aefc45442b4854"/>
+    <p:sldId xmlns:r="http://schemas.openxmlformats.org/officeDocument/2006/relationships" id="269" r:id="Rb6cae967109a49a3"/>
   </p:sldIdLst>
   <p:sldSz cx="12192000" cy="6858000"/>
   <p:notesSz cx="6858000" cy="9144000"/>
@@ -455,7 +455,7 @@
           <a:lstStyle xmlns:a="http://schemas.openxmlformats.org/drawingml/2006/main"/>
           <a:p xmlns:a="http://schemas.openxmlformats.org/drawingml/2006/main">
             <a:r>
-              <a:t>Mẫu standard: title. Thay các phần trong ngoặc bằng nội dung đã kiểm tra. Đây là mẫu cấu trúc, không phải bài học đã duyệt.</a:t>
+              <a:t>Mẫu standard: title. Ví dụ minh họa thiết kế từ app/assets/templates/demo_lessons.json. Khi tạo bài, thay bằng nội dung và hình của tài liệu giáo viên; không sao chép kiến thức của bài minh họa sang môn khác.</a:t>
             </a:r>
           </a:p>
         </p:txBody>
@@ -525,7 +525,7 @@
           <a:lstStyle xmlns:a="http://schemas.openxmlformats.org/drawingml/2006/main"/>
           <a:p xmlns:a="http://schemas.openxmlformats.org/drawingml/2006/main">
             <a:r>
-              <a:t>Mẫu standard: example. Thay các phần trong ngoặc bằng nội dung đã kiểm tra. Đây là mẫu cấu trúc, không phải bài học đã duyệt.</a:t>
+              <a:t>Mẫu standard: example. Ví dụ minh họa thiết kế từ app/assets/templates/demo_lessons.json. Khi tạo bài, thay bằng nội dung và hình của tài liệu giáo viên; không sao chép kiến thức của bài minh họa sang môn khác.</a:t>
             </a:r>
           </a:p>
         </p:txBody>
@@ -595,7 +595,7 @@
           <a:lstStyle xmlns:a="http://schemas.openxmlformats.org/drawingml/2006/main"/>
           <a:p xmlns:a="http://schemas.openxmlformats.org/drawingml/2006/main">
             <a:r>
-              <a:t>Mẫu standard: practice. Thay các phần trong ngoặc bằng nội dung đã kiểm tra. Đây là mẫu cấu trúc, không phải bài học đã duyệt.</a:t>
+              <a:t>Mẫu standard: practice. Ví dụ minh họa thiết kế từ app/assets/templates/demo_lessons.json. Khi tạo bài, thay bằng nội dung và hình của tài liệu giáo viên; không sao chép kiến thức của bài minh họa sang môn khác.</a:t>
             </a:r>
           </a:p>
         </p:txBody>
@@ -665,7 +665,7 @@
           <a:lstStyle xmlns:a="http://schemas.openxmlformats.org/drawingml/2006/main"/>
           <a:p xmlns:a="http://schemas.openxmlformats.org/drawingml/2006/main">
             <a:r>
-              <a:t>Mẫu standard: question. Thay các phần trong ngoặc bằng nội dung đã kiểm tra. Đây là mẫu cấu trúc, không phải bài học đã duyệt.</a:t>
+              <a:t>Mẫu standard: question. Ví dụ minh họa thiết kế từ app/assets/templates/demo_lessons.json. Khi tạo bài, thay bằng nội dung và hình của tài liệu giáo viên; không sao chép kiến thức của bài minh họa sang môn khác.</a:t>
             </a:r>
           </a:p>
         </p:txBody>
@@ -735,7 +735,7 @@
           <a:lstStyle xmlns:a="http://schemas.openxmlformats.org/drawingml/2006/main"/>
           <a:p xmlns:a="http://schemas.openxmlformats.org/drawingml/2006/main">
             <a:r>
-              <a:t>Mẫu standard: check. Thay các phần trong ngoặc bằng nội dung đã kiểm tra. Đây là mẫu cấu trúc, không phải bài học đã duyệt.</a:t>
+              <a:t>Mẫu standard: check. Ví dụ minh họa thiết kế từ app/assets/templates/demo_lessons.json. Khi tạo bài, thay bằng nội dung và hình của tài liệu giáo viên; không sao chép kiến thức của bài minh họa sang môn khác.</a:t>
             </a:r>
           </a:p>
         </p:txBody>
@@ -805,7 +805,7 @@
           <a:lstStyle xmlns:a="http://schemas.openxmlformats.org/drawingml/2006/main"/>
           <a:p xmlns:a="http://schemas.openxmlformats.org/drawingml/2006/main">
             <a:r>
-              <a:t>Mẫu standard: summary. Thay các phần trong ngoặc bằng nội dung đã kiểm tra. Đây là mẫu cấu trúc, không phải bài học đã duyệt.</a:t>
+              <a:t>Mẫu standard: summary. Ví dụ minh họa thiết kế từ app/assets/templates/demo_lessons.json. Khi tạo bài, thay bằng nội dung và hình của tài liệu giáo viên; không sao chép kiến thức của bài minh họa sang môn khác.</a:t>
             </a:r>
           </a:p>
         </p:txBody>
@@ -875,7 +875,7 @@
           <a:lstStyle xmlns:a="http://schemas.openxmlformats.org/drawingml/2006/main"/>
           <a:p xmlns:a="http://schemas.openxmlformats.org/drawingml/2006/main">
             <a:r>
-              <a:t>Mẫu standard: goal. Thay các phần trong ngoặc bằng nội dung đã kiểm tra. Đây là mẫu cấu trúc, không phải bài học đã duyệt.</a:t>
+              <a:t>Mẫu standard: goal. Ví dụ minh họa thiết kế từ app/assets/templates/demo_lessons.json. Khi tạo bài, thay bằng nội dung và hình của tài liệu giáo viên; không sao chép kiến thức của bài minh họa sang môn khác.</a:t>
             </a:r>
           </a:p>
         </p:txBody>
@@ -945,7 +945,7 @@
           <a:lstStyle xmlns:a="http://schemas.openxmlformats.org/drawingml/2006/main"/>
           <a:p xmlns:a="http://schemas.openxmlformats.org/drawingml/2006/main">
             <a:r>
-              <a:t>Mẫu standard: warmup. Thay các phần trong ngoặc bằng nội dung đã kiểm tra. Đây là mẫu cấu trúc, không phải bài học đã duyệt.</a:t>
+              <a:t>Mẫu standard: warmup. Ví dụ minh họa thiết kế từ app/assets/templates/demo_lessons.json. Khi tạo bài, thay bằng nội dung và hình của tài liệu giáo viên; không sao chép kiến thức của bài minh họa sang môn khác.</a:t>
             </a:r>
           </a:p>
         </p:txBody>
@@ -1015,7 +1015,7 @@
           <a:lstStyle xmlns:a="http://schemas.openxmlformats.org/drawingml/2006/main"/>
           <a:p xmlns:a="http://schemas.openxmlformats.org/drawingml/2006/main">
             <a:r>
-              <a:t>Mẫu standard: vocabulary. Thay các phần trong ngoặc bằng nội dung đã kiểm tra. Đây là mẫu cấu trúc, không phải bài học đã duyệt.</a:t>
+              <a:t>Mẫu standard: vocabulary. Ví dụ minh họa thiết kế từ app/assets/templates/demo_lessons.json. Khi tạo bài, thay bằng nội dung và hình của tài liệu giáo viên; không sao chép kiến thức của bài minh họa sang môn khác.</a:t>
             </a:r>
           </a:p>
         </p:txBody>
@@ -1085,7 +1085,7 @@
           <a:lstStyle xmlns:a="http://schemas.openxmlformats.org/drawingml/2006/main"/>
           <a:p xmlns:a="http://schemas.openxmlformats.org/drawingml/2006/main">
             <a:r>
-              <a:t>Mẫu standard: concept. Thay các phần trong ngoặc bằng nội dung đã kiểm tra. Đây là mẫu cấu trúc, không phải bài học đã duyệt.</a:t>
+              <a:t>Mẫu standard: concept. Ví dụ minh họa thiết kế từ app/assets/templates/demo_lessons.json. Khi tạo bài, thay bằng nội dung và hình của tài liệu giáo viên; không sao chép kiến thức của bài minh họa sang môn khác.</a:t>
             </a:r>
           </a:p>
         </p:txBody>
@@ -1155,7 +1155,7 @@
           <a:lstStyle xmlns:a="http://schemas.openxmlformats.org/drawingml/2006/main"/>
           <a:p xmlns:a="http://schemas.openxmlformats.org/drawingml/2006/main">
             <a:r>
-              <a:t>Mẫu standard: explanation. Thay các phần trong ngoặc bằng nội dung đã kiểm tra. Đây là mẫu cấu trúc, không phải bài học đã duyệt.</a:t>
+              <a:t>Mẫu standard: explanation. Ví dụ minh họa thiết kế từ app/assets/templates/demo_lessons.json. Khi tạo bài, thay bằng nội dung và hình của tài liệu giáo viên; không sao chép kiến thức của bài minh họa sang môn khác.</a:t>
             </a:r>
           </a:p>
         </p:txBody>
@@ -1225,7 +1225,7 @@
           <a:lstStyle xmlns:a="http://schemas.openxmlformats.org/drawingml/2006/main"/>
           <a:p xmlns:a="http://schemas.openxmlformats.org/drawingml/2006/main">
             <a:r>
-              <a:t>Mẫu standard: visual. Thay các phần trong ngoặc bằng nội dung đã kiểm tra. Đây là mẫu cấu trúc, không phải bài học đã duyệt.</a:t>
+              <a:t>Mẫu standard: visual. Ví dụ minh họa thiết kế từ app/assets/templates/demo_lessons.json. Khi tạo bài, thay bằng nội dung và hình của tài liệu giáo viên; không sao chép kiến thức của bài minh họa sang môn khác.</a:t>
             </a:r>
           </a:p>
         </p:txBody>
@@ -1295,7 +1295,7 @@
           <a:lstStyle xmlns:a="http://schemas.openxmlformats.org/drawingml/2006/main"/>
           <a:p xmlns:a="http://schemas.openxmlformats.org/drawingml/2006/main">
             <a:r>
-              <a:t>Mẫu standard: compare. Thay các phần trong ngoặc bằng nội dung đã kiểm tra. Đây là mẫu cấu trúc, không phải bài học đã duyệt.</a:t>
+              <a:t>Mẫu standard: compare. Ví dụ minh họa thiết kế từ app/assets/templates/demo_lessons.json. Khi tạo bài, thay bằng nội dung và hình của tài liệu giáo viên; không sao chép kiến thức của bài minh họa sang môn khác.</a:t>
             </a:r>
           </a:p>
         </p:txBody>
@@ -1365,7 +1365,7 @@
           <a:lstStyle xmlns:a="http://schemas.openxmlformats.org/drawingml/2006/main"/>
           <a:p xmlns:a="http://schemas.openxmlformats.org/drawingml/2006/main">
             <a:r>
-              <a:t>Mẫu standard: formula. Thay các phần trong ngoặc bằng nội dung đã kiểm tra. Đây là mẫu cấu trúc, không phải bài học đã duyệt.</a:t>
+              <a:t>Mẫu standard: formula. Ví dụ minh họa thiết kế từ app/assets/templates/demo_lessons.json. Khi tạo bài, thay bằng nội dung và hình của tài liệu giáo viên; không sao chép kiến thức của bài minh họa sang môn khác.</a:t>
             </a:r>
           </a:p>
         </p:txBody>
@@ -1433,7 +1433,7 @@
   </p:cSld>
   <p:clrMap bg1="lt1" tx1="dk1" bg2="lt2" tx2="dk2" accent1="accent1" accent2="accent2" accent3="accent3" accent4="accent4" accent5="accent5" accent6="accent6" hlink="hlink" folHlink="folHlink"/>
   <p:sldLayoutIdLst>
-    <p:sldLayoutId xmlns:r="http://schemas.openxmlformats.org/officeDocument/2006/relationships" id="2147483649" r:id="R3ea4d0236cfa432f"/>
+    <p:sldLayoutId xmlns:r="http://schemas.openxmlformats.org/officeDocument/2006/relationships" id="2147483649" r:id="R2019d88913df467f"/>
   </p:sldLayoutIdLst>
   <p:txStyles>
     <p:titleStyle>
@@ -1981,10 +1981,10 @@
       </p:grpSpPr>
       <p:sp>
         <p:nvSpPr>
-          <p:cNvPr id="7" name="title-0">
-            <a:extLst xmlns:a="http://schemas.openxmlformats.org/drawingml/2006/main">
-              <a:ext uri="{FF2B5EF4-FFF2-40B4-BE49-F238E27FC236}">
-                <a16:creationId xmlns:a16="http://schemas.microsoft.com/office/drawing/2014/main" id="{AD68D653-993F-400C-9626-A0AF6B725DD9}"/>
+          <p:cNvPr id="8" name="title-0">
+            <a:extLst xmlns:a="http://schemas.openxmlformats.org/drawingml/2006/main">
+              <a:ext uri="{FF2B5EF4-FFF2-40B4-BE49-F238E27FC236}">
+                <a16:creationId xmlns:a16="http://schemas.microsoft.com/office/drawing/2014/main" id="{95761681-EE9D-4B0A-AED4-5C4C9938D8D3}"/>
               </a:ext>
             </a:extLst>
           </p:cNvPr>
@@ -2031,7 +2031,7 @@
                 <a:ea typeface="Arial"/>
                 <a:cs typeface="Arial"/>
               </a:rPr>
-              <a:t>BiliClass   /   Môn học của thầy cô   /   10–12</a:t>
+              <a:t>BiliClass   /   Toán · ví dụ minh họa   /   </a:t>
             </a:r>
           </a:p>
         </p:txBody>
@@ -2041,7 +2041,7 @@
           <p:cNvPr id="2" name="title-1">
             <a:extLst xmlns:a="http://schemas.openxmlformats.org/drawingml/2006/main">
               <a:ext uri="{FF2B5EF4-FFF2-40B4-BE49-F238E27FC236}">
-                <a16:creationId xmlns:a16="http://schemas.microsoft.com/office/drawing/2014/main" id="{B4197E20-63E3-436C-BA58-ADF4AB099F2E}"/>
+                <a16:creationId xmlns:a16="http://schemas.microsoft.com/office/drawing/2014/main" id="{C7584B87-9BDA-4A39-B50B-6E83BAF9DDC3}"/>
               </a:ext>
             </a:extLst>
           </p:cNvPr>
@@ -2088,7 +2088,7 @@
                 <a:ea typeface="Arial"/>
                 <a:cs typeface="Arial"/>
               </a:rPr>
-              <a:t>Mẫu bài giảng song ngữ</a:t>
+              <a:t>Diện tích hình chữ nhật</a:t>
             </a:r>
           </a:p>
         </p:txBody>
@@ -2098,7 +2098,7 @@
           <p:cNvPr id="3" name="title-2">
             <a:extLst xmlns:a="http://schemas.openxmlformats.org/drawingml/2006/main">
               <a:ext uri="{FF2B5EF4-FFF2-40B4-BE49-F238E27FC236}">
-                <a16:creationId xmlns:a16="http://schemas.microsoft.com/office/drawing/2014/main" id="{52CCBF3B-848B-4FF7-8DB3-46359ECFF972}"/>
+                <a16:creationId xmlns:a16="http://schemas.microsoft.com/office/drawing/2014/main" id="{3EB227A5-A325-4011-B4A5-72A9757B0A32}"/>
               </a:ext>
             </a:extLst>
           </p:cNvPr>
@@ -2155,7 +2155,7 @@
           <p:cNvPr id="4" name="title-3">
             <a:extLst xmlns:a="http://schemas.openxmlformats.org/drawingml/2006/main">
               <a:ext uri="{FF2B5EF4-FFF2-40B4-BE49-F238E27FC236}">
-                <a16:creationId xmlns:a16="http://schemas.microsoft.com/office/drawing/2014/main" id="{00CAB037-5A20-4D7F-826A-1C88C4A254DD}"/>
+                <a16:creationId xmlns:a16="http://schemas.microsoft.com/office/drawing/2014/main" id="{8DFAEC3F-28D8-4578-A6AA-C37A6B5D233D}"/>
               </a:ext>
             </a:extLst>
           </p:cNvPr>
@@ -2202,7 +2202,7 @@
                 <a:ea typeface="Arial"/>
                 <a:cs typeface="Arial"/>
               </a:rPr>
-              <a:t>Mẫu cấu trúc · Thay bằng nội dung bài học</a:t>
+              <a:t>Ví dụ để xem thiết kế · Bài của thầy cô dùng nội dung và hình từ nguồn</a:t>
             </a:r>
           </a:p>
         </p:txBody>
@@ -2212,7 +2212,7 @@
           <p:cNvPr id="5" name="title-4">
             <a:extLst xmlns:a="http://schemas.openxmlformats.org/drawingml/2006/main">
               <a:ext uri="{FF2B5EF4-FFF2-40B4-BE49-F238E27FC236}">
-                <a16:creationId xmlns:a16="http://schemas.microsoft.com/office/drawing/2014/main" id="{5C8561E9-3309-4A71-ACFE-CC2AEC92D783}"/>
+                <a16:creationId xmlns:a16="http://schemas.microsoft.com/office/drawing/2014/main" id="{197722EA-5D5D-4947-96EE-9295974E1F6B}"/>
               </a:ext>
             </a:extLst>
           </p:cNvPr>
@@ -2224,24 +2224,24 @@
         <p:spPr>
           <a:xfrm xmlns:a="http://schemas.openxmlformats.org/drawingml/2006/main">
             <a:off x="914400" y="2171700"/>
-            <a:ext cx="10363200" cy="1752600"/>
-          </a:xfrm>
-          <a:prstGeom xmlns:a="http://schemas.openxmlformats.org/drawingml/2006/main" prst="rect">
-            <a:avLst/>
-          </a:prstGeom>
-          <a:noFill xmlns:a="http://schemas.openxmlformats.org/drawingml/2006/main"/>
-          <a:ln xmlns:a="http://schemas.openxmlformats.org/drawingml/2006/main" w="0">
-            <a:noFill/>
-          </a:ln>
-        </p:spPr>
-        <p:txBody>
-          <a:bodyPr xmlns:a="http://schemas.openxmlformats.org/drawingml/2006/main">
-            <a:noAutofit/>
-          </a:bodyPr>
-          <a:lstStyle xmlns:a="http://schemas.openxmlformats.org/drawingml/2006/main"/>
-          <a:p xmlns:a="http://schemas.openxmlformats.org/drawingml/2006/main">
-            <a:pPr algn="l">
-              <a:defRPr sz="3900" b="1" i="0">
+            <a:ext cx="5219700" cy="1752600"/>
+          </a:xfrm>
+          <a:prstGeom xmlns:a="http://schemas.openxmlformats.org/drawingml/2006/main" prst="rect">
+            <a:avLst/>
+          </a:prstGeom>
+          <a:noFill xmlns:a="http://schemas.openxmlformats.org/drawingml/2006/main"/>
+          <a:ln xmlns:a="http://schemas.openxmlformats.org/drawingml/2006/main" w="0">
+            <a:noFill/>
+          </a:ln>
+        </p:spPr>
+        <p:txBody>
+          <a:bodyPr xmlns:a="http://schemas.openxmlformats.org/drawingml/2006/main">
+            <a:noAutofit/>
+          </a:bodyPr>
+          <a:lstStyle xmlns:a="http://schemas.openxmlformats.org/drawingml/2006/main"/>
+          <a:p xmlns:a="http://schemas.openxmlformats.org/drawingml/2006/main">
+            <a:pPr algn="l">
+              <a:defRPr sz="2100" b="1" i="0">
                 <a:solidFill>
                   <a:srgbClr val="112650"/>
                 </a:solidFill>
@@ -2251,7 +2251,7 @@
               </a:defRPr>
             </a:pPr>
             <a:r>
-              <a:rPr sz="3900" b="1" i="0">
+              <a:rPr sz="2100" b="1" i="0">
                 <a:solidFill>
                   <a:srgbClr val="112650"/>
                 </a:solidFill>
@@ -2259,30 +2259,7 @@
                 <a:ea typeface="Arial"/>
                 <a:cs typeface="Arial"/>
               </a:rPr>
-              <a:t>[Tên bài học]</a:t>
-            </a:r>
-          </a:p>
-          <a:p xmlns:a="http://schemas.openxmlformats.org/drawingml/2006/main">
-            <a:pPr algn="l">
-              <a:defRPr sz="3900" b="1" i="0">
-                <a:solidFill>
-                  <a:srgbClr val="112650"/>
-                </a:solidFill>
-                <a:latin typeface="Arial"/>
-                <a:ea typeface="Arial"/>
-                <a:cs typeface="Arial"/>
-              </a:defRPr>
-            </a:pPr>
-            <a:r>
-              <a:rPr sz="3900" b="1" i="0">
-                <a:solidFill>
-                  <a:srgbClr val="112650"/>
-                </a:solidFill>
-                <a:latin typeface="Arial"/>
-                <a:ea typeface="Arial"/>
-                <a:cs typeface="Arial"/>
-              </a:rPr>
-              <a:t>[Chủ đề của tiết học]</a:t>
+              <a:t>Diện tích hình chữ nhật</a:t>
             </a:r>
           </a:p>
         </p:txBody>
@@ -2292,7 +2269,7 @@
           <p:cNvPr id="6" name="title-5">
             <a:extLst xmlns:a="http://schemas.openxmlformats.org/drawingml/2006/main">
               <a:ext uri="{FF2B5EF4-FFF2-40B4-BE49-F238E27FC236}">
-                <a16:creationId xmlns:a16="http://schemas.microsoft.com/office/drawing/2014/main" id="{F98F3803-26B2-4894-B025-5C99E03DA1AB}"/>
+                <a16:creationId xmlns:a16="http://schemas.microsoft.com/office/drawing/2014/main" id="{7DEA4699-154D-444E-8852-59C83237D781}"/>
               </a:ext>
             </a:extLst>
           </p:cNvPr>
@@ -2304,24 +2281,24 @@
         <p:spPr>
           <a:xfrm xmlns:a="http://schemas.openxmlformats.org/drawingml/2006/main">
             <a:off x="914400" y="4248150"/>
-            <a:ext cx="10363200" cy="1752600"/>
-          </a:xfrm>
-          <a:prstGeom xmlns:a="http://schemas.openxmlformats.org/drawingml/2006/main" prst="rect">
-            <a:avLst/>
-          </a:prstGeom>
-          <a:noFill xmlns:a="http://schemas.openxmlformats.org/drawingml/2006/main"/>
-          <a:ln xmlns:a="http://schemas.openxmlformats.org/drawingml/2006/main" w="0">
-            <a:noFill/>
-          </a:ln>
-        </p:spPr>
-        <p:txBody>
-          <a:bodyPr xmlns:a="http://schemas.openxmlformats.org/drawingml/2006/main">
-            <a:noAutofit/>
-          </a:bodyPr>
-          <a:lstStyle xmlns:a="http://schemas.openxmlformats.org/drawingml/2006/main"/>
-          <a:p xmlns:a="http://schemas.openxmlformats.org/drawingml/2006/main">
-            <a:pPr algn="l">
-              <a:defRPr sz="3900" b="1" i="1">
+            <a:ext cx="5219700" cy="1752600"/>
+          </a:xfrm>
+          <a:prstGeom xmlns:a="http://schemas.openxmlformats.org/drawingml/2006/main" prst="rect">
+            <a:avLst/>
+          </a:prstGeom>
+          <a:noFill xmlns:a="http://schemas.openxmlformats.org/drawingml/2006/main"/>
+          <a:ln xmlns:a="http://schemas.openxmlformats.org/drawingml/2006/main" w="0">
+            <a:noFill/>
+          </a:ln>
+        </p:spPr>
+        <p:txBody>
+          <a:bodyPr xmlns:a="http://schemas.openxmlformats.org/drawingml/2006/main">
+            <a:noAutofit/>
+          </a:bodyPr>
+          <a:lstStyle xmlns:a="http://schemas.openxmlformats.org/drawingml/2006/main"/>
+          <a:p xmlns:a="http://schemas.openxmlformats.org/drawingml/2006/main">
+            <a:pPr algn="l">
+              <a:defRPr sz="2100" b="1" i="1">
                 <a:solidFill>
                   <a:srgbClr val="0869F9"/>
                 </a:solidFill>
@@ -2331,7 +2308,7 @@
               </a:defRPr>
             </a:pPr>
             <a:r>
-              <a:rPr sz="3900" b="1" i="1">
+              <a:rPr sz="2100" b="1" i="1">
                 <a:solidFill>
                   <a:srgbClr val="0869F9"/>
                 </a:solidFill>
@@ -2339,38 +2316,43 @@
                 <a:ea typeface="Arial"/>
                 <a:cs typeface="Arial"/>
               </a:rPr>
-              <a:t>[Lesson title]</a:t>
-            </a:r>
-          </a:p>
-          <a:p xmlns:a="http://schemas.openxmlformats.org/drawingml/2006/main">
-            <a:pPr algn="l">
-              <a:defRPr sz="3900" b="1" i="1">
-                <a:solidFill>
-                  <a:srgbClr val="0869F9"/>
-                </a:solidFill>
-                <a:latin typeface="Arial"/>
-                <a:ea typeface="Arial"/>
-                <a:cs typeface="Arial"/>
-              </a:defRPr>
-            </a:pPr>
-            <a:r>
-              <a:rPr sz="3900" b="1" i="1">
-                <a:solidFill>
-                  <a:srgbClr val="0869F9"/>
-                </a:solidFill>
-                <a:latin typeface="Arial"/>
-                <a:ea typeface="Arial"/>
-                <a:cs typeface="Arial"/>
-              </a:rPr>
-              <a:t>[Topic of the lesson]</a:t>
-            </a:r>
-          </a:p>
-        </p:txBody>
-      </p:sp>
+              <a:t>Area of a rectangle</a:t>
+            </a:r>
+          </a:p>
+        </p:txBody>
+      </p:sp>
+      <p:pic>
+        <p:nvPicPr>
+          <p:cNvPr id="14" name=""/>
+          <p:cNvPicPr>
+            <a:picLocks xmlns:a="http://schemas.openxmlformats.org/drawingml/2006/main" noChangeAspect="1"/>
+          </p:cNvPicPr>
+          <p:nvPr/>
+        </p:nvPicPr>
+        <p:blipFill>
+          <a:blip xmlns:r="http://schemas.openxmlformats.org/officeDocument/2006/relationships" xmlns:a="http://schemas.openxmlformats.org/drawingml/2006/main" r:embed="Rbe896a3288f946c0">
+            <a:extLst>
+              <a:ext uri="{96DAC541-7B7A-43D3-8B79-37D633B846F1}">
+                <asvg:svgBlip xmlns:asvg="http://schemas.microsoft.com/office/drawing/2016/SVG/main" r:embed="Rf8843d607227470d"/>
+              </a:ext>
+            </a:extLst>
+          </a:blip>
+          <a:stretch xmlns:a="http://schemas.openxmlformats.org/drawingml/2006/main"/>
+        </p:blipFill>
+        <p:spPr>
+          <a:xfrm xmlns:a="http://schemas.openxmlformats.org/drawingml/2006/main">
+            <a:off x="6629400" y="2038350"/>
+            <a:ext cx="4953000" cy="3905250"/>
+          </a:xfrm>
+          <a:prstGeom xmlns:a="http://schemas.openxmlformats.org/drawingml/2006/main" prst="rect">
+            <a:avLst/>
+          </a:prstGeom>
+        </p:spPr>
+      </p:pic>
     </p:spTree>
     <p:extLst>
       <p:ext uri="{BB962C8B-B14F-4D97-AF65-F5344CB8AC3E}">
-        <p14:creationId xmlns:p14="http://schemas.microsoft.com/office/powerpoint/2010/main" val="2099722325"/>
+        <p14:creationId xmlns:p14="http://schemas.microsoft.com/office/powerpoint/2010/main" val="1999652473"/>
       </p:ext>
     </p:extLst>
   </p:cSld>
@@ -2398,10 +2380,10 @@
       </p:grpSpPr>
       <p:sp>
         <p:nvSpPr>
-          <p:cNvPr id="7" name="example-0">
-            <a:extLst xmlns:a="http://schemas.openxmlformats.org/drawingml/2006/main">
-              <a:ext uri="{FF2B5EF4-FFF2-40B4-BE49-F238E27FC236}">
-                <a16:creationId xmlns:a16="http://schemas.microsoft.com/office/drawing/2014/main" id="{DB4608EF-1FFB-4FEA-B127-18A8B63322B6}"/>
+          <p:cNvPr id="8" name="example-0">
+            <a:extLst xmlns:a="http://schemas.openxmlformats.org/drawingml/2006/main">
+              <a:ext uri="{FF2B5EF4-FFF2-40B4-BE49-F238E27FC236}">
+                <a16:creationId xmlns:a16="http://schemas.microsoft.com/office/drawing/2014/main" id="{FED37CB5-9553-402F-AF83-9DB5F9D5E2AF}"/>
               </a:ext>
             </a:extLst>
           </p:cNvPr>
@@ -2448,7 +2430,7 @@
                 <a:ea typeface="Arial"/>
                 <a:cs typeface="Arial"/>
               </a:rPr>
-              <a:t>BiliClass   /   Môn học của thầy cô   /   10–12</a:t>
+              <a:t>BiliClass   /   Toán · ví dụ minh họa   /   </a:t>
             </a:r>
           </a:p>
         </p:txBody>
@@ -2458,7 +2440,7 @@
           <p:cNvPr id="2" name="example-1">
             <a:extLst xmlns:a="http://schemas.openxmlformats.org/drawingml/2006/main">
               <a:ext uri="{FF2B5EF4-FFF2-40B4-BE49-F238E27FC236}">
-                <a16:creationId xmlns:a16="http://schemas.microsoft.com/office/drawing/2014/main" id="{315E4493-B598-4DB2-856C-F140275E25B6}"/>
+                <a16:creationId xmlns:a16="http://schemas.microsoft.com/office/drawing/2014/main" id="{B105A0F7-197D-4D37-AD61-9E58B3D10933}"/>
               </a:ext>
             </a:extLst>
           </p:cNvPr>
@@ -2505,7 +2487,7 @@
                 <a:ea typeface="Arial"/>
                 <a:cs typeface="Arial"/>
               </a:rPr>
-              <a:t>Mẫu bài giảng song ngữ</a:t>
+              <a:t>Diện tích hình chữ nhật</a:t>
             </a:r>
           </a:p>
         </p:txBody>
@@ -2515,7 +2497,7 @@
           <p:cNvPr id="3" name="example-2">
             <a:extLst xmlns:a="http://schemas.openxmlformats.org/drawingml/2006/main">
               <a:ext uri="{FF2B5EF4-FFF2-40B4-BE49-F238E27FC236}">
-                <a16:creationId xmlns:a16="http://schemas.microsoft.com/office/drawing/2014/main" id="{CA9BEC5B-FC89-41E0-8499-AC00F72F8B2E}"/>
+                <a16:creationId xmlns:a16="http://schemas.microsoft.com/office/drawing/2014/main" id="{C80E081C-42DE-4D9C-9136-BD67F448C5D0}"/>
               </a:ext>
             </a:extLst>
           </p:cNvPr>
@@ -2572,7 +2554,7 @@
           <p:cNvPr id="4" name="example-3">
             <a:extLst xmlns:a="http://schemas.openxmlformats.org/drawingml/2006/main">
               <a:ext uri="{FF2B5EF4-FFF2-40B4-BE49-F238E27FC236}">
-                <a16:creationId xmlns:a16="http://schemas.microsoft.com/office/drawing/2014/main" id="{205F5082-619F-4A04-83CA-A34774027D0A}"/>
+                <a16:creationId xmlns:a16="http://schemas.microsoft.com/office/drawing/2014/main" id="{EBD4775F-2812-488C-B7C4-0AF65CAB2694}"/>
               </a:ext>
             </a:extLst>
           </p:cNvPr>
@@ -2619,7 +2601,7 @@
                 <a:ea typeface="Arial"/>
                 <a:cs typeface="Arial"/>
               </a:rPr>
-              <a:t>Mẫu cấu trúc · Thay bằng nội dung bài học</a:t>
+              <a:t>Ví dụ để xem thiết kế · Bài của thầy cô dùng nội dung và hình từ nguồn</a:t>
             </a:r>
           </a:p>
         </p:txBody>
@@ -2629,7 +2611,7 @@
           <p:cNvPr id="5" name="example-4">
             <a:extLst xmlns:a="http://schemas.openxmlformats.org/drawingml/2006/main">
               <a:ext uri="{FF2B5EF4-FFF2-40B4-BE49-F238E27FC236}">
-                <a16:creationId xmlns:a16="http://schemas.microsoft.com/office/drawing/2014/main" id="{01D43776-B9E0-4E41-BB34-69061660CA26}"/>
+                <a16:creationId xmlns:a16="http://schemas.microsoft.com/office/drawing/2014/main" id="{53C4464B-345C-430B-8F2B-65392380F4A6}"/>
               </a:ext>
             </a:extLst>
           </p:cNvPr>
@@ -2641,24 +2623,24 @@
         <p:spPr>
           <a:xfrm xmlns:a="http://schemas.openxmlformats.org/drawingml/2006/main">
             <a:off x="609600" y="2038350"/>
-            <a:ext cx="10972800" cy="1790700"/>
-          </a:xfrm>
-          <a:prstGeom xmlns:a="http://schemas.openxmlformats.org/drawingml/2006/main" prst="rect">
-            <a:avLst/>
-          </a:prstGeom>
-          <a:noFill xmlns:a="http://schemas.openxmlformats.org/drawingml/2006/main"/>
-          <a:ln xmlns:a="http://schemas.openxmlformats.org/drawingml/2006/main" w="0">
-            <a:noFill/>
-          </a:ln>
-        </p:spPr>
-        <p:txBody>
-          <a:bodyPr xmlns:a="http://schemas.openxmlformats.org/drawingml/2006/main">
-            <a:noAutofit/>
-          </a:bodyPr>
-          <a:lstStyle xmlns:a="http://schemas.openxmlformats.org/drawingml/2006/main"/>
-          <a:p xmlns:a="http://schemas.openxmlformats.org/drawingml/2006/main">
-            <a:pPr algn="l">
-              <a:defRPr sz="2400" b="0" i="0">
+            <a:ext cx="5219700" cy="1790700"/>
+          </a:xfrm>
+          <a:prstGeom xmlns:a="http://schemas.openxmlformats.org/drawingml/2006/main" prst="rect">
+            <a:avLst/>
+          </a:prstGeom>
+          <a:noFill xmlns:a="http://schemas.openxmlformats.org/drawingml/2006/main"/>
+          <a:ln xmlns:a="http://schemas.openxmlformats.org/drawingml/2006/main" w="0">
+            <a:noFill/>
+          </a:ln>
+        </p:spPr>
+        <p:txBody>
+          <a:bodyPr xmlns:a="http://schemas.openxmlformats.org/drawingml/2006/main">
+            <a:noAutofit/>
+          </a:bodyPr>
+          <a:lstStyle xmlns:a="http://schemas.openxmlformats.org/drawingml/2006/main"/>
+          <a:p xmlns:a="http://schemas.openxmlformats.org/drawingml/2006/main">
+            <a:pPr algn="l">
+              <a:defRPr sz="2100" b="0" i="0">
                 <a:solidFill>
                   <a:srgbClr val="112650"/>
                 </a:solidFill>
@@ -2668,7 +2650,7 @@
               </a:defRPr>
             </a:pPr>
             <a:r>
-              <a:rPr sz="2400" b="0" i="0">
+              <a:rPr sz="2100" b="0" i="0">
                 <a:solidFill>
                   <a:srgbClr val="112650"/>
                 </a:solidFill>
@@ -2676,53 +2658,7 @@
                 <a:ea typeface="Arial"/>
                 <a:cs typeface="Arial"/>
               </a:rPr>
-              <a:t>[Dữ kiện của ví dụ]</a:t>
-            </a:r>
-          </a:p>
-          <a:p xmlns:a="http://schemas.openxmlformats.org/drawingml/2006/main">
-            <a:pPr algn="l">
-              <a:defRPr sz="2400" b="0" i="0">
-                <a:solidFill>
-                  <a:srgbClr val="112650"/>
-                </a:solidFill>
-                <a:latin typeface="Arial"/>
-                <a:ea typeface="Arial"/>
-                <a:cs typeface="Arial"/>
-              </a:defRPr>
-            </a:pPr>
-            <a:r>
-              <a:rPr sz="2400" b="0" i="0">
-                <a:solidFill>
-                  <a:srgbClr val="112650"/>
-                </a:solidFill>
-                <a:latin typeface="Arial"/>
-                <a:ea typeface="Arial"/>
-                <a:cs typeface="Arial"/>
-              </a:rPr>
-              <a:t>[Bước giải đã kiểm tra]</a:t>
-            </a:r>
-          </a:p>
-          <a:p xmlns:a="http://schemas.openxmlformats.org/drawingml/2006/main">
-            <a:pPr algn="l">
-              <a:defRPr sz="2400" b="0" i="0">
-                <a:solidFill>
-                  <a:srgbClr val="112650"/>
-                </a:solidFill>
-                <a:latin typeface="Arial"/>
-                <a:ea typeface="Arial"/>
-                <a:cs typeface="Arial"/>
-              </a:defRPr>
-            </a:pPr>
-            <a:r>
-              <a:rPr sz="2400" b="0" i="0">
-                <a:solidFill>
-                  <a:srgbClr val="112650"/>
-                </a:solidFill>
-                <a:latin typeface="Arial"/>
-                <a:ea typeface="Arial"/>
-                <a:cs typeface="Arial"/>
-              </a:rPr>
-              <a:t>[Kết quả và đơn vị]</a:t>
+              <a:t>S = 4 × 3 = 12 cm²</a:t>
             </a:r>
           </a:p>
         </p:txBody>
@@ -2732,7 +2668,7 @@
           <p:cNvPr id="6" name="example-5">
             <a:extLst xmlns:a="http://schemas.openxmlformats.org/drawingml/2006/main">
               <a:ext uri="{FF2B5EF4-FFF2-40B4-BE49-F238E27FC236}">
-                <a16:creationId xmlns:a16="http://schemas.microsoft.com/office/drawing/2014/main" id="{23E6E574-79F9-42F4-A462-184E7AFAFAE2}"/>
+                <a16:creationId xmlns:a16="http://schemas.microsoft.com/office/drawing/2014/main" id="{14DECCD4-4C7C-4337-B83D-8B4170343472}"/>
               </a:ext>
             </a:extLst>
           </p:cNvPr>
@@ -2744,24 +2680,24 @@
         <p:spPr>
           <a:xfrm xmlns:a="http://schemas.openxmlformats.org/drawingml/2006/main">
             <a:off x="609600" y="4152900"/>
-            <a:ext cx="10972800" cy="1790700"/>
-          </a:xfrm>
-          <a:prstGeom xmlns:a="http://schemas.openxmlformats.org/drawingml/2006/main" prst="rect">
-            <a:avLst/>
-          </a:prstGeom>
-          <a:noFill xmlns:a="http://schemas.openxmlformats.org/drawingml/2006/main"/>
-          <a:ln xmlns:a="http://schemas.openxmlformats.org/drawingml/2006/main" w="0">
-            <a:noFill/>
-          </a:ln>
-        </p:spPr>
-        <p:txBody>
-          <a:bodyPr xmlns:a="http://schemas.openxmlformats.org/drawingml/2006/main">
-            <a:noAutofit/>
-          </a:bodyPr>
-          <a:lstStyle xmlns:a="http://schemas.openxmlformats.org/drawingml/2006/main"/>
-          <a:p xmlns:a="http://schemas.openxmlformats.org/drawingml/2006/main">
-            <a:pPr algn="l">
-              <a:defRPr sz="2400" b="0" i="1">
+            <a:ext cx="5219700" cy="1790700"/>
+          </a:xfrm>
+          <a:prstGeom xmlns:a="http://schemas.openxmlformats.org/drawingml/2006/main" prst="rect">
+            <a:avLst/>
+          </a:prstGeom>
+          <a:noFill xmlns:a="http://schemas.openxmlformats.org/drawingml/2006/main"/>
+          <a:ln xmlns:a="http://schemas.openxmlformats.org/drawingml/2006/main" w="0">
+            <a:noFill/>
+          </a:ln>
+        </p:spPr>
+        <p:txBody>
+          <a:bodyPr xmlns:a="http://schemas.openxmlformats.org/drawingml/2006/main">
+            <a:noAutofit/>
+          </a:bodyPr>
+          <a:lstStyle xmlns:a="http://schemas.openxmlformats.org/drawingml/2006/main"/>
+          <a:p xmlns:a="http://schemas.openxmlformats.org/drawingml/2006/main">
+            <a:pPr algn="l">
+              <a:defRPr sz="2100" b="0" i="1">
                 <a:solidFill>
                   <a:srgbClr val="0869F9"/>
                 </a:solidFill>
@@ -2771,7 +2707,7 @@
               </a:defRPr>
             </a:pPr>
             <a:r>
-              <a:rPr sz="2400" b="0" i="1">
+              <a:rPr sz="2100" b="0" i="1">
                 <a:solidFill>
                   <a:srgbClr val="0869F9"/>
                 </a:solidFill>
@@ -2779,61 +2715,43 @@
                 <a:ea typeface="Arial"/>
                 <a:cs typeface="Arial"/>
               </a:rPr>
-              <a:t>[Example information]</a:t>
-            </a:r>
-          </a:p>
-          <a:p xmlns:a="http://schemas.openxmlformats.org/drawingml/2006/main">
-            <a:pPr algn="l">
-              <a:defRPr sz="2400" b="0" i="1">
-                <a:solidFill>
-                  <a:srgbClr val="0869F9"/>
-                </a:solidFill>
-                <a:latin typeface="Arial"/>
-                <a:ea typeface="Arial"/>
-                <a:cs typeface="Arial"/>
-              </a:defRPr>
-            </a:pPr>
-            <a:r>
-              <a:rPr sz="2400" b="0" i="1">
-                <a:solidFill>
-                  <a:srgbClr val="0869F9"/>
-                </a:solidFill>
-                <a:latin typeface="Arial"/>
-                <a:ea typeface="Arial"/>
-                <a:cs typeface="Arial"/>
-              </a:rPr>
-              <a:t>[Checked solution step]</a:t>
-            </a:r>
-          </a:p>
-          <a:p xmlns:a="http://schemas.openxmlformats.org/drawingml/2006/main">
-            <a:pPr algn="l">
-              <a:defRPr sz="2400" b="0" i="1">
-                <a:solidFill>
-                  <a:srgbClr val="0869F9"/>
-                </a:solidFill>
-                <a:latin typeface="Arial"/>
-                <a:ea typeface="Arial"/>
-                <a:cs typeface="Arial"/>
-              </a:defRPr>
-            </a:pPr>
-            <a:r>
-              <a:rPr sz="2400" b="0" i="1">
-                <a:solidFill>
-                  <a:srgbClr val="0869F9"/>
-                </a:solidFill>
-                <a:latin typeface="Arial"/>
-                <a:ea typeface="Arial"/>
-                <a:cs typeface="Arial"/>
-              </a:rPr>
-              <a:t>[Result and unit]</a:t>
-            </a:r>
-          </a:p>
-        </p:txBody>
-      </p:sp>
+              <a:t>Area = 4 × 3 = 12 cm²</a:t>
+            </a:r>
+          </a:p>
+        </p:txBody>
+      </p:sp>
+      <p:pic>
+        <p:nvPicPr>
+          <p:cNvPr id="14" name=""/>
+          <p:cNvPicPr>
+            <a:picLocks xmlns:a="http://schemas.openxmlformats.org/drawingml/2006/main" noChangeAspect="1"/>
+          </p:cNvPicPr>
+          <p:nvPr/>
+        </p:nvPicPr>
+        <p:blipFill>
+          <a:blip xmlns:r="http://schemas.openxmlformats.org/officeDocument/2006/relationships" xmlns:a="http://schemas.openxmlformats.org/drawingml/2006/main" r:embed="R37902c7eae524f8d">
+            <a:extLst>
+              <a:ext uri="{96DAC541-7B7A-43D3-8B79-37D633B846F1}">
+                <asvg:svgBlip xmlns:asvg="http://schemas.microsoft.com/office/drawing/2016/SVG/main" r:embed="R2b0644d1b6474ce9"/>
+              </a:ext>
+            </a:extLst>
+          </a:blip>
+          <a:stretch xmlns:a="http://schemas.openxmlformats.org/drawingml/2006/main"/>
+        </p:blipFill>
+        <p:spPr>
+          <a:xfrm xmlns:a="http://schemas.openxmlformats.org/drawingml/2006/main">
+            <a:off x="6629400" y="2038350"/>
+            <a:ext cx="4953000" cy="3905250"/>
+          </a:xfrm>
+          <a:prstGeom xmlns:a="http://schemas.openxmlformats.org/drawingml/2006/main" prst="rect">
+            <a:avLst/>
+          </a:prstGeom>
+        </p:spPr>
+      </p:pic>
     </p:spTree>
     <p:extLst>
       <p:ext uri="{BB962C8B-B14F-4D97-AF65-F5344CB8AC3E}">
-        <p14:creationId xmlns:p14="http://schemas.microsoft.com/office/powerpoint/2010/main" val="2018535205"/>
+        <p14:creationId xmlns:p14="http://schemas.microsoft.com/office/powerpoint/2010/main" val="1464928962"/>
       </p:ext>
     </p:extLst>
   </p:cSld>
@@ -2861,10 +2779,10 @@
       </p:grpSpPr>
       <p:sp>
         <p:nvSpPr>
-          <p:cNvPr id="7" name="practice-0">
-            <a:extLst xmlns:a="http://schemas.openxmlformats.org/drawingml/2006/main">
-              <a:ext uri="{FF2B5EF4-FFF2-40B4-BE49-F238E27FC236}">
-                <a16:creationId xmlns:a16="http://schemas.microsoft.com/office/drawing/2014/main" id="{A97EEBBD-03C6-4E52-A297-E04517BCDB3D}"/>
+          <p:cNvPr id="8" name="practice-0">
+            <a:extLst xmlns:a="http://schemas.openxmlformats.org/drawingml/2006/main">
+              <a:ext uri="{FF2B5EF4-FFF2-40B4-BE49-F238E27FC236}">
+                <a16:creationId xmlns:a16="http://schemas.microsoft.com/office/drawing/2014/main" id="{E479A8CA-7879-417A-9A96-210C346293B5}"/>
               </a:ext>
             </a:extLst>
           </p:cNvPr>
@@ -2911,7 +2829,7 @@
                 <a:ea typeface="Arial"/>
                 <a:cs typeface="Arial"/>
               </a:rPr>
-              <a:t>BiliClass   /   Môn học của thầy cô   /   10–12</a:t>
+              <a:t>BiliClass   /   Toán · ví dụ minh họa   /   </a:t>
             </a:r>
           </a:p>
         </p:txBody>
@@ -2921,7 +2839,7 @@
           <p:cNvPr id="2" name="practice-1">
             <a:extLst xmlns:a="http://schemas.openxmlformats.org/drawingml/2006/main">
               <a:ext uri="{FF2B5EF4-FFF2-40B4-BE49-F238E27FC236}">
-                <a16:creationId xmlns:a16="http://schemas.microsoft.com/office/drawing/2014/main" id="{2161310A-84DA-4F65-B851-4CF58F54CBDC}"/>
+                <a16:creationId xmlns:a16="http://schemas.microsoft.com/office/drawing/2014/main" id="{669FD7FE-F682-4962-9887-FCE4D0F8C336}"/>
               </a:ext>
             </a:extLst>
           </p:cNvPr>
@@ -2968,7 +2886,7 @@
                 <a:ea typeface="Arial"/>
                 <a:cs typeface="Arial"/>
               </a:rPr>
-              <a:t>Mẫu bài giảng song ngữ</a:t>
+              <a:t>Diện tích hình chữ nhật</a:t>
             </a:r>
           </a:p>
         </p:txBody>
@@ -2978,7 +2896,7 @@
           <p:cNvPr id="3" name="practice-2">
             <a:extLst xmlns:a="http://schemas.openxmlformats.org/drawingml/2006/main">
               <a:ext uri="{FF2B5EF4-FFF2-40B4-BE49-F238E27FC236}">
-                <a16:creationId xmlns:a16="http://schemas.microsoft.com/office/drawing/2014/main" id="{E136AB6A-961F-47F8-A8BB-2F7E35CDCB12}"/>
+                <a16:creationId xmlns:a16="http://schemas.microsoft.com/office/drawing/2014/main" id="{9C95EEE0-009A-4DF5-810D-CACA49B11ED0}"/>
               </a:ext>
             </a:extLst>
           </p:cNvPr>
@@ -3035,7 +2953,7 @@
           <p:cNvPr id="4" name="practice-3">
             <a:extLst xmlns:a="http://schemas.openxmlformats.org/drawingml/2006/main">
               <a:ext uri="{FF2B5EF4-FFF2-40B4-BE49-F238E27FC236}">
-                <a16:creationId xmlns:a16="http://schemas.microsoft.com/office/drawing/2014/main" id="{125371CB-FD8C-4C19-83A0-C7DAD7D28726}"/>
+                <a16:creationId xmlns:a16="http://schemas.microsoft.com/office/drawing/2014/main" id="{8226C46F-848A-4D98-AAD1-39953A9FF763}"/>
               </a:ext>
             </a:extLst>
           </p:cNvPr>
@@ -3082,7 +3000,7 @@
                 <a:ea typeface="Arial"/>
                 <a:cs typeface="Arial"/>
               </a:rPr>
-              <a:t>Mẫu cấu trúc · Thay bằng nội dung bài học</a:t>
+              <a:t>Ví dụ để xem thiết kế · Bài của thầy cô dùng nội dung và hình từ nguồn</a:t>
             </a:r>
           </a:p>
         </p:txBody>
@@ -3092,7 +3010,7 @@
           <p:cNvPr id="5" name="practice-4">
             <a:extLst xmlns:a="http://schemas.openxmlformats.org/drawingml/2006/main">
               <a:ext uri="{FF2B5EF4-FFF2-40B4-BE49-F238E27FC236}">
-                <a16:creationId xmlns:a16="http://schemas.microsoft.com/office/drawing/2014/main" id="{36427096-F72E-43AF-A33F-B93E220913F2}"/>
+                <a16:creationId xmlns:a16="http://schemas.microsoft.com/office/drawing/2014/main" id="{1FCBCCEE-985E-4336-B8DA-24513F082AFE}"/>
               </a:ext>
             </a:extLst>
           </p:cNvPr>
@@ -3104,24 +3022,24 @@
         <p:spPr>
           <a:xfrm xmlns:a="http://schemas.openxmlformats.org/drawingml/2006/main">
             <a:off x="609600" y="2038350"/>
-            <a:ext cx="10972800" cy="1790700"/>
-          </a:xfrm>
-          <a:prstGeom xmlns:a="http://schemas.openxmlformats.org/drawingml/2006/main" prst="rect">
-            <a:avLst/>
-          </a:prstGeom>
-          <a:noFill xmlns:a="http://schemas.openxmlformats.org/drawingml/2006/main"/>
-          <a:ln xmlns:a="http://schemas.openxmlformats.org/drawingml/2006/main" w="0">
-            <a:noFill/>
-          </a:ln>
-        </p:spPr>
-        <p:txBody>
-          <a:bodyPr xmlns:a="http://schemas.openxmlformats.org/drawingml/2006/main">
-            <a:noAutofit/>
-          </a:bodyPr>
-          <a:lstStyle xmlns:a="http://schemas.openxmlformats.org/drawingml/2006/main"/>
-          <a:p xmlns:a="http://schemas.openxmlformats.org/drawingml/2006/main">
-            <a:pPr algn="l">
-              <a:defRPr sz="2550" b="0" i="0">
+            <a:ext cx="5219700" cy="1790700"/>
+          </a:xfrm>
+          <a:prstGeom xmlns:a="http://schemas.openxmlformats.org/drawingml/2006/main" prst="rect">
+            <a:avLst/>
+          </a:prstGeom>
+          <a:noFill xmlns:a="http://schemas.openxmlformats.org/drawingml/2006/main"/>
+          <a:ln xmlns:a="http://schemas.openxmlformats.org/drawingml/2006/main" w="0">
+            <a:noFill/>
+          </a:ln>
+        </p:spPr>
+        <p:txBody>
+          <a:bodyPr xmlns:a="http://schemas.openxmlformats.org/drawingml/2006/main">
+            <a:noAutofit/>
+          </a:bodyPr>
+          <a:lstStyle xmlns:a="http://schemas.openxmlformats.org/drawingml/2006/main"/>
+          <a:p xmlns:a="http://schemas.openxmlformats.org/drawingml/2006/main">
+            <a:pPr algn="l">
+              <a:defRPr sz="2100" b="0" i="0">
                 <a:solidFill>
                   <a:srgbClr val="112650"/>
                 </a:solidFill>
@@ -3131,7 +3049,7 @@
               </a:defRPr>
             </a:pPr>
             <a:r>
-              <a:rPr sz="2550" b="0" i="0">
+              <a:rPr sz="2100" b="0" i="0">
                 <a:solidFill>
                   <a:srgbClr val="112650"/>
                 </a:solidFill>
@@ -3139,53 +3057,7 @@
                 <a:ea typeface="Arial"/>
                 <a:cs typeface="Arial"/>
               </a:rPr>
-              <a:t>[Yêu cầu của bài tập]</a:t>
-            </a:r>
-          </a:p>
-          <a:p xmlns:a="http://schemas.openxmlformats.org/drawingml/2006/main">
-            <a:pPr algn="l">
-              <a:defRPr sz="2550" b="0" i="0">
-                <a:solidFill>
-                  <a:srgbClr val="112650"/>
-                </a:solidFill>
-                <a:latin typeface="Arial"/>
-                <a:ea typeface="Arial"/>
-                <a:cs typeface="Arial"/>
-              </a:defRPr>
-            </a:pPr>
-            <a:r>
-              <a:rPr sz="2550" b="0" i="0">
-                <a:solidFill>
-                  <a:srgbClr val="112650"/>
-                </a:solidFill>
-                <a:latin typeface="Arial"/>
-                <a:ea typeface="Arial"/>
-                <a:cs typeface="Arial"/>
-              </a:rPr>
-              <a:t>[Dữ kiện được cung cấp]</a:t>
-            </a:r>
-          </a:p>
-          <a:p xmlns:a="http://schemas.openxmlformats.org/drawingml/2006/main">
-            <a:pPr algn="l">
-              <a:defRPr sz="2550" b="0" i="0">
-                <a:solidFill>
-                  <a:srgbClr val="112650"/>
-                </a:solidFill>
-                <a:latin typeface="Arial"/>
-                <a:ea typeface="Arial"/>
-                <a:cs typeface="Arial"/>
-              </a:defRPr>
-            </a:pPr>
-            <a:r>
-              <a:rPr sz="2550" b="0" i="0">
-                <a:solidFill>
-                  <a:srgbClr val="112650"/>
-                </a:solidFill>
-                <a:latin typeface="Arial"/>
-                <a:ea typeface="Arial"/>
-                <a:cs typeface="Arial"/>
-              </a:rPr>
-              <a:t>[Cách học sinh trình bày kết quả]</a:t>
+              <a:t>Tính diện tích hình 6 cm × 2 cm.</a:t>
             </a:r>
           </a:p>
         </p:txBody>
@@ -3195,7 +3067,7 @@
           <p:cNvPr id="6" name="practice-5">
             <a:extLst xmlns:a="http://schemas.openxmlformats.org/drawingml/2006/main">
               <a:ext uri="{FF2B5EF4-FFF2-40B4-BE49-F238E27FC236}">
-                <a16:creationId xmlns:a16="http://schemas.microsoft.com/office/drawing/2014/main" id="{0919A74C-39C7-4AB1-9CB6-B3D4BEF1B6EA}"/>
+                <a16:creationId xmlns:a16="http://schemas.microsoft.com/office/drawing/2014/main" id="{B5AFB608-E129-4C70-B388-88D54A8D1FD8}"/>
               </a:ext>
             </a:extLst>
           </p:cNvPr>
@@ -3207,24 +3079,24 @@
         <p:spPr>
           <a:xfrm xmlns:a="http://schemas.openxmlformats.org/drawingml/2006/main">
             <a:off x="609600" y="4152900"/>
-            <a:ext cx="10972800" cy="1790700"/>
-          </a:xfrm>
-          <a:prstGeom xmlns:a="http://schemas.openxmlformats.org/drawingml/2006/main" prst="rect">
-            <a:avLst/>
-          </a:prstGeom>
-          <a:noFill xmlns:a="http://schemas.openxmlformats.org/drawingml/2006/main"/>
-          <a:ln xmlns:a="http://schemas.openxmlformats.org/drawingml/2006/main" w="0">
-            <a:noFill/>
-          </a:ln>
-        </p:spPr>
-        <p:txBody>
-          <a:bodyPr xmlns:a="http://schemas.openxmlformats.org/drawingml/2006/main">
-            <a:noAutofit/>
-          </a:bodyPr>
-          <a:lstStyle xmlns:a="http://schemas.openxmlformats.org/drawingml/2006/main"/>
-          <a:p xmlns:a="http://schemas.openxmlformats.org/drawingml/2006/main">
-            <a:pPr algn="l">
-              <a:defRPr sz="2550" b="0" i="1">
+            <a:ext cx="5219700" cy="1790700"/>
+          </a:xfrm>
+          <a:prstGeom xmlns:a="http://schemas.openxmlformats.org/drawingml/2006/main" prst="rect">
+            <a:avLst/>
+          </a:prstGeom>
+          <a:noFill xmlns:a="http://schemas.openxmlformats.org/drawingml/2006/main"/>
+          <a:ln xmlns:a="http://schemas.openxmlformats.org/drawingml/2006/main" w="0">
+            <a:noFill/>
+          </a:ln>
+        </p:spPr>
+        <p:txBody>
+          <a:bodyPr xmlns:a="http://schemas.openxmlformats.org/drawingml/2006/main">
+            <a:noAutofit/>
+          </a:bodyPr>
+          <a:lstStyle xmlns:a="http://schemas.openxmlformats.org/drawingml/2006/main"/>
+          <a:p xmlns:a="http://schemas.openxmlformats.org/drawingml/2006/main">
+            <a:pPr algn="l">
+              <a:defRPr sz="2100" b="0" i="1">
                 <a:solidFill>
                   <a:srgbClr val="0869F9"/>
                 </a:solidFill>
@@ -3234,7 +3106,7 @@
               </a:defRPr>
             </a:pPr>
             <a:r>
-              <a:rPr sz="2550" b="0" i="1">
+              <a:rPr sz="2100" b="0" i="1">
                 <a:solidFill>
                   <a:srgbClr val="0869F9"/>
                 </a:solidFill>
@@ -3242,61 +3114,43 @@
                 <a:ea typeface="Arial"/>
                 <a:cs typeface="Arial"/>
               </a:rPr>
-              <a:t>[Task instructions]</a:t>
-            </a:r>
-          </a:p>
-          <a:p xmlns:a="http://schemas.openxmlformats.org/drawingml/2006/main">
-            <a:pPr algn="l">
-              <a:defRPr sz="2550" b="0" i="1">
-                <a:solidFill>
-                  <a:srgbClr val="0869F9"/>
-                </a:solidFill>
-                <a:latin typeface="Arial"/>
-                <a:ea typeface="Arial"/>
-                <a:cs typeface="Arial"/>
-              </a:defRPr>
-            </a:pPr>
-            <a:r>
-              <a:rPr sz="2550" b="0" i="1">
-                <a:solidFill>
-                  <a:srgbClr val="0869F9"/>
-                </a:solidFill>
-                <a:latin typeface="Arial"/>
-                <a:ea typeface="Arial"/>
-                <a:cs typeface="Arial"/>
-              </a:rPr>
-              <a:t>[Given information]</a:t>
-            </a:r>
-          </a:p>
-          <a:p xmlns:a="http://schemas.openxmlformats.org/drawingml/2006/main">
-            <a:pPr algn="l">
-              <a:defRPr sz="2550" b="0" i="1">
-                <a:solidFill>
-                  <a:srgbClr val="0869F9"/>
-                </a:solidFill>
-                <a:latin typeface="Arial"/>
-                <a:ea typeface="Arial"/>
-                <a:cs typeface="Arial"/>
-              </a:defRPr>
-            </a:pPr>
-            <a:r>
-              <a:rPr sz="2550" b="0" i="1">
-                <a:solidFill>
-                  <a:srgbClr val="0869F9"/>
-                </a:solidFill>
-                <a:latin typeface="Arial"/>
-                <a:ea typeface="Arial"/>
-                <a:cs typeface="Arial"/>
-              </a:rPr>
-              <a:t>[How students present their results]</a:t>
-            </a:r>
-          </a:p>
-        </p:txBody>
-      </p:sp>
+              <a:t>Find the area of a 6 cm × 2 cm rectangle.</a:t>
+            </a:r>
+          </a:p>
+        </p:txBody>
+      </p:sp>
+      <p:pic>
+        <p:nvPicPr>
+          <p:cNvPr id="14" name=""/>
+          <p:cNvPicPr>
+            <a:picLocks xmlns:a="http://schemas.openxmlformats.org/drawingml/2006/main" noChangeAspect="1"/>
+          </p:cNvPicPr>
+          <p:nvPr/>
+        </p:nvPicPr>
+        <p:blipFill>
+          <a:blip xmlns:r="http://schemas.openxmlformats.org/officeDocument/2006/relationships" xmlns:a="http://schemas.openxmlformats.org/drawingml/2006/main" r:embed="Reb58525b3ef04f26">
+            <a:extLst>
+              <a:ext uri="{96DAC541-7B7A-43D3-8B79-37D633B846F1}">
+                <asvg:svgBlip xmlns:asvg="http://schemas.microsoft.com/office/drawing/2016/SVG/main" r:embed="Rcf653095ce034531"/>
+              </a:ext>
+            </a:extLst>
+          </a:blip>
+          <a:stretch xmlns:a="http://schemas.openxmlformats.org/drawingml/2006/main"/>
+        </p:blipFill>
+        <p:spPr>
+          <a:xfrm xmlns:a="http://schemas.openxmlformats.org/drawingml/2006/main">
+            <a:off x="6629400" y="2038350"/>
+            <a:ext cx="4953000" cy="3905250"/>
+          </a:xfrm>
+          <a:prstGeom xmlns:a="http://schemas.openxmlformats.org/drawingml/2006/main" prst="rect">
+            <a:avLst/>
+          </a:prstGeom>
+        </p:spPr>
+      </p:pic>
     </p:spTree>
     <p:extLst>
       <p:ext uri="{BB962C8B-B14F-4D97-AF65-F5344CB8AC3E}">
-        <p14:creationId xmlns:p14="http://schemas.microsoft.com/office/powerpoint/2010/main" val="1019308644"/>
+        <p14:creationId xmlns:p14="http://schemas.microsoft.com/office/powerpoint/2010/main" val="1523885764"/>
       </p:ext>
     </p:extLst>
   </p:cSld>
@@ -3324,10 +3178,10 @@
       </p:grpSpPr>
       <p:sp>
         <p:nvSpPr>
-          <p:cNvPr id="7" name="question-0">
-            <a:extLst xmlns:a="http://schemas.openxmlformats.org/drawingml/2006/main">
-              <a:ext uri="{FF2B5EF4-FFF2-40B4-BE49-F238E27FC236}">
-                <a16:creationId xmlns:a16="http://schemas.microsoft.com/office/drawing/2014/main" id="{CF90A860-35D7-4303-ABCF-C607018E8FCF}"/>
+          <p:cNvPr id="8" name="question-0">
+            <a:extLst xmlns:a="http://schemas.openxmlformats.org/drawingml/2006/main">
+              <a:ext uri="{FF2B5EF4-FFF2-40B4-BE49-F238E27FC236}">
+                <a16:creationId xmlns:a16="http://schemas.microsoft.com/office/drawing/2014/main" id="{F20652A8-636B-4D17-A970-8FCF6C10AFA4}"/>
               </a:ext>
             </a:extLst>
           </p:cNvPr>
@@ -3374,7 +3228,7 @@
                 <a:ea typeface="Arial"/>
                 <a:cs typeface="Arial"/>
               </a:rPr>
-              <a:t>BiliClass   /   Môn học của thầy cô   /   10–12</a:t>
+              <a:t>BiliClass   /   Toán · ví dụ minh họa   /   </a:t>
             </a:r>
           </a:p>
         </p:txBody>
@@ -3384,7 +3238,7 @@
           <p:cNvPr id="2" name="question-1">
             <a:extLst xmlns:a="http://schemas.openxmlformats.org/drawingml/2006/main">
               <a:ext uri="{FF2B5EF4-FFF2-40B4-BE49-F238E27FC236}">
-                <a16:creationId xmlns:a16="http://schemas.microsoft.com/office/drawing/2014/main" id="{71FAEE5F-5F90-4FFD-BCDC-D5D9AF9F7A67}"/>
+                <a16:creationId xmlns:a16="http://schemas.microsoft.com/office/drawing/2014/main" id="{E73D3D08-2E02-414A-B1D9-6CF93BD88D00}"/>
               </a:ext>
             </a:extLst>
           </p:cNvPr>
@@ -3431,7 +3285,7 @@
                 <a:ea typeface="Arial"/>
                 <a:cs typeface="Arial"/>
               </a:rPr>
-              <a:t>Mẫu bài giảng song ngữ</a:t>
+              <a:t>Diện tích hình chữ nhật</a:t>
             </a:r>
           </a:p>
         </p:txBody>
@@ -3441,7 +3295,7 @@
           <p:cNvPr id="3" name="question-2">
             <a:extLst xmlns:a="http://schemas.openxmlformats.org/drawingml/2006/main">
               <a:ext uri="{FF2B5EF4-FFF2-40B4-BE49-F238E27FC236}">
-                <a16:creationId xmlns:a16="http://schemas.microsoft.com/office/drawing/2014/main" id="{78FFB206-4B7D-404F-8000-D94AD513B22B}"/>
+                <a16:creationId xmlns:a16="http://schemas.microsoft.com/office/drawing/2014/main" id="{067BE4F9-E8B6-4E7B-A20D-1CBA38C6F16C}"/>
               </a:ext>
             </a:extLst>
           </p:cNvPr>
@@ -3498,7 +3352,7 @@
           <p:cNvPr id="4" name="question-3">
             <a:extLst xmlns:a="http://schemas.openxmlformats.org/drawingml/2006/main">
               <a:ext uri="{FF2B5EF4-FFF2-40B4-BE49-F238E27FC236}">
-                <a16:creationId xmlns:a16="http://schemas.microsoft.com/office/drawing/2014/main" id="{B4B900CC-E130-474B-83F9-923362BB29D7}"/>
+                <a16:creationId xmlns:a16="http://schemas.microsoft.com/office/drawing/2014/main" id="{F2DCAA9A-5D74-4B33-8E2D-5A73566C9BA9}"/>
               </a:ext>
             </a:extLst>
           </p:cNvPr>
@@ -3545,7 +3399,7 @@
                 <a:ea typeface="Arial"/>
                 <a:cs typeface="Arial"/>
               </a:rPr>
-              <a:t>Mẫu cấu trúc · Thay bằng nội dung bài học</a:t>
+              <a:t>Ví dụ để xem thiết kế · Bài của thầy cô dùng nội dung và hình từ nguồn</a:t>
             </a:r>
           </a:p>
         </p:txBody>
@@ -3555,7 +3409,7 @@
           <p:cNvPr id="5" name="question-4">
             <a:extLst xmlns:a="http://schemas.openxmlformats.org/drawingml/2006/main">
               <a:ext uri="{FF2B5EF4-FFF2-40B4-BE49-F238E27FC236}">
-                <a16:creationId xmlns:a16="http://schemas.microsoft.com/office/drawing/2014/main" id="{3F820176-526A-4A56-A137-909D50B3F6E3}"/>
+                <a16:creationId xmlns:a16="http://schemas.microsoft.com/office/drawing/2014/main" id="{2CF456E0-FD4F-4DF4-BBCE-3D015BF5E5A2}"/>
               </a:ext>
             </a:extLst>
           </p:cNvPr>
@@ -3567,24 +3421,24 @@
         <p:spPr>
           <a:xfrm xmlns:a="http://schemas.openxmlformats.org/drawingml/2006/main">
             <a:off x="609600" y="2038350"/>
-            <a:ext cx="10972800" cy="1790700"/>
-          </a:xfrm>
-          <a:prstGeom xmlns:a="http://schemas.openxmlformats.org/drawingml/2006/main" prst="rect">
-            <a:avLst/>
-          </a:prstGeom>
-          <a:noFill xmlns:a="http://schemas.openxmlformats.org/drawingml/2006/main"/>
-          <a:ln xmlns:a="http://schemas.openxmlformats.org/drawingml/2006/main" w="0">
-            <a:noFill/>
-          </a:ln>
-        </p:spPr>
-        <p:txBody>
-          <a:bodyPr xmlns:a="http://schemas.openxmlformats.org/drawingml/2006/main">
-            <a:noAutofit/>
-          </a:bodyPr>
-          <a:lstStyle xmlns:a="http://schemas.openxmlformats.org/drawingml/2006/main"/>
-          <a:p xmlns:a="http://schemas.openxmlformats.org/drawingml/2006/main">
-            <a:pPr algn="l">
-              <a:defRPr sz="3000" b="1" i="0">
+            <a:ext cx="5219700" cy="1790700"/>
+          </a:xfrm>
+          <a:prstGeom xmlns:a="http://schemas.openxmlformats.org/drawingml/2006/main" prst="rect">
+            <a:avLst/>
+          </a:prstGeom>
+          <a:noFill xmlns:a="http://schemas.openxmlformats.org/drawingml/2006/main"/>
+          <a:ln xmlns:a="http://schemas.openxmlformats.org/drawingml/2006/main" w="0">
+            <a:noFill/>
+          </a:ln>
+        </p:spPr>
+        <p:txBody>
+          <a:bodyPr xmlns:a="http://schemas.openxmlformats.org/drawingml/2006/main">
+            <a:noAutofit/>
+          </a:bodyPr>
+          <a:lstStyle xmlns:a="http://schemas.openxmlformats.org/drawingml/2006/main"/>
+          <a:p xmlns:a="http://schemas.openxmlformats.org/drawingml/2006/main">
+            <a:pPr algn="l">
+              <a:defRPr sz="2100" b="1" i="0">
                 <a:solidFill>
                   <a:srgbClr val="112650"/>
                 </a:solidFill>
@@ -3594,7 +3448,7 @@
               </a:defRPr>
             </a:pPr>
             <a:r>
-              <a:rPr sz="3000" b="1" i="0">
+              <a:rPr sz="2100" b="1" i="0">
                 <a:solidFill>
                   <a:srgbClr val="112650"/>
                 </a:solidFill>
@@ -3602,30 +3456,7 @@
                 <a:ea typeface="Arial"/>
                 <a:cs typeface="Arial"/>
               </a:rPr>
-              <a:t>[Câu hỏi cho cả lớp]</a:t>
-            </a:r>
-          </a:p>
-          <a:p xmlns:a="http://schemas.openxmlformats.org/drawingml/2006/main">
-            <a:pPr algn="l">
-              <a:defRPr sz="3000" b="1" i="0">
-                <a:solidFill>
-                  <a:srgbClr val="112650"/>
-                </a:solidFill>
-                <a:latin typeface="Arial"/>
-                <a:ea typeface="Arial"/>
-                <a:cs typeface="Arial"/>
-              </a:defRPr>
-            </a:pPr>
-            <a:r>
-              <a:rPr sz="3000" b="1" i="0">
-                <a:solidFill>
-                  <a:srgbClr val="112650"/>
-                </a:solidFill>
-                <a:latin typeface="Arial"/>
-                <a:ea typeface="Arial"/>
-                <a:cs typeface="Arial"/>
-              </a:rPr>
-              <a:t>[Điều học sinh cần giải thích]</a:t>
+              <a:t>Vì sao đơn vị diện tích là cm²?</a:t>
             </a:r>
           </a:p>
         </p:txBody>
@@ -3635,7 +3466,7 @@
           <p:cNvPr id="6" name="question-5">
             <a:extLst xmlns:a="http://schemas.openxmlformats.org/drawingml/2006/main">
               <a:ext uri="{FF2B5EF4-FFF2-40B4-BE49-F238E27FC236}">
-                <a16:creationId xmlns:a16="http://schemas.microsoft.com/office/drawing/2014/main" id="{3EA4201B-DB71-43C6-821E-55CA09CC21BD}"/>
+                <a16:creationId xmlns:a16="http://schemas.microsoft.com/office/drawing/2014/main" id="{86A62845-5157-4714-AE26-427A2A9550B3}"/>
               </a:ext>
             </a:extLst>
           </p:cNvPr>
@@ -3647,24 +3478,24 @@
         <p:spPr>
           <a:xfrm xmlns:a="http://schemas.openxmlformats.org/drawingml/2006/main">
             <a:off x="609600" y="4152900"/>
-            <a:ext cx="10972800" cy="1790700"/>
-          </a:xfrm>
-          <a:prstGeom xmlns:a="http://schemas.openxmlformats.org/drawingml/2006/main" prst="rect">
-            <a:avLst/>
-          </a:prstGeom>
-          <a:noFill xmlns:a="http://schemas.openxmlformats.org/drawingml/2006/main"/>
-          <a:ln xmlns:a="http://schemas.openxmlformats.org/drawingml/2006/main" w="0">
-            <a:noFill/>
-          </a:ln>
-        </p:spPr>
-        <p:txBody>
-          <a:bodyPr xmlns:a="http://schemas.openxmlformats.org/drawingml/2006/main">
-            <a:noAutofit/>
-          </a:bodyPr>
-          <a:lstStyle xmlns:a="http://schemas.openxmlformats.org/drawingml/2006/main"/>
-          <a:p xmlns:a="http://schemas.openxmlformats.org/drawingml/2006/main">
-            <a:pPr algn="l">
-              <a:defRPr sz="3000" b="1" i="1">
+            <a:ext cx="5219700" cy="1790700"/>
+          </a:xfrm>
+          <a:prstGeom xmlns:a="http://schemas.openxmlformats.org/drawingml/2006/main" prst="rect">
+            <a:avLst/>
+          </a:prstGeom>
+          <a:noFill xmlns:a="http://schemas.openxmlformats.org/drawingml/2006/main"/>
+          <a:ln xmlns:a="http://schemas.openxmlformats.org/drawingml/2006/main" w="0">
+            <a:noFill/>
+          </a:ln>
+        </p:spPr>
+        <p:txBody>
+          <a:bodyPr xmlns:a="http://schemas.openxmlformats.org/drawingml/2006/main">
+            <a:noAutofit/>
+          </a:bodyPr>
+          <a:lstStyle xmlns:a="http://schemas.openxmlformats.org/drawingml/2006/main"/>
+          <a:p xmlns:a="http://schemas.openxmlformats.org/drawingml/2006/main">
+            <a:pPr algn="l">
+              <a:defRPr sz="2100" b="1" i="1">
                 <a:solidFill>
                   <a:srgbClr val="0869F9"/>
                 </a:solidFill>
@@ -3674,7 +3505,7 @@
               </a:defRPr>
             </a:pPr>
             <a:r>
-              <a:rPr sz="3000" b="1" i="1">
+              <a:rPr sz="2100" b="1" i="1">
                 <a:solidFill>
                   <a:srgbClr val="0869F9"/>
                 </a:solidFill>
@@ -3682,38 +3513,43 @@
                 <a:ea typeface="Arial"/>
                 <a:cs typeface="Arial"/>
               </a:rPr>
-              <a:t>[Question for the class]</a:t>
-            </a:r>
-          </a:p>
-          <a:p xmlns:a="http://schemas.openxmlformats.org/drawingml/2006/main">
-            <a:pPr algn="l">
-              <a:defRPr sz="3000" b="1" i="1">
-                <a:solidFill>
-                  <a:srgbClr val="0869F9"/>
-                </a:solidFill>
-                <a:latin typeface="Arial"/>
-                <a:ea typeface="Arial"/>
-                <a:cs typeface="Arial"/>
-              </a:defRPr>
-            </a:pPr>
-            <a:r>
-              <a:rPr sz="3000" b="1" i="1">
-                <a:solidFill>
-                  <a:srgbClr val="0869F9"/>
-                </a:solidFill>
-                <a:latin typeface="Arial"/>
-                <a:ea typeface="Arial"/>
-                <a:cs typeface="Arial"/>
-              </a:rPr>
-              <a:t>[What students should explain]</a:t>
-            </a:r>
-          </a:p>
-        </p:txBody>
-      </p:sp>
+              <a:t>Why is area measured in cm²?</a:t>
+            </a:r>
+          </a:p>
+        </p:txBody>
+      </p:sp>
+      <p:pic>
+        <p:nvPicPr>
+          <p:cNvPr id="14" name=""/>
+          <p:cNvPicPr>
+            <a:picLocks xmlns:a="http://schemas.openxmlformats.org/drawingml/2006/main" noChangeAspect="1"/>
+          </p:cNvPicPr>
+          <p:nvPr/>
+        </p:nvPicPr>
+        <p:blipFill>
+          <a:blip xmlns:r="http://schemas.openxmlformats.org/officeDocument/2006/relationships" xmlns:a="http://schemas.openxmlformats.org/drawingml/2006/main" r:embed="Ra9b97b75bc7d4209">
+            <a:extLst>
+              <a:ext uri="{96DAC541-7B7A-43D3-8B79-37D633B846F1}">
+                <asvg:svgBlip xmlns:asvg="http://schemas.microsoft.com/office/drawing/2016/SVG/main" r:embed="Rfab8120456d54c1d"/>
+              </a:ext>
+            </a:extLst>
+          </a:blip>
+          <a:stretch xmlns:a="http://schemas.openxmlformats.org/drawingml/2006/main"/>
+        </p:blipFill>
+        <p:spPr>
+          <a:xfrm xmlns:a="http://schemas.openxmlformats.org/drawingml/2006/main">
+            <a:off x="6629400" y="2038350"/>
+            <a:ext cx="4953000" cy="3905250"/>
+          </a:xfrm>
+          <a:prstGeom xmlns:a="http://schemas.openxmlformats.org/drawingml/2006/main" prst="rect">
+            <a:avLst/>
+          </a:prstGeom>
+        </p:spPr>
+      </p:pic>
     </p:spTree>
     <p:extLst>
       <p:ext uri="{BB962C8B-B14F-4D97-AF65-F5344CB8AC3E}">
-        <p14:creationId xmlns:p14="http://schemas.microsoft.com/office/powerpoint/2010/main" val="1185516547"/>
+        <p14:creationId xmlns:p14="http://schemas.microsoft.com/office/powerpoint/2010/main" val="198032140"/>
       </p:ext>
     </p:extLst>
   </p:cSld>
@@ -3741,10 +3577,10 @@
       </p:grpSpPr>
       <p:sp>
         <p:nvSpPr>
-          <p:cNvPr id="7" name="check-0">
-            <a:extLst xmlns:a="http://schemas.openxmlformats.org/drawingml/2006/main">
-              <a:ext uri="{FF2B5EF4-FFF2-40B4-BE49-F238E27FC236}">
-                <a16:creationId xmlns:a16="http://schemas.microsoft.com/office/drawing/2014/main" id="{E833D42B-36DD-4AA6-9AAA-37B66F99B391}"/>
+          <p:cNvPr id="8" name="check-0">
+            <a:extLst xmlns:a="http://schemas.openxmlformats.org/drawingml/2006/main">
+              <a:ext uri="{FF2B5EF4-FFF2-40B4-BE49-F238E27FC236}">
+                <a16:creationId xmlns:a16="http://schemas.microsoft.com/office/drawing/2014/main" id="{5F1E3CD9-0E15-412C-AC2B-7A386B5F2545}"/>
               </a:ext>
             </a:extLst>
           </p:cNvPr>
@@ -3791,7 +3627,7 @@
                 <a:ea typeface="Arial"/>
                 <a:cs typeface="Arial"/>
               </a:rPr>
-              <a:t>BiliClass   /   Môn học của thầy cô   /   10–12</a:t>
+              <a:t>BiliClass   /   Toán · ví dụ minh họa   /   </a:t>
             </a:r>
           </a:p>
         </p:txBody>
@@ -3801,7 +3637,7 @@
           <p:cNvPr id="2" name="check-1">
             <a:extLst xmlns:a="http://schemas.openxmlformats.org/drawingml/2006/main">
               <a:ext uri="{FF2B5EF4-FFF2-40B4-BE49-F238E27FC236}">
-                <a16:creationId xmlns:a16="http://schemas.microsoft.com/office/drawing/2014/main" id="{7288095C-B4B2-4C70-886D-B77FF76AF79C}"/>
+                <a16:creationId xmlns:a16="http://schemas.microsoft.com/office/drawing/2014/main" id="{BF48BDD3-F886-4063-AC9E-A7BD3F713417}"/>
               </a:ext>
             </a:extLst>
           </p:cNvPr>
@@ -3848,7 +3684,7 @@
                 <a:ea typeface="Arial"/>
                 <a:cs typeface="Arial"/>
               </a:rPr>
-              <a:t>Mẫu bài giảng song ngữ</a:t>
+              <a:t>Diện tích hình chữ nhật</a:t>
             </a:r>
           </a:p>
         </p:txBody>
@@ -3858,7 +3694,7 @@
           <p:cNvPr id="3" name="check-2">
             <a:extLst xmlns:a="http://schemas.openxmlformats.org/drawingml/2006/main">
               <a:ext uri="{FF2B5EF4-FFF2-40B4-BE49-F238E27FC236}">
-                <a16:creationId xmlns:a16="http://schemas.microsoft.com/office/drawing/2014/main" id="{8E821D2D-8324-45C4-82BE-D884FF98030D}"/>
+                <a16:creationId xmlns:a16="http://schemas.microsoft.com/office/drawing/2014/main" id="{39ABC1BF-38C7-458D-93AA-E924C86816D4}"/>
               </a:ext>
             </a:extLst>
           </p:cNvPr>
@@ -3915,7 +3751,7 @@
           <p:cNvPr id="4" name="check-3">
             <a:extLst xmlns:a="http://schemas.openxmlformats.org/drawingml/2006/main">
               <a:ext uri="{FF2B5EF4-FFF2-40B4-BE49-F238E27FC236}">
-                <a16:creationId xmlns:a16="http://schemas.microsoft.com/office/drawing/2014/main" id="{63B2CA67-B106-4767-8A9C-54890379D75A}"/>
+                <a16:creationId xmlns:a16="http://schemas.microsoft.com/office/drawing/2014/main" id="{315030E9-344A-4DF8-A3E4-6EEC315B1260}"/>
               </a:ext>
             </a:extLst>
           </p:cNvPr>
@@ -3962,7 +3798,7 @@
                 <a:ea typeface="Arial"/>
                 <a:cs typeface="Arial"/>
               </a:rPr>
-              <a:t>Mẫu cấu trúc · Thay bằng nội dung bài học</a:t>
+              <a:t>Ví dụ để xem thiết kế · Bài của thầy cô dùng nội dung và hình từ nguồn</a:t>
             </a:r>
           </a:p>
         </p:txBody>
@@ -3972,7 +3808,7 @@
           <p:cNvPr id="5" name="check-4">
             <a:extLst xmlns:a="http://schemas.openxmlformats.org/drawingml/2006/main">
               <a:ext uri="{FF2B5EF4-FFF2-40B4-BE49-F238E27FC236}">
-                <a16:creationId xmlns:a16="http://schemas.microsoft.com/office/drawing/2014/main" id="{49E57F22-DBD5-4348-9619-0469FF77E4D6}"/>
+                <a16:creationId xmlns:a16="http://schemas.microsoft.com/office/drawing/2014/main" id="{9F55685C-934B-4B28-ABC0-C64924FAF28F}"/>
               </a:ext>
             </a:extLst>
           </p:cNvPr>
@@ -3984,24 +3820,24 @@
         <p:spPr>
           <a:xfrm xmlns:a="http://schemas.openxmlformats.org/drawingml/2006/main">
             <a:off x="609600" y="2038350"/>
-            <a:ext cx="10972800" cy="1790700"/>
-          </a:xfrm>
-          <a:prstGeom xmlns:a="http://schemas.openxmlformats.org/drawingml/2006/main" prst="rect">
-            <a:avLst/>
-          </a:prstGeom>
-          <a:noFill xmlns:a="http://schemas.openxmlformats.org/drawingml/2006/main"/>
-          <a:ln xmlns:a="http://schemas.openxmlformats.org/drawingml/2006/main" w="0">
-            <a:noFill/>
-          </a:ln>
-        </p:spPr>
-        <p:txBody>
-          <a:bodyPr xmlns:a="http://schemas.openxmlformats.org/drawingml/2006/main">
-            <a:noAutofit/>
-          </a:bodyPr>
-          <a:lstStyle xmlns:a="http://schemas.openxmlformats.org/drawingml/2006/main"/>
-          <a:p xmlns:a="http://schemas.openxmlformats.org/drawingml/2006/main">
-            <a:pPr algn="l">
-              <a:defRPr sz="2550" b="0" i="0">
+            <a:ext cx="5219700" cy="1790700"/>
+          </a:xfrm>
+          <a:prstGeom xmlns:a="http://schemas.openxmlformats.org/drawingml/2006/main" prst="rect">
+            <a:avLst/>
+          </a:prstGeom>
+          <a:noFill xmlns:a="http://schemas.openxmlformats.org/drawingml/2006/main"/>
+          <a:ln xmlns:a="http://schemas.openxmlformats.org/drawingml/2006/main" w="0">
+            <a:noFill/>
+          </a:ln>
+        </p:spPr>
+        <p:txBody>
+          <a:bodyPr xmlns:a="http://schemas.openxmlformats.org/drawingml/2006/main">
+            <a:noAutofit/>
+          </a:bodyPr>
+          <a:lstStyle xmlns:a="http://schemas.openxmlformats.org/drawingml/2006/main"/>
+          <a:p xmlns:a="http://schemas.openxmlformats.org/drawingml/2006/main">
+            <a:pPr algn="l">
+              <a:defRPr sz="2100" b="0" i="0">
                 <a:solidFill>
                   <a:srgbClr val="112650"/>
                 </a:solidFill>
@@ -4011,7 +3847,7 @@
               </a:defRPr>
             </a:pPr>
             <a:r>
-              <a:rPr sz="2550" b="0" i="0">
+              <a:rPr sz="2100" b="0" i="0">
                 <a:solidFill>
                   <a:srgbClr val="112650"/>
                 </a:solidFill>
@@ -4019,30 +3855,7 @@
                 <a:ea typeface="Arial"/>
                 <a:cs typeface="Arial"/>
               </a:rPr>
-              <a:t>[Câu hỏi kiểm tra]</a:t>
-            </a:r>
-          </a:p>
-          <a:p xmlns:a="http://schemas.openxmlformats.org/drawingml/2006/main">
-            <a:pPr algn="l">
-              <a:defRPr sz="2550" b="0" i="0">
-                <a:solidFill>
-                  <a:srgbClr val="112650"/>
-                </a:solidFill>
-                <a:latin typeface="Arial"/>
-                <a:ea typeface="Arial"/>
-                <a:cs typeface="Arial"/>
-              </a:defRPr>
-            </a:pPr>
-            <a:r>
-              <a:rPr sz="2550" b="0" i="0">
-                <a:solidFill>
-                  <a:srgbClr val="112650"/>
-                </a:solidFill>
-                <a:latin typeface="Arial"/>
-                <a:ea typeface="Arial"/>
-                <a:cs typeface="Arial"/>
-              </a:rPr>
-              <a:t>[Nội dung học sinh cần trả lời]</a:t>
+              <a:t>Nêu hai kích thước cần biết.</a:t>
             </a:r>
           </a:p>
         </p:txBody>
@@ -4052,7 +3865,7 @@
           <p:cNvPr id="6" name="check-5">
             <a:extLst xmlns:a="http://schemas.openxmlformats.org/drawingml/2006/main">
               <a:ext uri="{FF2B5EF4-FFF2-40B4-BE49-F238E27FC236}">
-                <a16:creationId xmlns:a16="http://schemas.microsoft.com/office/drawing/2014/main" id="{220A4C5C-5927-4EBB-A5A9-CF3936235AB8}"/>
+                <a16:creationId xmlns:a16="http://schemas.microsoft.com/office/drawing/2014/main" id="{8F74EE3D-40FD-440D-AC97-4EA51761DEC6}"/>
               </a:ext>
             </a:extLst>
           </p:cNvPr>
@@ -4064,24 +3877,24 @@
         <p:spPr>
           <a:xfrm xmlns:a="http://schemas.openxmlformats.org/drawingml/2006/main">
             <a:off x="609600" y="4152900"/>
-            <a:ext cx="10972800" cy="1790700"/>
-          </a:xfrm>
-          <a:prstGeom xmlns:a="http://schemas.openxmlformats.org/drawingml/2006/main" prst="rect">
-            <a:avLst/>
-          </a:prstGeom>
-          <a:noFill xmlns:a="http://schemas.openxmlformats.org/drawingml/2006/main"/>
-          <a:ln xmlns:a="http://schemas.openxmlformats.org/drawingml/2006/main" w="0">
-            <a:noFill/>
-          </a:ln>
-        </p:spPr>
-        <p:txBody>
-          <a:bodyPr xmlns:a="http://schemas.openxmlformats.org/drawingml/2006/main">
-            <a:noAutofit/>
-          </a:bodyPr>
-          <a:lstStyle xmlns:a="http://schemas.openxmlformats.org/drawingml/2006/main"/>
-          <a:p xmlns:a="http://schemas.openxmlformats.org/drawingml/2006/main">
-            <a:pPr algn="l">
-              <a:defRPr sz="2550" b="0" i="1">
+            <a:ext cx="5219700" cy="1790700"/>
+          </a:xfrm>
+          <a:prstGeom xmlns:a="http://schemas.openxmlformats.org/drawingml/2006/main" prst="rect">
+            <a:avLst/>
+          </a:prstGeom>
+          <a:noFill xmlns:a="http://schemas.openxmlformats.org/drawingml/2006/main"/>
+          <a:ln xmlns:a="http://schemas.openxmlformats.org/drawingml/2006/main" w="0">
+            <a:noFill/>
+          </a:ln>
+        </p:spPr>
+        <p:txBody>
+          <a:bodyPr xmlns:a="http://schemas.openxmlformats.org/drawingml/2006/main">
+            <a:noAutofit/>
+          </a:bodyPr>
+          <a:lstStyle xmlns:a="http://schemas.openxmlformats.org/drawingml/2006/main"/>
+          <a:p xmlns:a="http://schemas.openxmlformats.org/drawingml/2006/main">
+            <a:pPr algn="l">
+              <a:defRPr sz="2100" b="0" i="1">
                 <a:solidFill>
                   <a:srgbClr val="0869F9"/>
                 </a:solidFill>
@@ -4091,7 +3904,7 @@
               </a:defRPr>
             </a:pPr>
             <a:r>
-              <a:rPr sz="2550" b="0" i="1">
+              <a:rPr sz="2100" b="0" i="1">
                 <a:solidFill>
                   <a:srgbClr val="0869F9"/>
                 </a:solidFill>
@@ -4099,38 +3912,43 @@
                 <a:ea typeface="Arial"/>
                 <a:cs typeface="Arial"/>
               </a:rPr>
-              <a:t>[Check question]</a:t>
-            </a:r>
-          </a:p>
-          <a:p xmlns:a="http://schemas.openxmlformats.org/drawingml/2006/main">
-            <a:pPr algn="l">
-              <a:defRPr sz="2550" b="0" i="1">
-                <a:solidFill>
-                  <a:srgbClr val="0869F9"/>
-                </a:solidFill>
-                <a:latin typeface="Arial"/>
-                <a:ea typeface="Arial"/>
-                <a:cs typeface="Arial"/>
-              </a:defRPr>
-            </a:pPr>
-            <a:r>
-              <a:rPr sz="2550" b="0" i="1">
-                <a:solidFill>
-                  <a:srgbClr val="0869F9"/>
-                </a:solidFill>
-                <a:latin typeface="Arial"/>
-                <a:ea typeface="Arial"/>
-                <a:cs typeface="Arial"/>
-              </a:rPr>
-              <a:t>[What students should answer]</a:t>
-            </a:r>
-          </a:p>
-        </p:txBody>
-      </p:sp>
+              <a:t>Name the two dimensions you need.</a:t>
+            </a:r>
+          </a:p>
+        </p:txBody>
+      </p:sp>
+      <p:pic>
+        <p:nvPicPr>
+          <p:cNvPr id="14" name=""/>
+          <p:cNvPicPr>
+            <a:picLocks xmlns:a="http://schemas.openxmlformats.org/drawingml/2006/main" noChangeAspect="1"/>
+          </p:cNvPicPr>
+          <p:nvPr/>
+        </p:nvPicPr>
+        <p:blipFill>
+          <a:blip xmlns:r="http://schemas.openxmlformats.org/officeDocument/2006/relationships" xmlns:a="http://schemas.openxmlformats.org/drawingml/2006/main" r:embed="R4cf8279d9a224b4a">
+            <a:extLst>
+              <a:ext uri="{96DAC541-7B7A-43D3-8B79-37D633B846F1}">
+                <asvg:svgBlip xmlns:asvg="http://schemas.microsoft.com/office/drawing/2016/SVG/main" r:embed="R9180cea99a6c4853"/>
+              </a:ext>
+            </a:extLst>
+          </a:blip>
+          <a:stretch xmlns:a="http://schemas.openxmlformats.org/drawingml/2006/main"/>
+        </p:blipFill>
+        <p:spPr>
+          <a:xfrm xmlns:a="http://schemas.openxmlformats.org/drawingml/2006/main">
+            <a:off x="6629400" y="2038350"/>
+            <a:ext cx="4953000" cy="3905250"/>
+          </a:xfrm>
+          <a:prstGeom xmlns:a="http://schemas.openxmlformats.org/drawingml/2006/main" prst="rect">
+            <a:avLst/>
+          </a:prstGeom>
+        </p:spPr>
+      </p:pic>
     </p:spTree>
     <p:extLst>
       <p:ext uri="{BB962C8B-B14F-4D97-AF65-F5344CB8AC3E}">
-        <p14:creationId xmlns:p14="http://schemas.microsoft.com/office/powerpoint/2010/main" val="117244153"/>
+        <p14:creationId xmlns:p14="http://schemas.microsoft.com/office/powerpoint/2010/main" val="106330542"/>
       </p:ext>
     </p:extLst>
   </p:cSld>
@@ -4158,10 +3976,10 @@
       </p:grpSpPr>
       <p:sp>
         <p:nvSpPr>
-          <p:cNvPr id="7" name="summary-0">
-            <a:extLst xmlns:a="http://schemas.openxmlformats.org/drawingml/2006/main">
-              <a:ext uri="{FF2B5EF4-FFF2-40B4-BE49-F238E27FC236}">
-                <a16:creationId xmlns:a16="http://schemas.microsoft.com/office/drawing/2014/main" id="{85DFFAC1-05B3-498E-81BD-0F1390BA903C}"/>
+          <p:cNvPr id="8" name="summary-0">
+            <a:extLst xmlns:a="http://schemas.openxmlformats.org/drawingml/2006/main">
+              <a:ext uri="{FF2B5EF4-FFF2-40B4-BE49-F238E27FC236}">
+                <a16:creationId xmlns:a16="http://schemas.microsoft.com/office/drawing/2014/main" id="{7E5AD16E-D343-49BA-A29B-7D9A922718D6}"/>
               </a:ext>
             </a:extLst>
           </p:cNvPr>
@@ -4208,7 +4026,7 @@
                 <a:ea typeface="Arial"/>
                 <a:cs typeface="Arial"/>
               </a:rPr>
-              <a:t>BiliClass   /   Môn học của thầy cô   /   10–12</a:t>
+              <a:t>BiliClass   /   Toán · ví dụ minh họa   /   </a:t>
             </a:r>
           </a:p>
         </p:txBody>
@@ -4218,7 +4036,7 @@
           <p:cNvPr id="2" name="summary-1">
             <a:extLst xmlns:a="http://schemas.openxmlformats.org/drawingml/2006/main">
               <a:ext uri="{FF2B5EF4-FFF2-40B4-BE49-F238E27FC236}">
-                <a16:creationId xmlns:a16="http://schemas.microsoft.com/office/drawing/2014/main" id="{3E995F78-F3A6-4D11-BD2C-D1CC377EB2ED}"/>
+                <a16:creationId xmlns:a16="http://schemas.microsoft.com/office/drawing/2014/main" id="{10DA2D16-F823-4557-AAC7-85FC7D724CAC}"/>
               </a:ext>
             </a:extLst>
           </p:cNvPr>
@@ -4265,7 +4083,7 @@
                 <a:ea typeface="Arial"/>
                 <a:cs typeface="Arial"/>
               </a:rPr>
-              <a:t>Mẫu bài giảng song ngữ</a:t>
+              <a:t>Diện tích hình chữ nhật</a:t>
             </a:r>
           </a:p>
         </p:txBody>
@@ -4275,7 +4093,7 @@
           <p:cNvPr id="3" name="summary-2">
             <a:extLst xmlns:a="http://schemas.openxmlformats.org/drawingml/2006/main">
               <a:ext uri="{FF2B5EF4-FFF2-40B4-BE49-F238E27FC236}">
-                <a16:creationId xmlns:a16="http://schemas.microsoft.com/office/drawing/2014/main" id="{98D99B2B-C5C4-44B5-860E-88CB41CD738E}"/>
+                <a16:creationId xmlns:a16="http://schemas.microsoft.com/office/drawing/2014/main" id="{5EF32131-40D0-4CA6-8B2D-8E43F67A3C0C}"/>
               </a:ext>
             </a:extLst>
           </p:cNvPr>
@@ -4332,7 +4150,7 @@
           <p:cNvPr id="4" name="summary-3">
             <a:extLst xmlns:a="http://schemas.openxmlformats.org/drawingml/2006/main">
               <a:ext uri="{FF2B5EF4-FFF2-40B4-BE49-F238E27FC236}">
-                <a16:creationId xmlns:a16="http://schemas.microsoft.com/office/drawing/2014/main" id="{16550551-268C-4F4F-AB50-26FB9368C53C}"/>
+                <a16:creationId xmlns:a16="http://schemas.microsoft.com/office/drawing/2014/main" id="{C7406E13-9AEA-43EC-B922-2B37857E422A}"/>
               </a:ext>
             </a:extLst>
           </p:cNvPr>
@@ -4379,7 +4197,7 @@
                 <a:ea typeface="Arial"/>
                 <a:cs typeface="Arial"/>
               </a:rPr>
-              <a:t>Mẫu cấu trúc · Thay bằng nội dung bài học</a:t>
+              <a:t>Ví dụ để xem thiết kế · Bài của thầy cô dùng nội dung và hình từ nguồn</a:t>
             </a:r>
           </a:p>
         </p:txBody>
@@ -4389,7 +4207,7 @@
           <p:cNvPr id="5" name="summary-4">
             <a:extLst xmlns:a="http://schemas.openxmlformats.org/drawingml/2006/main">
               <a:ext uri="{FF2B5EF4-FFF2-40B4-BE49-F238E27FC236}">
-                <a16:creationId xmlns:a16="http://schemas.microsoft.com/office/drawing/2014/main" id="{687B9430-EAF5-4909-9767-921ED6DF7E9C}"/>
+                <a16:creationId xmlns:a16="http://schemas.microsoft.com/office/drawing/2014/main" id="{7F3D7EEA-4B2A-489A-B7F1-365BAD400335}"/>
               </a:ext>
             </a:extLst>
           </p:cNvPr>
@@ -4401,24 +4219,24 @@
         <p:spPr>
           <a:xfrm xmlns:a="http://schemas.openxmlformats.org/drawingml/2006/main">
             <a:off x="609600" y="2038350"/>
-            <a:ext cx="10972800" cy="1790700"/>
-          </a:xfrm>
-          <a:prstGeom xmlns:a="http://schemas.openxmlformats.org/drawingml/2006/main" prst="rect">
-            <a:avLst/>
-          </a:prstGeom>
-          <a:noFill xmlns:a="http://schemas.openxmlformats.org/drawingml/2006/main"/>
-          <a:ln xmlns:a="http://schemas.openxmlformats.org/drawingml/2006/main" w="0">
-            <a:noFill/>
-          </a:ln>
-        </p:spPr>
-        <p:txBody>
-          <a:bodyPr xmlns:a="http://schemas.openxmlformats.org/drawingml/2006/main">
-            <a:noAutofit/>
-          </a:bodyPr>
-          <a:lstStyle xmlns:a="http://schemas.openxmlformats.org/drawingml/2006/main"/>
-          <a:p xmlns:a="http://schemas.openxmlformats.org/drawingml/2006/main">
-            <a:pPr algn="l">
-              <a:defRPr sz="2550" b="0" i="0">
+            <a:ext cx="5219700" cy="1790700"/>
+          </a:xfrm>
+          <a:prstGeom xmlns:a="http://schemas.openxmlformats.org/drawingml/2006/main" prst="rect">
+            <a:avLst/>
+          </a:prstGeom>
+          <a:noFill xmlns:a="http://schemas.openxmlformats.org/drawingml/2006/main"/>
+          <a:ln xmlns:a="http://schemas.openxmlformats.org/drawingml/2006/main" w="0">
+            <a:noFill/>
+          </a:ln>
+        </p:spPr>
+        <p:txBody>
+          <a:bodyPr xmlns:a="http://schemas.openxmlformats.org/drawingml/2006/main">
+            <a:noAutofit/>
+          </a:bodyPr>
+          <a:lstStyle xmlns:a="http://schemas.openxmlformats.org/drawingml/2006/main"/>
+          <a:p xmlns:a="http://schemas.openxmlformats.org/drawingml/2006/main">
+            <a:pPr algn="l">
+              <a:defRPr sz="2100" b="0" i="0">
                 <a:solidFill>
                   <a:srgbClr val="112650"/>
                 </a:solidFill>
@@ -4428,7 +4246,7 @@
               </a:defRPr>
             </a:pPr>
             <a:r>
-              <a:rPr sz="2550" b="0" i="0">
+              <a:rPr sz="2100" b="0" i="0">
                 <a:solidFill>
                   <a:srgbClr val="112650"/>
                 </a:solidFill>
@@ -4436,30 +4254,7 @@
                 <a:ea typeface="Arial"/>
                 <a:cs typeface="Arial"/>
               </a:rPr>
-              <a:t>[Ý chính cần ghi nhớ]</a:t>
-            </a:r>
-          </a:p>
-          <a:p xmlns:a="http://schemas.openxmlformats.org/drawingml/2006/main">
-            <a:pPr algn="l">
-              <a:defRPr sz="2550" b="0" i="0">
-                <a:solidFill>
-                  <a:srgbClr val="112650"/>
-                </a:solidFill>
-                <a:latin typeface="Arial"/>
-                <a:ea typeface="Arial"/>
-                <a:cs typeface="Arial"/>
-              </a:defRPr>
-            </a:pPr>
-            <a:r>
-              <a:rPr sz="2550" b="0" i="0">
-                <a:solidFill>
-                  <a:srgbClr val="112650"/>
-                </a:solidFill>
-                <a:latin typeface="Arial"/>
-                <a:ea typeface="Arial"/>
-                <a:cs typeface="Arial"/>
-              </a:rPr>
-              <a:t>[Điều học sinh cần giải thích cuối tiết]</a:t>
+              <a:t>Diện tích = chiều dài × chiều rộng.</a:t>
             </a:r>
           </a:p>
         </p:txBody>
@@ -4469,7 +4264,7 @@
           <p:cNvPr id="6" name="summary-5">
             <a:extLst xmlns:a="http://schemas.openxmlformats.org/drawingml/2006/main">
               <a:ext uri="{FF2B5EF4-FFF2-40B4-BE49-F238E27FC236}">
-                <a16:creationId xmlns:a16="http://schemas.microsoft.com/office/drawing/2014/main" id="{B1693107-C7CE-4F92-9558-11FAD03D9BE2}"/>
+                <a16:creationId xmlns:a16="http://schemas.microsoft.com/office/drawing/2014/main" id="{87C34563-CB73-4BDA-8A43-626B5220FC94}"/>
               </a:ext>
             </a:extLst>
           </p:cNvPr>
@@ -4481,24 +4276,24 @@
         <p:spPr>
           <a:xfrm xmlns:a="http://schemas.openxmlformats.org/drawingml/2006/main">
             <a:off x="609600" y="4152900"/>
-            <a:ext cx="10972800" cy="1790700"/>
-          </a:xfrm>
-          <a:prstGeom xmlns:a="http://schemas.openxmlformats.org/drawingml/2006/main" prst="rect">
-            <a:avLst/>
-          </a:prstGeom>
-          <a:noFill xmlns:a="http://schemas.openxmlformats.org/drawingml/2006/main"/>
-          <a:ln xmlns:a="http://schemas.openxmlformats.org/drawingml/2006/main" w="0">
-            <a:noFill/>
-          </a:ln>
-        </p:spPr>
-        <p:txBody>
-          <a:bodyPr xmlns:a="http://schemas.openxmlformats.org/drawingml/2006/main">
-            <a:noAutofit/>
-          </a:bodyPr>
-          <a:lstStyle xmlns:a="http://schemas.openxmlformats.org/drawingml/2006/main"/>
-          <a:p xmlns:a="http://schemas.openxmlformats.org/drawingml/2006/main">
-            <a:pPr algn="l">
-              <a:defRPr sz="2550" b="0" i="1">
+            <a:ext cx="5219700" cy="1790700"/>
+          </a:xfrm>
+          <a:prstGeom xmlns:a="http://schemas.openxmlformats.org/drawingml/2006/main" prst="rect">
+            <a:avLst/>
+          </a:prstGeom>
+          <a:noFill xmlns:a="http://schemas.openxmlformats.org/drawingml/2006/main"/>
+          <a:ln xmlns:a="http://schemas.openxmlformats.org/drawingml/2006/main" w="0">
+            <a:noFill/>
+          </a:ln>
+        </p:spPr>
+        <p:txBody>
+          <a:bodyPr xmlns:a="http://schemas.openxmlformats.org/drawingml/2006/main">
+            <a:noAutofit/>
+          </a:bodyPr>
+          <a:lstStyle xmlns:a="http://schemas.openxmlformats.org/drawingml/2006/main"/>
+          <a:p xmlns:a="http://schemas.openxmlformats.org/drawingml/2006/main">
+            <a:pPr algn="l">
+              <a:defRPr sz="2100" b="0" i="1">
                 <a:solidFill>
                   <a:srgbClr val="0869F9"/>
                 </a:solidFill>
@@ -4508,7 +4303,7 @@
               </a:defRPr>
             </a:pPr>
             <a:r>
-              <a:rPr sz="2550" b="0" i="1">
+              <a:rPr sz="2100" b="0" i="1">
                 <a:solidFill>
                   <a:srgbClr val="0869F9"/>
                 </a:solidFill>
@@ -4516,38 +4311,43 @@
                 <a:ea typeface="Arial"/>
                 <a:cs typeface="Arial"/>
               </a:rPr>
-              <a:t>[Key idea to remember]</a:t>
-            </a:r>
-          </a:p>
-          <a:p xmlns:a="http://schemas.openxmlformats.org/drawingml/2006/main">
-            <a:pPr algn="l">
-              <a:defRPr sz="2550" b="0" i="1">
-                <a:solidFill>
-                  <a:srgbClr val="0869F9"/>
-                </a:solidFill>
-                <a:latin typeface="Arial"/>
-                <a:ea typeface="Arial"/>
-                <a:cs typeface="Arial"/>
-              </a:defRPr>
-            </a:pPr>
-            <a:r>
-              <a:rPr sz="2550" b="0" i="1">
-                <a:solidFill>
-                  <a:srgbClr val="0869F9"/>
-                </a:solidFill>
-                <a:latin typeface="Arial"/>
-                <a:ea typeface="Arial"/>
-                <a:cs typeface="Arial"/>
-              </a:rPr>
-              <a:t>[What students should explain at the end]</a:t>
-            </a:r>
-          </a:p>
-        </p:txBody>
-      </p:sp>
+              <a:t>Area = length × width.</a:t>
+            </a:r>
+          </a:p>
+        </p:txBody>
+      </p:sp>
+      <p:pic>
+        <p:nvPicPr>
+          <p:cNvPr id="14" name=""/>
+          <p:cNvPicPr>
+            <a:picLocks xmlns:a="http://schemas.openxmlformats.org/drawingml/2006/main" noChangeAspect="1"/>
+          </p:cNvPicPr>
+          <p:nvPr/>
+        </p:nvPicPr>
+        <p:blipFill>
+          <a:blip xmlns:r="http://schemas.openxmlformats.org/officeDocument/2006/relationships" xmlns:a="http://schemas.openxmlformats.org/drawingml/2006/main" r:embed="R8b50fc79bcd942f8">
+            <a:extLst>
+              <a:ext uri="{96DAC541-7B7A-43D3-8B79-37D633B846F1}">
+                <asvg:svgBlip xmlns:asvg="http://schemas.microsoft.com/office/drawing/2016/SVG/main" r:embed="R790a72d1efee48be"/>
+              </a:ext>
+            </a:extLst>
+          </a:blip>
+          <a:stretch xmlns:a="http://schemas.openxmlformats.org/drawingml/2006/main"/>
+        </p:blipFill>
+        <p:spPr>
+          <a:xfrm xmlns:a="http://schemas.openxmlformats.org/drawingml/2006/main">
+            <a:off x="6629400" y="2038350"/>
+            <a:ext cx="4953000" cy="3905250"/>
+          </a:xfrm>
+          <a:prstGeom xmlns:a="http://schemas.openxmlformats.org/drawingml/2006/main" prst="rect">
+            <a:avLst/>
+          </a:prstGeom>
+        </p:spPr>
+      </p:pic>
     </p:spTree>
     <p:extLst>
       <p:ext uri="{BB962C8B-B14F-4D97-AF65-F5344CB8AC3E}">
-        <p14:creationId xmlns:p14="http://schemas.microsoft.com/office/powerpoint/2010/main" val="745759191"/>
+        <p14:creationId xmlns:p14="http://schemas.microsoft.com/office/powerpoint/2010/main" val="1951190514"/>
       </p:ext>
     </p:extLst>
   </p:cSld>
@@ -4575,10 +4375,10 @@
       </p:grpSpPr>
       <p:sp>
         <p:nvSpPr>
-          <p:cNvPr id="7" name="goal-0">
-            <a:extLst xmlns:a="http://schemas.openxmlformats.org/drawingml/2006/main">
-              <a:ext uri="{FF2B5EF4-FFF2-40B4-BE49-F238E27FC236}">
-                <a16:creationId xmlns:a16="http://schemas.microsoft.com/office/drawing/2014/main" id="{E0199145-A110-435A-B78E-9C8DE89D664F}"/>
+          <p:cNvPr id="8" name="goal-0">
+            <a:extLst xmlns:a="http://schemas.openxmlformats.org/drawingml/2006/main">
+              <a:ext uri="{FF2B5EF4-FFF2-40B4-BE49-F238E27FC236}">
+                <a16:creationId xmlns:a16="http://schemas.microsoft.com/office/drawing/2014/main" id="{D8EE0309-C951-4F1E-9C62-D6B55F248640}"/>
               </a:ext>
             </a:extLst>
           </p:cNvPr>
@@ -4625,7 +4425,7 @@
                 <a:ea typeface="Arial"/>
                 <a:cs typeface="Arial"/>
               </a:rPr>
-              <a:t>BiliClass   /   Môn học của thầy cô   /   10–12</a:t>
+              <a:t>BiliClass   /   Toán · ví dụ minh họa   /   </a:t>
             </a:r>
           </a:p>
         </p:txBody>
@@ -4635,7 +4435,7 @@
           <p:cNvPr id="2" name="goal-1">
             <a:extLst xmlns:a="http://schemas.openxmlformats.org/drawingml/2006/main">
               <a:ext uri="{FF2B5EF4-FFF2-40B4-BE49-F238E27FC236}">
-                <a16:creationId xmlns:a16="http://schemas.microsoft.com/office/drawing/2014/main" id="{461AFBE3-4BE4-427F-A451-E6FE0CCD1293}"/>
+                <a16:creationId xmlns:a16="http://schemas.microsoft.com/office/drawing/2014/main" id="{D0E9FFDB-3F93-4735-8D70-C0B87D2039FF}"/>
               </a:ext>
             </a:extLst>
           </p:cNvPr>
@@ -4682,7 +4482,7 @@
                 <a:ea typeface="Arial"/>
                 <a:cs typeface="Arial"/>
               </a:rPr>
-              <a:t>Mẫu bài giảng song ngữ</a:t>
+              <a:t>Diện tích hình chữ nhật</a:t>
             </a:r>
           </a:p>
         </p:txBody>
@@ -4692,7 +4492,7 @@
           <p:cNvPr id="3" name="goal-2">
             <a:extLst xmlns:a="http://schemas.openxmlformats.org/drawingml/2006/main">
               <a:ext uri="{FF2B5EF4-FFF2-40B4-BE49-F238E27FC236}">
-                <a16:creationId xmlns:a16="http://schemas.microsoft.com/office/drawing/2014/main" id="{290480AA-EDCB-4A35-82B0-571FA71730C3}"/>
+                <a16:creationId xmlns:a16="http://schemas.microsoft.com/office/drawing/2014/main" id="{82204016-7208-4956-90F0-548E5383DD4A}"/>
               </a:ext>
             </a:extLst>
           </p:cNvPr>
@@ -4749,7 +4549,7 @@
           <p:cNvPr id="4" name="goal-3">
             <a:extLst xmlns:a="http://schemas.openxmlformats.org/drawingml/2006/main">
               <a:ext uri="{FF2B5EF4-FFF2-40B4-BE49-F238E27FC236}">
-                <a16:creationId xmlns:a16="http://schemas.microsoft.com/office/drawing/2014/main" id="{139F871E-D2C7-4A3F-B143-E91F9ED440C5}"/>
+                <a16:creationId xmlns:a16="http://schemas.microsoft.com/office/drawing/2014/main" id="{3A7C5A80-8FD0-4975-845D-3D2393656515}"/>
               </a:ext>
             </a:extLst>
           </p:cNvPr>
@@ -4796,7 +4596,7 @@
                 <a:ea typeface="Arial"/>
                 <a:cs typeface="Arial"/>
               </a:rPr>
-              <a:t>Mẫu cấu trúc · Thay bằng nội dung bài học</a:t>
+              <a:t>Ví dụ để xem thiết kế · Bài của thầy cô dùng nội dung và hình từ nguồn</a:t>
             </a:r>
           </a:p>
         </p:txBody>
@@ -4806,7 +4606,7 @@
           <p:cNvPr id="5" name="goal-4">
             <a:extLst xmlns:a="http://schemas.openxmlformats.org/drawingml/2006/main">
               <a:ext uri="{FF2B5EF4-FFF2-40B4-BE49-F238E27FC236}">
-                <a16:creationId xmlns:a16="http://schemas.microsoft.com/office/drawing/2014/main" id="{7D17495F-2CC9-4DF5-9461-686BC827D940}"/>
+                <a16:creationId xmlns:a16="http://schemas.microsoft.com/office/drawing/2014/main" id="{D2EB09CD-5728-4AB7-8AF3-F44C8E3ADC39}"/>
               </a:ext>
             </a:extLst>
           </p:cNvPr>
@@ -4818,24 +4618,24 @@
         <p:spPr>
           <a:xfrm xmlns:a="http://schemas.openxmlformats.org/drawingml/2006/main">
             <a:off x="609600" y="2038350"/>
-            <a:ext cx="10972800" cy="1790700"/>
-          </a:xfrm>
-          <a:prstGeom xmlns:a="http://schemas.openxmlformats.org/drawingml/2006/main" prst="rect">
-            <a:avLst/>
-          </a:prstGeom>
-          <a:noFill xmlns:a="http://schemas.openxmlformats.org/drawingml/2006/main"/>
-          <a:ln xmlns:a="http://schemas.openxmlformats.org/drawingml/2006/main" w="0">
-            <a:noFill/>
-          </a:ln>
-        </p:spPr>
-        <p:txBody>
-          <a:bodyPr xmlns:a="http://schemas.openxmlformats.org/drawingml/2006/main">
-            <a:noAutofit/>
-          </a:bodyPr>
-          <a:lstStyle xmlns:a="http://schemas.openxmlformats.org/drawingml/2006/main"/>
-          <a:p xmlns:a="http://schemas.openxmlformats.org/drawingml/2006/main">
-            <a:pPr algn="l">
-              <a:defRPr sz="2550" b="0" i="0">
+            <a:ext cx="5219700" cy="1790700"/>
+          </a:xfrm>
+          <a:prstGeom xmlns:a="http://schemas.openxmlformats.org/drawingml/2006/main" prst="rect">
+            <a:avLst/>
+          </a:prstGeom>
+          <a:noFill xmlns:a="http://schemas.openxmlformats.org/drawingml/2006/main"/>
+          <a:ln xmlns:a="http://schemas.openxmlformats.org/drawingml/2006/main" w="0">
+            <a:noFill/>
+          </a:ln>
+        </p:spPr>
+        <p:txBody>
+          <a:bodyPr xmlns:a="http://schemas.openxmlformats.org/drawingml/2006/main">
+            <a:noAutofit/>
+          </a:bodyPr>
+          <a:lstStyle xmlns:a="http://schemas.openxmlformats.org/drawingml/2006/main"/>
+          <a:p xmlns:a="http://schemas.openxmlformats.org/drawingml/2006/main">
+            <a:pPr algn="l">
+              <a:defRPr sz="2100" b="0" i="0">
                 <a:solidFill>
                   <a:srgbClr val="112650"/>
                 </a:solidFill>
@@ -4845,7 +4645,7 @@
               </a:defRPr>
             </a:pPr>
             <a:r>
-              <a:rPr sz="2550" b="0" i="0">
+              <a:rPr sz="2100" b="0" i="0">
                 <a:solidFill>
                   <a:srgbClr val="112650"/>
                 </a:solidFill>
@@ -4853,30 +4653,7 @@
                 <a:ea typeface="Arial"/>
                 <a:cs typeface="Arial"/>
               </a:rPr>
-              <a:t>[Điều học sinh cần hiểu]</a:t>
-            </a:r>
-          </a:p>
-          <a:p xmlns:a="http://schemas.openxmlformats.org/drawingml/2006/main">
-            <a:pPr algn="l">
-              <a:defRPr sz="2550" b="0" i="0">
-                <a:solidFill>
-                  <a:srgbClr val="112650"/>
-                </a:solidFill>
-                <a:latin typeface="Arial"/>
-                <a:ea typeface="Arial"/>
-                <a:cs typeface="Arial"/>
-              </a:defRPr>
-            </a:pPr>
-            <a:r>
-              <a:rPr sz="2550" b="0" i="0">
-                <a:solidFill>
-                  <a:srgbClr val="112650"/>
-                </a:solidFill>
-                <a:latin typeface="Arial"/>
-                <a:ea typeface="Arial"/>
-                <a:cs typeface="Arial"/>
-              </a:rPr>
-              <a:t>[Điều học sinh cần làm được]</a:t>
+              <a:t>Tính diện tích từ hai kích thước.</a:t>
             </a:r>
           </a:p>
         </p:txBody>
@@ -4886,7 +4663,7 @@
           <p:cNvPr id="6" name="goal-5">
             <a:extLst xmlns:a="http://schemas.openxmlformats.org/drawingml/2006/main">
               <a:ext uri="{FF2B5EF4-FFF2-40B4-BE49-F238E27FC236}">
-                <a16:creationId xmlns:a16="http://schemas.microsoft.com/office/drawing/2014/main" id="{83D5E99D-93D9-4478-A8C6-025AA05C9A55}"/>
+                <a16:creationId xmlns:a16="http://schemas.microsoft.com/office/drawing/2014/main" id="{5C96A288-3EA5-4A1B-A2F2-B461392F37BA}"/>
               </a:ext>
             </a:extLst>
           </p:cNvPr>
@@ -4898,24 +4675,24 @@
         <p:spPr>
           <a:xfrm xmlns:a="http://schemas.openxmlformats.org/drawingml/2006/main">
             <a:off x="609600" y="4152900"/>
-            <a:ext cx="10972800" cy="1790700"/>
-          </a:xfrm>
-          <a:prstGeom xmlns:a="http://schemas.openxmlformats.org/drawingml/2006/main" prst="rect">
-            <a:avLst/>
-          </a:prstGeom>
-          <a:noFill xmlns:a="http://schemas.openxmlformats.org/drawingml/2006/main"/>
-          <a:ln xmlns:a="http://schemas.openxmlformats.org/drawingml/2006/main" w="0">
-            <a:noFill/>
-          </a:ln>
-        </p:spPr>
-        <p:txBody>
-          <a:bodyPr xmlns:a="http://schemas.openxmlformats.org/drawingml/2006/main">
-            <a:noAutofit/>
-          </a:bodyPr>
-          <a:lstStyle xmlns:a="http://schemas.openxmlformats.org/drawingml/2006/main"/>
-          <a:p xmlns:a="http://schemas.openxmlformats.org/drawingml/2006/main">
-            <a:pPr algn="l">
-              <a:defRPr sz="2550" b="0" i="1">
+            <a:ext cx="5219700" cy="1790700"/>
+          </a:xfrm>
+          <a:prstGeom xmlns:a="http://schemas.openxmlformats.org/drawingml/2006/main" prst="rect">
+            <a:avLst/>
+          </a:prstGeom>
+          <a:noFill xmlns:a="http://schemas.openxmlformats.org/drawingml/2006/main"/>
+          <a:ln xmlns:a="http://schemas.openxmlformats.org/drawingml/2006/main" w="0">
+            <a:noFill/>
+          </a:ln>
+        </p:spPr>
+        <p:txBody>
+          <a:bodyPr xmlns:a="http://schemas.openxmlformats.org/drawingml/2006/main">
+            <a:noAutofit/>
+          </a:bodyPr>
+          <a:lstStyle xmlns:a="http://schemas.openxmlformats.org/drawingml/2006/main"/>
+          <a:p xmlns:a="http://schemas.openxmlformats.org/drawingml/2006/main">
+            <a:pPr algn="l">
+              <a:defRPr sz="2100" b="0" i="1">
                 <a:solidFill>
                   <a:srgbClr val="0869F9"/>
                 </a:solidFill>
@@ -4925,7 +4702,7 @@
               </a:defRPr>
             </a:pPr>
             <a:r>
-              <a:rPr sz="2550" b="0" i="1">
+              <a:rPr sz="2100" b="0" i="1">
                 <a:solidFill>
                   <a:srgbClr val="0869F9"/>
                 </a:solidFill>
@@ -4933,38 +4710,43 @@
                 <a:ea typeface="Arial"/>
                 <a:cs typeface="Arial"/>
               </a:rPr>
-              <a:t>[What students should understand]</a:t>
-            </a:r>
-          </a:p>
-          <a:p xmlns:a="http://schemas.openxmlformats.org/drawingml/2006/main">
-            <a:pPr algn="l">
-              <a:defRPr sz="2550" b="0" i="1">
-                <a:solidFill>
-                  <a:srgbClr val="0869F9"/>
-                </a:solidFill>
-                <a:latin typeface="Arial"/>
-                <a:ea typeface="Arial"/>
-                <a:cs typeface="Arial"/>
-              </a:defRPr>
-            </a:pPr>
-            <a:r>
-              <a:rPr sz="2550" b="0" i="1">
-                <a:solidFill>
-                  <a:srgbClr val="0869F9"/>
-                </a:solidFill>
-                <a:latin typeface="Arial"/>
-                <a:ea typeface="Arial"/>
-                <a:cs typeface="Arial"/>
-              </a:rPr>
-              <a:t>[What students should be able to do]</a:t>
-            </a:r>
-          </a:p>
-        </p:txBody>
-      </p:sp>
+              <a:t>Calculate the area from two dimensions.</a:t>
+            </a:r>
+          </a:p>
+        </p:txBody>
+      </p:sp>
+      <p:pic>
+        <p:nvPicPr>
+          <p:cNvPr id="14" name=""/>
+          <p:cNvPicPr>
+            <a:picLocks xmlns:a="http://schemas.openxmlformats.org/drawingml/2006/main" noChangeAspect="1"/>
+          </p:cNvPicPr>
+          <p:nvPr/>
+        </p:nvPicPr>
+        <p:blipFill>
+          <a:blip xmlns:r="http://schemas.openxmlformats.org/officeDocument/2006/relationships" xmlns:a="http://schemas.openxmlformats.org/drawingml/2006/main" r:embed="R883b881b4b414bb5">
+            <a:extLst>
+              <a:ext uri="{96DAC541-7B7A-43D3-8B79-37D633B846F1}">
+                <asvg:svgBlip xmlns:asvg="http://schemas.microsoft.com/office/drawing/2016/SVG/main" r:embed="R6d69fda2033247d2"/>
+              </a:ext>
+            </a:extLst>
+          </a:blip>
+          <a:stretch xmlns:a="http://schemas.openxmlformats.org/drawingml/2006/main"/>
+        </p:blipFill>
+        <p:spPr>
+          <a:xfrm xmlns:a="http://schemas.openxmlformats.org/drawingml/2006/main">
+            <a:off x="6629400" y="2038350"/>
+            <a:ext cx="4953000" cy="3905250"/>
+          </a:xfrm>
+          <a:prstGeom xmlns:a="http://schemas.openxmlformats.org/drawingml/2006/main" prst="rect">
+            <a:avLst/>
+          </a:prstGeom>
+        </p:spPr>
+      </p:pic>
     </p:spTree>
     <p:extLst>
       <p:ext uri="{BB962C8B-B14F-4D97-AF65-F5344CB8AC3E}">
-        <p14:creationId xmlns:p14="http://schemas.microsoft.com/office/powerpoint/2010/main" val="583163763"/>
+        <p14:creationId xmlns:p14="http://schemas.microsoft.com/office/powerpoint/2010/main" val="593991852"/>
       </p:ext>
     </p:extLst>
   </p:cSld>
@@ -4992,10 +4774,10 @@
       </p:grpSpPr>
       <p:sp>
         <p:nvSpPr>
-          <p:cNvPr id="7" name="warmup-0">
-            <a:extLst xmlns:a="http://schemas.openxmlformats.org/drawingml/2006/main">
-              <a:ext uri="{FF2B5EF4-FFF2-40B4-BE49-F238E27FC236}">
-                <a16:creationId xmlns:a16="http://schemas.microsoft.com/office/drawing/2014/main" id="{3757FFFF-95E9-4796-87C8-7C0C06ED8AAE}"/>
+          <p:cNvPr id="8" name="warmup-0">
+            <a:extLst xmlns:a="http://schemas.openxmlformats.org/drawingml/2006/main">
+              <a:ext uri="{FF2B5EF4-FFF2-40B4-BE49-F238E27FC236}">
+                <a16:creationId xmlns:a16="http://schemas.microsoft.com/office/drawing/2014/main" id="{FA829BF3-DF4D-4E90-B35D-D50269C603BB}"/>
               </a:ext>
             </a:extLst>
           </p:cNvPr>
@@ -5042,7 +4824,7 @@
                 <a:ea typeface="Arial"/>
                 <a:cs typeface="Arial"/>
               </a:rPr>
-              <a:t>BiliClass   /   Môn học của thầy cô   /   10–12</a:t>
+              <a:t>BiliClass   /   Toán · ví dụ minh họa   /   </a:t>
             </a:r>
           </a:p>
         </p:txBody>
@@ -5052,7 +4834,7 @@
           <p:cNvPr id="2" name="warmup-1">
             <a:extLst xmlns:a="http://schemas.openxmlformats.org/drawingml/2006/main">
               <a:ext uri="{FF2B5EF4-FFF2-40B4-BE49-F238E27FC236}">
-                <a16:creationId xmlns:a16="http://schemas.microsoft.com/office/drawing/2014/main" id="{5D109E61-AABB-4199-A4B2-23D5F6539EB4}"/>
+                <a16:creationId xmlns:a16="http://schemas.microsoft.com/office/drawing/2014/main" id="{5A27D3C8-088A-4C11-A9E7-26F67E821DDA}"/>
               </a:ext>
             </a:extLst>
           </p:cNvPr>
@@ -5099,7 +4881,7 @@
                 <a:ea typeface="Arial"/>
                 <a:cs typeface="Arial"/>
               </a:rPr>
-              <a:t>Mẫu bài giảng song ngữ</a:t>
+              <a:t>Diện tích hình chữ nhật</a:t>
             </a:r>
           </a:p>
         </p:txBody>
@@ -5109,7 +4891,7 @@
           <p:cNvPr id="3" name="warmup-2">
             <a:extLst xmlns:a="http://schemas.openxmlformats.org/drawingml/2006/main">
               <a:ext uri="{FF2B5EF4-FFF2-40B4-BE49-F238E27FC236}">
-                <a16:creationId xmlns:a16="http://schemas.microsoft.com/office/drawing/2014/main" id="{142DB59D-97D7-45BF-8571-67742F547270}"/>
+                <a16:creationId xmlns:a16="http://schemas.microsoft.com/office/drawing/2014/main" id="{7DB7B58E-A34C-4233-BAA2-0CA79033ADD5}"/>
               </a:ext>
             </a:extLst>
           </p:cNvPr>
@@ -5166,7 +4948,7 @@
           <p:cNvPr id="4" name="warmup-3">
             <a:extLst xmlns:a="http://schemas.openxmlformats.org/drawingml/2006/main">
               <a:ext uri="{FF2B5EF4-FFF2-40B4-BE49-F238E27FC236}">
-                <a16:creationId xmlns:a16="http://schemas.microsoft.com/office/drawing/2014/main" id="{61D0789F-F966-4E33-94AF-5A4BC068460C}"/>
+                <a16:creationId xmlns:a16="http://schemas.microsoft.com/office/drawing/2014/main" id="{C7396D88-E3C8-4416-B170-00FDAA3FCFD5}"/>
               </a:ext>
             </a:extLst>
           </p:cNvPr>
@@ -5213,7 +4995,7 @@
                 <a:ea typeface="Arial"/>
                 <a:cs typeface="Arial"/>
               </a:rPr>
-              <a:t>Mẫu cấu trúc · Thay bằng nội dung bài học</a:t>
+              <a:t>Ví dụ để xem thiết kế · Bài của thầy cô dùng nội dung và hình từ nguồn</a:t>
             </a:r>
           </a:p>
         </p:txBody>
@@ -5223,7 +5005,7 @@
           <p:cNvPr id="5" name="warmup-4">
             <a:extLst xmlns:a="http://schemas.openxmlformats.org/drawingml/2006/main">
               <a:ext uri="{FF2B5EF4-FFF2-40B4-BE49-F238E27FC236}">
-                <a16:creationId xmlns:a16="http://schemas.microsoft.com/office/drawing/2014/main" id="{678E9B8B-9E84-4239-9E39-96EE74BC1B1C}"/>
+                <a16:creationId xmlns:a16="http://schemas.microsoft.com/office/drawing/2014/main" id="{84E898ED-D8D5-4F5B-8402-FB6A9A7357BA}"/>
               </a:ext>
             </a:extLst>
           </p:cNvPr>
@@ -5235,24 +5017,24 @@
         <p:spPr>
           <a:xfrm xmlns:a="http://schemas.openxmlformats.org/drawingml/2006/main">
             <a:off x="609600" y="2038350"/>
-            <a:ext cx="10972800" cy="1790700"/>
-          </a:xfrm>
-          <a:prstGeom xmlns:a="http://schemas.openxmlformats.org/drawingml/2006/main" prst="rect">
-            <a:avLst/>
-          </a:prstGeom>
-          <a:noFill xmlns:a="http://schemas.openxmlformats.org/drawingml/2006/main"/>
-          <a:ln xmlns:a="http://schemas.openxmlformats.org/drawingml/2006/main" w="0">
-            <a:noFill/>
-          </a:ln>
-        </p:spPr>
-        <p:txBody>
-          <a:bodyPr xmlns:a="http://schemas.openxmlformats.org/drawingml/2006/main">
-            <a:noAutofit/>
-          </a:bodyPr>
-          <a:lstStyle xmlns:a="http://schemas.openxmlformats.org/drawingml/2006/main"/>
-          <a:p xmlns:a="http://schemas.openxmlformats.org/drawingml/2006/main">
-            <a:pPr algn="l">
-              <a:defRPr sz="3000" b="1" i="0">
+            <a:ext cx="5219700" cy="1790700"/>
+          </a:xfrm>
+          <a:prstGeom xmlns:a="http://schemas.openxmlformats.org/drawingml/2006/main" prst="rect">
+            <a:avLst/>
+          </a:prstGeom>
+          <a:noFill xmlns:a="http://schemas.openxmlformats.org/drawingml/2006/main"/>
+          <a:ln xmlns:a="http://schemas.openxmlformats.org/drawingml/2006/main" w="0">
+            <a:noFill/>
+          </a:ln>
+        </p:spPr>
+        <p:txBody>
+          <a:bodyPr xmlns:a="http://schemas.openxmlformats.org/drawingml/2006/main">
+            <a:noAutofit/>
+          </a:bodyPr>
+          <a:lstStyle xmlns:a="http://schemas.openxmlformats.org/drawingml/2006/main"/>
+          <a:p xmlns:a="http://schemas.openxmlformats.org/drawingml/2006/main">
+            <a:pPr algn="l">
+              <a:defRPr sz="2100" b="1" i="0">
                 <a:solidFill>
                   <a:srgbClr val="112650"/>
                 </a:solidFill>
@@ -5262,7 +5044,7 @@
               </a:defRPr>
             </a:pPr>
             <a:r>
-              <a:rPr sz="3000" b="1" i="0">
+              <a:rPr sz="2100" b="1" i="0">
                 <a:solidFill>
                   <a:srgbClr val="112650"/>
                 </a:solidFill>
@@ -5270,30 +5052,7 @@
                 <a:ea typeface="Arial"/>
                 <a:cs typeface="Arial"/>
               </a:rPr>
-              <a:t>[Câu hỏi mở đầu từ bài học]</a:t>
-            </a:r>
-          </a:p>
-          <a:p xmlns:a="http://schemas.openxmlformats.org/drawingml/2006/main">
-            <a:pPr algn="l">
-              <a:defRPr sz="3000" b="1" i="0">
-                <a:solidFill>
-                  <a:srgbClr val="112650"/>
-                </a:solidFill>
-                <a:latin typeface="Arial"/>
-                <a:ea typeface="Arial"/>
-                <a:cs typeface="Arial"/>
-              </a:defRPr>
-            </a:pPr>
-            <a:r>
-              <a:rPr sz="3000" b="1" i="0">
-                <a:solidFill>
-                  <a:srgbClr val="112650"/>
-                </a:solidFill>
-                <a:latin typeface="Arial"/>
-                <a:ea typeface="Arial"/>
-                <a:cs typeface="Arial"/>
-              </a:rPr>
-              <a:t>[Thông tin để học sinh quan sát]</a:t>
+              <a:t>Có bao nhiêu ô vuông trong hình?</a:t>
             </a:r>
           </a:p>
         </p:txBody>
@@ -5303,7 +5062,7 @@
           <p:cNvPr id="6" name="warmup-5">
             <a:extLst xmlns:a="http://schemas.openxmlformats.org/drawingml/2006/main">
               <a:ext uri="{FF2B5EF4-FFF2-40B4-BE49-F238E27FC236}">
-                <a16:creationId xmlns:a16="http://schemas.microsoft.com/office/drawing/2014/main" id="{1D80D23A-079D-4D1A-B838-4BD878825FF1}"/>
+                <a16:creationId xmlns:a16="http://schemas.microsoft.com/office/drawing/2014/main" id="{846E4C4A-4A8D-48AC-A79B-8C09D4C4F0E8}"/>
               </a:ext>
             </a:extLst>
           </p:cNvPr>
@@ -5315,24 +5074,24 @@
         <p:spPr>
           <a:xfrm xmlns:a="http://schemas.openxmlformats.org/drawingml/2006/main">
             <a:off x="609600" y="4152900"/>
-            <a:ext cx="10972800" cy="1790700"/>
-          </a:xfrm>
-          <a:prstGeom xmlns:a="http://schemas.openxmlformats.org/drawingml/2006/main" prst="rect">
-            <a:avLst/>
-          </a:prstGeom>
-          <a:noFill xmlns:a="http://schemas.openxmlformats.org/drawingml/2006/main"/>
-          <a:ln xmlns:a="http://schemas.openxmlformats.org/drawingml/2006/main" w="0">
-            <a:noFill/>
-          </a:ln>
-        </p:spPr>
-        <p:txBody>
-          <a:bodyPr xmlns:a="http://schemas.openxmlformats.org/drawingml/2006/main">
-            <a:noAutofit/>
-          </a:bodyPr>
-          <a:lstStyle xmlns:a="http://schemas.openxmlformats.org/drawingml/2006/main"/>
-          <a:p xmlns:a="http://schemas.openxmlformats.org/drawingml/2006/main">
-            <a:pPr algn="l">
-              <a:defRPr sz="3000" b="1" i="1">
+            <a:ext cx="5219700" cy="1790700"/>
+          </a:xfrm>
+          <a:prstGeom xmlns:a="http://schemas.openxmlformats.org/drawingml/2006/main" prst="rect">
+            <a:avLst/>
+          </a:prstGeom>
+          <a:noFill xmlns:a="http://schemas.openxmlformats.org/drawingml/2006/main"/>
+          <a:ln xmlns:a="http://schemas.openxmlformats.org/drawingml/2006/main" w="0">
+            <a:noFill/>
+          </a:ln>
+        </p:spPr>
+        <p:txBody>
+          <a:bodyPr xmlns:a="http://schemas.openxmlformats.org/drawingml/2006/main">
+            <a:noAutofit/>
+          </a:bodyPr>
+          <a:lstStyle xmlns:a="http://schemas.openxmlformats.org/drawingml/2006/main"/>
+          <a:p xmlns:a="http://schemas.openxmlformats.org/drawingml/2006/main">
+            <a:pPr algn="l">
+              <a:defRPr sz="2100" b="1" i="1">
                 <a:solidFill>
                   <a:srgbClr val="0869F9"/>
                 </a:solidFill>
@@ -5342,7 +5101,7 @@
               </a:defRPr>
             </a:pPr>
             <a:r>
-              <a:rPr sz="3000" b="1" i="1">
+              <a:rPr sz="2100" b="1" i="1">
                 <a:solidFill>
                   <a:srgbClr val="0869F9"/>
                 </a:solidFill>
@@ -5350,38 +5109,43 @@
                 <a:ea typeface="Arial"/>
                 <a:cs typeface="Arial"/>
               </a:rPr>
-              <a:t>[Opening question from the lesson]</a:t>
-            </a:r>
-          </a:p>
-          <a:p xmlns:a="http://schemas.openxmlformats.org/drawingml/2006/main">
-            <a:pPr algn="l">
-              <a:defRPr sz="3000" b="1" i="1">
-                <a:solidFill>
-                  <a:srgbClr val="0869F9"/>
-                </a:solidFill>
-                <a:latin typeface="Arial"/>
-                <a:ea typeface="Arial"/>
-                <a:cs typeface="Arial"/>
-              </a:defRPr>
-            </a:pPr>
-            <a:r>
-              <a:rPr sz="3000" b="1" i="1">
-                <a:solidFill>
-                  <a:srgbClr val="0869F9"/>
-                </a:solidFill>
-                <a:latin typeface="Arial"/>
-                <a:ea typeface="Arial"/>
-                <a:cs typeface="Arial"/>
-              </a:rPr>
-              <a:t>[Information for students to observe]</a:t>
-            </a:r>
-          </a:p>
-        </p:txBody>
-      </p:sp>
+              <a:t>How many squares can you see?</a:t>
+            </a:r>
+          </a:p>
+        </p:txBody>
+      </p:sp>
+      <p:pic>
+        <p:nvPicPr>
+          <p:cNvPr id="14" name=""/>
+          <p:cNvPicPr>
+            <a:picLocks xmlns:a="http://schemas.openxmlformats.org/drawingml/2006/main" noChangeAspect="1"/>
+          </p:cNvPicPr>
+          <p:nvPr/>
+        </p:nvPicPr>
+        <p:blipFill>
+          <a:blip xmlns:r="http://schemas.openxmlformats.org/officeDocument/2006/relationships" xmlns:a="http://schemas.openxmlformats.org/drawingml/2006/main" r:embed="R284d87858d794b0c">
+            <a:extLst>
+              <a:ext uri="{96DAC541-7B7A-43D3-8B79-37D633B846F1}">
+                <asvg:svgBlip xmlns:asvg="http://schemas.microsoft.com/office/drawing/2016/SVG/main" r:embed="Rfdcbec2b53e2448a"/>
+              </a:ext>
+            </a:extLst>
+          </a:blip>
+          <a:stretch xmlns:a="http://schemas.openxmlformats.org/drawingml/2006/main"/>
+        </p:blipFill>
+        <p:spPr>
+          <a:xfrm xmlns:a="http://schemas.openxmlformats.org/drawingml/2006/main">
+            <a:off x="6629400" y="2038350"/>
+            <a:ext cx="4953000" cy="3905250"/>
+          </a:xfrm>
+          <a:prstGeom xmlns:a="http://schemas.openxmlformats.org/drawingml/2006/main" prst="rect">
+            <a:avLst/>
+          </a:prstGeom>
+        </p:spPr>
+      </p:pic>
     </p:spTree>
     <p:extLst>
       <p:ext uri="{BB962C8B-B14F-4D97-AF65-F5344CB8AC3E}">
-        <p14:creationId xmlns:p14="http://schemas.microsoft.com/office/powerpoint/2010/main" val="276373407"/>
+        <p14:creationId xmlns:p14="http://schemas.microsoft.com/office/powerpoint/2010/main" val="1568741138"/>
       </p:ext>
     </p:extLst>
   </p:cSld>
@@ -5409,10 +5173,10 @@
       </p:grpSpPr>
       <p:sp>
         <p:nvSpPr>
-          <p:cNvPr id="7" name="vocabulary-0">
-            <a:extLst xmlns:a="http://schemas.openxmlformats.org/drawingml/2006/main">
-              <a:ext uri="{FF2B5EF4-FFF2-40B4-BE49-F238E27FC236}">
-                <a16:creationId xmlns:a16="http://schemas.microsoft.com/office/drawing/2014/main" id="{D73B6CCB-D58D-4DD4-ADC3-4999E9557148}"/>
+          <p:cNvPr id="8" name="vocabulary-0">
+            <a:extLst xmlns:a="http://schemas.openxmlformats.org/drawingml/2006/main">
+              <a:ext uri="{FF2B5EF4-FFF2-40B4-BE49-F238E27FC236}">
+                <a16:creationId xmlns:a16="http://schemas.microsoft.com/office/drawing/2014/main" id="{2D0D41E7-DB99-4EE5-BDB3-E43B3E3BCD93}"/>
               </a:ext>
             </a:extLst>
           </p:cNvPr>
@@ -5459,7 +5223,7 @@
                 <a:ea typeface="Arial"/>
                 <a:cs typeface="Arial"/>
               </a:rPr>
-              <a:t>BiliClass   /   Môn học của thầy cô   /   10–12</a:t>
+              <a:t>BiliClass   /   Toán · ví dụ minh họa   /   </a:t>
             </a:r>
           </a:p>
         </p:txBody>
@@ -5469,7 +5233,7 @@
           <p:cNvPr id="2" name="vocabulary-1">
             <a:extLst xmlns:a="http://schemas.openxmlformats.org/drawingml/2006/main">
               <a:ext uri="{FF2B5EF4-FFF2-40B4-BE49-F238E27FC236}">
-                <a16:creationId xmlns:a16="http://schemas.microsoft.com/office/drawing/2014/main" id="{4F94B9E2-8143-4221-A3FE-79A961D2E293}"/>
+                <a16:creationId xmlns:a16="http://schemas.microsoft.com/office/drawing/2014/main" id="{02FD0359-C87A-495F-BA45-1D03B44DE65B}"/>
               </a:ext>
             </a:extLst>
           </p:cNvPr>
@@ -5516,7 +5280,7 @@
                 <a:ea typeface="Arial"/>
                 <a:cs typeface="Arial"/>
               </a:rPr>
-              <a:t>Mẫu bài giảng song ngữ</a:t>
+              <a:t>Diện tích hình chữ nhật</a:t>
             </a:r>
           </a:p>
         </p:txBody>
@@ -5526,7 +5290,7 @@
           <p:cNvPr id="3" name="vocabulary-2">
             <a:extLst xmlns:a="http://schemas.openxmlformats.org/drawingml/2006/main">
               <a:ext uri="{FF2B5EF4-FFF2-40B4-BE49-F238E27FC236}">
-                <a16:creationId xmlns:a16="http://schemas.microsoft.com/office/drawing/2014/main" id="{2397C2A7-81F7-434F-B52F-531E35E41054}"/>
+                <a16:creationId xmlns:a16="http://schemas.microsoft.com/office/drawing/2014/main" id="{684E8907-D77C-4E82-9BA5-9727C6B2068D}"/>
               </a:ext>
             </a:extLst>
           </p:cNvPr>
@@ -5583,7 +5347,7 @@
           <p:cNvPr id="4" name="vocabulary-3">
             <a:extLst xmlns:a="http://schemas.openxmlformats.org/drawingml/2006/main">
               <a:ext uri="{FF2B5EF4-FFF2-40B4-BE49-F238E27FC236}">
-                <a16:creationId xmlns:a16="http://schemas.microsoft.com/office/drawing/2014/main" id="{767EF466-AB4B-4666-8554-B5F9C812887F}"/>
+                <a16:creationId xmlns:a16="http://schemas.microsoft.com/office/drawing/2014/main" id="{09790906-92B0-4EBE-AB56-70E8024B979A}"/>
               </a:ext>
             </a:extLst>
           </p:cNvPr>
@@ -5630,7 +5394,7 @@
                 <a:ea typeface="Arial"/>
                 <a:cs typeface="Arial"/>
               </a:rPr>
-              <a:t>Mẫu cấu trúc · Thay bằng nội dung bài học</a:t>
+              <a:t>Ví dụ để xem thiết kế · Bài của thầy cô dùng nội dung và hình từ nguồn</a:t>
             </a:r>
           </a:p>
         </p:txBody>
@@ -5640,7 +5404,7 @@
           <p:cNvPr id="5" name="vocabulary-4">
             <a:extLst xmlns:a="http://schemas.openxmlformats.org/drawingml/2006/main">
               <a:ext uri="{FF2B5EF4-FFF2-40B4-BE49-F238E27FC236}">
-                <a16:creationId xmlns:a16="http://schemas.microsoft.com/office/drawing/2014/main" id="{FA587276-3C03-442A-BF49-73A2D9C72DE3}"/>
+                <a16:creationId xmlns:a16="http://schemas.microsoft.com/office/drawing/2014/main" id="{FC556CB4-A79D-4FB6-91C6-C4B86CD9B32D}"/>
               </a:ext>
             </a:extLst>
           </p:cNvPr>
@@ -5652,24 +5416,24 @@
         <p:spPr>
           <a:xfrm xmlns:a="http://schemas.openxmlformats.org/drawingml/2006/main">
             <a:off x="609600" y="2038350"/>
-            <a:ext cx="10972800" cy="1790700"/>
-          </a:xfrm>
-          <a:prstGeom xmlns:a="http://schemas.openxmlformats.org/drawingml/2006/main" prst="rect">
-            <a:avLst/>
-          </a:prstGeom>
-          <a:noFill xmlns:a="http://schemas.openxmlformats.org/drawingml/2006/main"/>
-          <a:ln xmlns:a="http://schemas.openxmlformats.org/drawingml/2006/main" w="0">
-            <a:noFill/>
-          </a:ln>
-        </p:spPr>
-        <p:txBody>
-          <a:bodyPr xmlns:a="http://schemas.openxmlformats.org/drawingml/2006/main">
-            <a:noAutofit/>
-          </a:bodyPr>
-          <a:lstStyle xmlns:a="http://schemas.openxmlformats.org/drawingml/2006/main"/>
-          <a:p xmlns:a="http://schemas.openxmlformats.org/drawingml/2006/main">
-            <a:pPr algn="l">
-              <a:defRPr sz="2550" b="0" i="0">
+            <a:ext cx="5219700" cy="1790700"/>
+          </a:xfrm>
+          <a:prstGeom xmlns:a="http://schemas.openxmlformats.org/drawingml/2006/main" prst="rect">
+            <a:avLst/>
+          </a:prstGeom>
+          <a:noFill xmlns:a="http://schemas.openxmlformats.org/drawingml/2006/main"/>
+          <a:ln xmlns:a="http://schemas.openxmlformats.org/drawingml/2006/main" w="0">
+            <a:noFill/>
+          </a:ln>
+        </p:spPr>
+        <p:txBody>
+          <a:bodyPr xmlns:a="http://schemas.openxmlformats.org/drawingml/2006/main">
+            <a:noAutofit/>
+          </a:bodyPr>
+          <a:lstStyle xmlns:a="http://schemas.openxmlformats.org/drawingml/2006/main"/>
+          <a:p xmlns:a="http://schemas.openxmlformats.org/drawingml/2006/main">
+            <a:pPr algn="l">
+              <a:defRPr sz="2100" b="0" i="0">
                 <a:solidFill>
                   <a:srgbClr val="112650"/>
                 </a:solidFill>
@@ -5679,7 +5443,7 @@
               </a:defRPr>
             </a:pPr>
             <a:r>
-              <a:rPr sz="2550" b="0" i="0">
+              <a:rPr sz="2100" b="0" i="0">
                 <a:solidFill>
                   <a:srgbClr val="112650"/>
                 </a:solidFill>
@@ -5687,12 +5451,12 @@
                 <a:ea typeface="Arial"/>
                 <a:cs typeface="Arial"/>
               </a:rPr>
-              <a:t>[Thuật ngữ thứ nhất]</a:t>
-            </a:r>
-          </a:p>
-          <a:p xmlns:a="http://schemas.openxmlformats.org/drawingml/2006/main">
-            <a:pPr algn="l">
-              <a:defRPr sz="2550" b="0" i="0">
+              <a:t>Chiều dài · Chiều rộng</a:t>
+            </a:r>
+          </a:p>
+          <a:p xmlns:a="http://schemas.openxmlformats.org/drawingml/2006/main">
+            <a:pPr algn="l">
+              <a:defRPr sz="2100" b="0" i="0">
                 <a:solidFill>
                   <a:srgbClr val="112650"/>
                 </a:solidFill>
@@ -5702,7 +5466,7 @@
               </a:defRPr>
             </a:pPr>
             <a:r>
-              <a:rPr sz="2550" b="0" i="0">
+              <a:rPr sz="2100" b="0" i="0">
                 <a:solidFill>
                   <a:srgbClr val="112650"/>
                 </a:solidFill>
@@ -5710,30 +5474,7 @@
                 <a:ea typeface="Arial"/>
                 <a:cs typeface="Arial"/>
               </a:rPr>
-              <a:t>[Thuật ngữ thứ hai]</a:t>
-            </a:r>
-          </a:p>
-          <a:p xmlns:a="http://schemas.openxmlformats.org/drawingml/2006/main">
-            <a:pPr algn="l">
-              <a:defRPr sz="2550" b="0" i="0">
-                <a:solidFill>
-                  <a:srgbClr val="112650"/>
-                </a:solidFill>
-                <a:latin typeface="Arial"/>
-                <a:ea typeface="Arial"/>
-                <a:cs typeface="Arial"/>
-              </a:defRPr>
-            </a:pPr>
-            <a:r>
-              <a:rPr sz="2550" b="0" i="0">
-                <a:solidFill>
-                  <a:srgbClr val="112650"/>
-                </a:solidFill>
-                <a:latin typeface="Arial"/>
-                <a:ea typeface="Arial"/>
-                <a:cs typeface="Arial"/>
-              </a:rPr>
-              <a:t>[Thuật ngữ thứ ba]</a:t>
+              <a:t>Diện tích</a:t>
             </a:r>
           </a:p>
         </p:txBody>
@@ -5743,7 +5484,7 @@
           <p:cNvPr id="6" name="vocabulary-5">
             <a:extLst xmlns:a="http://schemas.openxmlformats.org/drawingml/2006/main">
               <a:ext uri="{FF2B5EF4-FFF2-40B4-BE49-F238E27FC236}">
-                <a16:creationId xmlns:a16="http://schemas.microsoft.com/office/drawing/2014/main" id="{FDADDDE2-FC8C-4165-A3B4-6F96C07178F0}"/>
+                <a16:creationId xmlns:a16="http://schemas.microsoft.com/office/drawing/2014/main" id="{546A0627-DF9A-4A48-882C-D040C81C4F72}"/>
               </a:ext>
             </a:extLst>
           </p:cNvPr>
@@ -5755,24 +5496,24 @@
         <p:spPr>
           <a:xfrm xmlns:a="http://schemas.openxmlformats.org/drawingml/2006/main">
             <a:off x="609600" y="4152900"/>
-            <a:ext cx="10972800" cy="1790700"/>
-          </a:xfrm>
-          <a:prstGeom xmlns:a="http://schemas.openxmlformats.org/drawingml/2006/main" prst="rect">
-            <a:avLst/>
-          </a:prstGeom>
-          <a:noFill xmlns:a="http://schemas.openxmlformats.org/drawingml/2006/main"/>
-          <a:ln xmlns:a="http://schemas.openxmlformats.org/drawingml/2006/main" w="0">
-            <a:noFill/>
-          </a:ln>
-        </p:spPr>
-        <p:txBody>
-          <a:bodyPr xmlns:a="http://schemas.openxmlformats.org/drawingml/2006/main">
-            <a:noAutofit/>
-          </a:bodyPr>
-          <a:lstStyle xmlns:a="http://schemas.openxmlformats.org/drawingml/2006/main"/>
-          <a:p xmlns:a="http://schemas.openxmlformats.org/drawingml/2006/main">
-            <a:pPr algn="l">
-              <a:defRPr sz="2550" b="0" i="1">
+            <a:ext cx="5219700" cy="1790700"/>
+          </a:xfrm>
+          <a:prstGeom xmlns:a="http://schemas.openxmlformats.org/drawingml/2006/main" prst="rect">
+            <a:avLst/>
+          </a:prstGeom>
+          <a:noFill xmlns:a="http://schemas.openxmlformats.org/drawingml/2006/main"/>
+          <a:ln xmlns:a="http://schemas.openxmlformats.org/drawingml/2006/main" w="0">
+            <a:noFill/>
+          </a:ln>
+        </p:spPr>
+        <p:txBody>
+          <a:bodyPr xmlns:a="http://schemas.openxmlformats.org/drawingml/2006/main">
+            <a:noAutofit/>
+          </a:bodyPr>
+          <a:lstStyle xmlns:a="http://schemas.openxmlformats.org/drawingml/2006/main"/>
+          <a:p xmlns:a="http://schemas.openxmlformats.org/drawingml/2006/main">
+            <a:pPr algn="l">
+              <a:defRPr sz="2100" b="0" i="1">
                 <a:solidFill>
                   <a:srgbClr val="0869F9"/>
                 </a:solidFill>
@@ -5782,7 +5523,7 @@
               </a:defRPr>
             </a:pPr>
             <a:r>
-              <a:rPr sz="2550" b="0" i="1">
+              <a:rPr sz="2100" b="0" i="1">
                 <a:solidFill>
                   <a:srgbClr val="0869F9"/>
                 </a:solidFill>
@@ -5790,12 +5531,12 @@
                 <a:ea typeface="Arial"/>
                 <a:cs typeface="Arial"/>
               </a:rPr>
-              <a:t>[First term]</a:t>
-            </a:r>
-          </a:p>
-          <a:p xmlns:a="http://schemas.openxmlformats.org/drawingml/2006/main">
-            <a:pPr algn="l">
-              <a:defRPr sz="2550" b="0" i="1">
+              <a:t>Length · Width</a:t>
+            </a:r>
+          </a:p>
+          <a:p xmlns:a="http://schemas.openxmlformats.org/drawingml/2006/main">
+            <a:pPr algn="l">
+              <a:defRPr sz="2100" b="0" i="1">
                 <a:solidFill>
                   <a:srgbClr val="0869F9"/>
                 </a:solidFill>
@@ -5805,7 +5546,7 @@
               </a:defRPr>
             </a:pPr>
             <a:r>
-              <a:rPr sz="2550" b="0" i="1">
+              <a:rPr sz="2100" b="0" i="1">
                 <a:solidFill>
                   <a:srgbClr val="0869F9"/>
                 </a:solidFill>
@@ -5813,38 +5554,43 @@
                 <a:ea typeface="Arial"/>
                 <a:cs typeface="Arial"/>
               </a:rPr>
-              <a:t>[Second term]</a:t>
-            </a:r>
-          </a:p>
-          <a:p xmlns:a="http://schemas.openxmlformats.org/drawingml/2006/main">
-            <a:pPr algn="l">
-              <a:defRPr sz="2550" b="0" i="1">
-                <a:solidFill>
-                  <a:srgbClr val="0869F9"/>
-                </a:solidFill>
-                <a:latin typeface="Arial"/>
-                <a:ea typeface="Arial"/>
-                <a:cs typeface="Arial"/>
-              </a:defRPr>
-            </a:pPr>
-            <a:r>
-              <a:rPr sz="2550" b="0" i="1">
-                <a:solidFill>
-                  <a:srgbClr val="0869F9"/>
-                </a:solidFill>
-                <a:latin typeface="Arial"/>
-                <a:ea typeface="Arial"/>
-                <a:cs typeface="Arial"/>
-              </a:rPr>
-              <a:t>[Third term]</a:t>
-            </a:r>
-          </a:p>
-        </p:txBody>
-      </p:sp>
+              <a:t>Area</a:t>
+            </a:r>
+          </a:p>
+        </p:txBody>
+      </p:sp>
+      <p:pic>
+        <p:nvPicPr>
+          <p:cNvPr id="14" name=""/>
+          <p:cNvPicPr>
+            <a:picLocks xmlns:a="http://schemas.openxmlformats.org/drawingml/2006/main" noChangeAspect="1"/>
+          </p:cNvPicPr>
+          <p:nvPr/>
+        </p:nvPicPr>
+        <p:blipFill>
+          <a:blip xmlns:r="http://schemas.openxmlformats.org/officeDocument/2006/relationships" xmlns:a="http://schemas.openxmlformats.org/drawingml/2006/main" r:embed="R285b732a4e734578">
+            <a:extLst>
+              <a:ext uri="{96DAC541-7B7A-43D3-8B79-37D633B846F1}">
+                <asvg:svgBlip xmlns:asvg="http://schemas.microsoft.com/office/drawing/2016/SVG/main" r:embed="R4b7eea2a7b8145d8"/>
+              </a:ext>
+            </a:extLst>
+          </a:blip>
+          <a:stretch xmlns:a="http://schemas.openxmlformats.org/drawingml/2006/main"/>
+        </p:blipFill>
+        <p:spPr>
+          <a:xfrm xmlns:a="http://schemas.openxmlformats.org/drawingml/2006/main">
+            <a:off x="6629400" y="2038350"/>
+            <a:ext cx="4953000" cy="3905250"/>
+          </a:xfrm>
+          <a:prstGeom xmlns:a="http://schemas.openxmlformats.org/drawingml/2006/main" prst="rect">
+            <a:avLst/>
+          </a:prstGeom>
+        </p:spPr>
+      </p:pic>
     </p:spTree>
     <p:extLst>
       <p:ext uri="{BB962C8B-B14F-4D97-AF65-F5344CB8AC3E}">
-        <p14:creationId xmlns:p14="http://schemas.microsoft.com/office/powerpoint/2010/main" val="1590773464"/>
+        <p14:creationId xmlns:p14="http://schemas.microsoft.com/office/powerpoint/2010/main" val="519884479"/>
       </p:ext>
     </p:extLst>
   </p:cSld>
@@ -5872,10 +5618,10 @@
       </p:grpSpPr>
       <p:sp>
         <p:nvSpPr>
-          <p:cNvPr id="7" name="concept-0">
-            <a:extLst xmlns:a="http://schemas.openxmlformats.org/drawingml/2006/main">
-              <a:ext uri="{FF2B5EF4-FFF2-40B4-BE49-F238E27FC236}">
-                <a16:creationId xmlns:a16="http://schemas.microsoft.com/office/drawing/2014/main" id="{077DFD8E-49A2-457C-8B47-23B388B54575}"/>
+          <p:cNvPr id="8" name="concept-0">
+            <a:extLst xmlns:a="http://schemas.openxmlformats.org/drawingml/2006/main">
+              <a:ext uri="{FF2B5EF4-FFF2-40B4-BE49-F238E27FC236}">
+                <a16:creationId xmlns:a16="http://schemas.microsoft.com/office/drawing/2014/main" id="{D4E88EB6-2284-42CD-9114-9EE4DF48537C}"/>
               </a:ext>
             </a:extLst>
           </p:cNvPr>
@@ -5922,7 +5668,7 @@
                 <a:ea typeface="Arial"/>
                 <a:cs typeface="Arial"/>
               </a:rPr>
-              <a:t>BiliClass   /   Môn học của thầy cô   /   10–12</a:t>
+              <a:t>BiliClass   /   Toán · ví dụ minh họa   /   </a:t>
             </a:r>
           </a:p>
         </p:txBody>
@@ -5932,7 +5678,7 @@
           <p:cNvPr id="2" name="concept-1">
             <a:extLst xmlns:a="http://schemas.openxmlformats.org/drawingml/2006/main">
               <a:ext uri="{FF2B5EF4-FFF2-40B4-BE49-F238E27FC236}">
-                <a16:creationId xmlns:a16="http://schemas.microsoft.com/office/drawing/2014/main" id="{83C7576C-955F-42BA-A340-BC86CF474778}"/>
+                <a16:creationId xmlns:a16="http://schemas.microsoft.com/office/drawing/2014/main" id="{D42C7ADD-C361-4DEA-B4C5-9256351F5CE1}"/>
               </a:ext>
             </a:extLst>
           </p:cNvPr>
@@ -5979,7 +5725,7 @@
                 <a:ea typeface="Arial"/>
                 <a:cs typeface="Arial"/>
               </a:rPr>
-              <a:t>Mẫu bài giảng song ngữ</a:t>
+              <a:t>Diện tích hình chữ nhật</a:t>
             </a:r>
           </a:p>
         </p:txBody>
@@ -5989,7 +5735,7 @@
           <p:cNvPr id="3" name="concept-2">
             <a:extLst xmlns:a="http://schemas.openxmlformats.org/drawingml/2006/main">
               <a:ext uri="{FF2B5EF4-FFF2-40B4-BE49-F238E27FC236}">
-                <a16:creationId xmlns:a16="http://schemas.microsoft.com/office/drawing/2014/main" id="{1479BCDD-BF1C-4FCC-98A6-828F988C5B67}"/>
+                <a16:creationId xmlns:a16="http://schemas.microsoft.com/office/drawing/2014/main" id="{41C25584-4DE2-482F-82BC-E60D7B8AECCB}"/>
               </a:ext>
             </a:extLst>
           </p:cNvPr>
@@ -6046,7 +5792,7 @@
           <p:cNvPr id="4" name="concept-3">
             <a:extLst xmlns:a="http://schemas.openxmlformats.org/drawingml/2006/main">
               <a:ext uri="{FF2B5EF4-FFF2-40B4-BE49-F238E27FC236}">
-                <a16:creationId xmlns:a16="http://schemas.microsoft.com/office/drawing/2014/main" id="{50F41503-DA4B-4E6D-A963-63C5562529D8}"/>
+                <a16:creationId xmlns:a16="http://schemas.microsoft.com/office/drawing/2014/main" id="{388935D8-EFA1-4FFD-B931-8F5BDE73B7F8}"/>
               </a:ext>
             </a:extLst>
           </p:cNvPr>
@@ -6093,7 +5839,7 @@
                 <a:ea typeface="Arial"/>
                 <a:cs typeface="Arial"/>
               </a:rPr>
-              <a:t>Mẫu cấu trúc · Thay bằng nội dung bài học</a:t>
+              <a:t>Ví dụ để xem thiết kế · Bài của thầy cô dùng nội dung và hình từ nguồn</a:t>
             </a:r>
           </a:p>
         </p:txBody>
@@ -6103,7 +5849,7 @@
           <p:cNvPr id="5" name="concept-4">
             <a:extLst xmlns:a="http://schemas.openxmlformats.org/drawingml/2006/main">
               <a:ext uri="{FF2B5EF4-FFF2-40B4-BE49-F238E27FC236}">
-                <a16:creationId xmlns:a16="http://schemas.microsoft.com/office/drawing/2014/main" id="{2A4B3DB6-C22B-452D-997C-E3785236D6DC}"/>
+                <a16:creationId xmlns:a16="http://schemas.microsoft.com/office/drawing/2014/main" id="{ECC3F6EF-0D7D-4943-8068-C5C43A6951A7}"/>
               </a:ext>
             </a:extLst>
           </p:cNvPr>
@@ -6115,24 +5861,24 @@
         <p:spPr>
           <a:xfrm xmlns:a="http://schemas.openxmlformats.org/drawingml/2006/main">
             <a:off x="609600" y="2038350"/>
-            <a:ext cx="10972800" cy="1790700"/>
-          </a:xfrm>
-          <a:prstGeom xmlns:a="http://schemas.openxmlformats.org/drawingml/2006/main" prst="rect">
-            <a:avLst/>
-          </a:prstGeom>
-          <a:noFill xmlns:a="http://schemas.openxmlformats.org/drawingml/2006/main"/>
-          <a:ln xmlns:a="http://schemas.openxmlformats.org/drawingml/2006/main" w="0">
-            <a:noFill/>
-          </a:ln>
-        </p:spPr>
-        <p:txBody>
-          <a:bodyPr xmlns:a="http://schemas.openxmlformats.org/drawingml/2006/main">
-            <a:noAutofit/>
-          </a:bodyPr>
-          <a:lstStyle xmlns:a="http://schemas.openxmlformats.org/drawingml/2006/main"/>
-          <a:p xmlns:a="http://schemas.openxmlformats.org/drawingml/2006/main">
-            <a:pPr algn="l">
-              <a:defRPr sz="2550" b="0" i="0">
+            <a:ext cx="5219700" cy="1790700"/>
+          </a:xfrm>
+          <a:prstGeom xmlns:a="http://schemas.openxmlformats.org/drawingml/2006/main" prst="rect">
+            <a:avLst/>
+          </a:prstGeom>
+          <a:noFill xmlns:a="http://schemas.openxmlformats.org/drawingml/2006/main"/>
+          <a:ln xmlns:a="http://schemas.openxmlformats.org/drawingml/2006/main" w="0">
+            <a:noFill/>
+          </a:ln>
+        </p:spPr>
+        <p:txBody>
+          <a:bodyPr xmlns:a="http://schemas.openxmlformats.org/drawingml/2006/main">
+            <a:noAutofit/>
+          </a:bodyPr>
+          <a:lstStyle xmlns:a="http://schemas.openxmlformats.org/drawingml/2006/main"/>
+          <a:p xmlns:a="http://schemas.openxmlformats.org/drawingml/2006/main">
+            <a:pPr algn="l">
+              <a:defRPr sz="2100" b="0" i="0">
                 <a:solidFill>
                   <a:srgbClr val="112650"/>
                 </a:solidFill>
@@ -6142,7 +5888,7 @@
               </a:defRPr>
             </a:pPr>
             <a:r>
-              <a:rPr sz="2550" b="0" i="0">
+              <a:rPr sz="2100" b="0" i="0">
                 <a:solidFill>
                   <a:srgbClr val="112650"/>
                 </a:solidFill>
@@ -6150,30 +5896,7 @@
                 <a:ea typeface="Arial"/>
                 <a:cs typeface="Arial"/>
               </a:rPr>
-              <a:t>[Tên khái niệm]</a:t>
-            </a:r>
-          </a:p>
-          <a:p xmlns:a="http://schemas.openxmlformats.org/drawingml/2006/main">
-            <a:pPr algn="l">
-              <a:defRPr sz="2550" b="0" i="0">
-                <a:solidFill>
-                  <a:srgbClr val="112650"/>
-                </a:solidFill>
-                <a:latin typeface="Arial"/>
-                <a:ea typeface="Arial"/>
-                <a:cs typeface="Arial"/>
-              </a:defRPr>
-            </a:pPr>
-            <a:r>
-              <a:rPr sz="2550" b="0" i="0">
-                <a:solidFill>
-                  <a:srgbClr val="112650"/>
-                </a:solidFill>
-                <a:latin typeface="Arial"/>
-                <a:ea typeface="Arial"/>
-                <a:cs typeface="Arial"/>
-              </a:rPr>
-              <a:t>[Định nghĩa lấy từ tài liệu đã kiểm tra]</a:t>
+              <a:t>Diện tích là phần mặt phẳng được phủ.</a:t>
             </a:r>
           </a:p>
         </p:txBody>
@@ -6183,7 +5906,7 @@
           <p:cNvPr id="6" name="concept-5">
             <a:extLst xmlns:a="http://schemas.openxmlformats.org/drawingml/2006/main">
               <a:ext uri="{FF2B5EF4-FFF2-40B4-BE49-F238E27FC236}">
-                <a16:creationId xmlns:a16="http://schemas.microsoft.com/office/drawing/2014/main" id="{2DE2EB2F-A183-47A8-AE7E-7D9537986722}"/>
+                <a16:creationId xmlns:a16="http://schemas.microsoft.com/office/drawing/2014/main" id="{BC73BB87-D36B-420E-B656-F01EDB09FB90}"/>
               </a:ext>
             </a:extLst>
           </p:cNvPr>
@@ -6195,24 +5918,24 @@
         <p:spPr>
           <a:xfrm xmlns:a="http://schemas.openxmlformats.org/drawingml/2006/main">
             <a:off x="609600" y="4152900"/>
-            <a:ext cx="10972800" cy="1790700"/>
-          </a:xfrm>
-          <a:prstGeom xmlns:a="http://schemas.openxmlformats.org/drawingml/2006/main" prst="rect">
-            <a:avLst/>
-          </a:prstGeom>
-          <a:noFill xmlns:a="http://schemas.openxmlformats.org/drawingml/2006/main"/>
-          <a:ln xmlns:a="http://schemas.openxmlformats.org/drawingml/2006/main" w="0">
-            <a:noFill/>
-          </a:ln>
-        </p:spPr>
-        <p:txBody>
-          <a:bodyPr xmlns:a="http://schemas.openxmlformats.org/drawingml/2006/main">
-            <a:noAutofit/>
-          </a:bodyPr>
-          <a:lstStyle xmlns:a="http://schemas.openxmlformats.org/drawingml/2006/main"/>
-          <a:p xmlns:a="http://schemas.openxmlformats.org/drawingml/2006/main">
-            <a:pPr algn="l">
-              <a:defRPr sz="2550" b="0" i="1">
+            <a:ext cx="5219700" cy="1790700"/>
+          </a:xfrm>
+          <a:prstGeom xmlns:a="http://schemas.openxmlformats.org/drawingml/2006/main" prst="rect">
+            <a:avLst/>
+          </a:prstGeom>
+          <a:noFill xmlns:a="http://schemas.openxmlformats.org/drawingml/2006/main"/>
+          <a:ln xmlns:a="http://schemas.openxmlformats.org/drawingml/2006/main" w="0">
+            <a:noFill/>
+          </a:ln>
+        </p:spPr>
+        <p:txBody>
+          <a:bodyPr xmlns:a="http://schemas.openxmlformats.org/drawingml/2006/main">
+            <a:noAutofit/>
+          </a:bodyPr>
+          <a:lstStyle xmlns:a="http://schemas.openxmlformats.org/drawingml/2006/main"/>
+          <a:p xmlns:a="http://schemas.openxmlformats.org/drawingml/2006/main">
+            <a:pPr algn="l">
+              <a:defRPr sz="2100" b="0" i="1">
                 <a:solidFill>
                   <a:srgbClr val="0869F9"/>
                 </a:solidFill>
@@ -6222,7 +5945,7 @@
               </a:defRPr>
             </a:pPr>
             <a:r>
-              <a:rPr sz="2550" b="0" i="1">
+              <a:rPr sz="2100" b="0" i="1">
                 <a:solidFill>
                   <a:srgbClr val="0869F9"/>
                 </a:solidFill>
@@ -6230,38 +5953,43 @@
                 <a:ea typeface="Arial"/>
                 <a:cs typeface="Arial"/>
               </a:rPr>
-              <a:t>[Concept name]</a:t>
-            </a:r>
-          </a:p>
-          <a:p xmlns:a="http://schemas.openxmlformats.org/drawingml/2006/main">
-            <a:pPr algn="l">
-              <a:defRPr sz="2550" b="0" i="1">
-                <a:solidFill>
-                  <a:srgbClr val="0869F9"/>
-                </a:solidFill>
-                <a:latin typeface="Arial"/>
-                <a:ea typeface="Arial"/>
-                <a:cs typeface="Arial"/>
-              </a:defRPr>
-            </a:pPr>
-            <a:r>
-              <a:rPr sz="2550" b="0" i="1">
-                <a:solidFill>
-                  <a:srgbClr val="0869F9"/>
-                </a:solidFill>
-                <a:latin typeface="Arial"/>
-                <a:ea typeface="Arial"/>
-                <a:cs typeface="Arial"/>
-              </a:rPr>
-              <a:t>[Definition from the checked source]</a:t>
-            </a:r>
-          </a:p>
-        </p:txBody>
-      </p:sp>
+              <a:t>Area measures the covered surface.</a:t>
+            </a:r>
+          </a:p>
+        </p:txBody>
+      </p:sp>
+      <p:pic>
+        <p:nvPicPr>
+          <p:cNvPr id="14" name=""/>
+          <p:cNvPicPr>
+            <a:picLocks xmlns:a="http://schemas.openxmlformats.org/drawingml/2006/main" noChangeAspect="1"/>
+          </p:cNvPicPr>
+          <p:nvPr/>
+        </p:nvPicPr>
+        <p:blipFill>
+          <a:blip xmlns:r="http://schemas.openxmlformats.org/officeDocument/2006/relationships" xmlns:a="http://schemas.openxmlformats.org/drawingml/2006/main" r:embed="R623ba9277b294e11">
+            <a:extLst>
+              <a:ext uri="{96DAC541-7B7A-43D3-8B79-37D633B846F1}">
+                <asvg:svgBlip xmlns:asvg="http://schemas.microsoft.com/office/drawing/2016/SVG/main" r:embed="Rcb51eccd655b4292"/>
+              </a:ext>
+            </a:extLst>
+          </a:blip>
+          <a:stretch xmlns:a="http://schemas.openxmlformats.org/drawingml/2006/main"/>
+        </p:blipFill>
+        <p:spPr>
+          <a:xfrm xmlns:a="http://schemas.openxmlformats.org/drawingml/2006/main">
+            <a:off x="6629400" y="2038350"/>
+            <a:ext cx="4953000" cy="3905250"/>
+          </a:xfrm>
+          <a:prstGeom xmlns:a="http://schemas.openxmlformats.org/drawingml/2006/main" prst="rect">
+            <a:avLst/>
+          </a:prstGeom>
+        </p:spPr>
+      </p:pic>
     </p:spTree>
     <p:extLst>
       <p:ext uri="{BB962C8B-B14F-4D97-AF65-F5344CB8AC3E}">
-        <p14:creationId xmlns:p14="http://schemas.microsoft.com/office/powerpoint/2010/main" val="997236715"/>
+        <p14:creationId xmlns:p14="http://schemas.microsoft.com/office/powerpoint/2010/main" val="1069975288"/>
       </p:ext>
     </p:extLst>
   </p:cSld>
@@ -6289,10 +6017,10 @@
       </p:grpSpPr>
       <p:sp>
         <p:nvSpPr>
-          <p:cNvPr id="7" name="explanation-0">
-            <a:extLst xmlns:a="http://schemas.openxmlformats.org/drawingml/2006/main">
-              <a:ext uri="{FF2B5EF4-FFF2-40B4-BE49-F238E27FC236}">
-                <a16:creationId xmlns:a16="http://schemas.microsoft.com/office/drawing/2014/main" id="{ED14EF56-F75F-4DC5-800D-024A6F72A376}"/>
+          <p:cNvPr id="8" name="explanation-0">
+            <a:extLst xmlns:a="http://schemas.openxmlformats.org/drawingml/2006/main">
+              <a:ext uri="{FF2B5EF4-FFF2-40B4-BE49-F238E27FC236}">
+                <a16:creationId xmlns:a16="http://schemas.microsoft.com/office/drawing/2014/main" id="{431FA3F5-7DD9-4BF9-95C9-D8A2FE40DD5D}"/>
               </a:ext>
             </a:extLst>
           </p:cNvPr>
@@ -6339,7 +6067,7 @@
                 <a:ea typeface="Arial"/>
                 <a:cs typeface="Arial"/>
               </a:rPr>
-              <a:t>BiliClass   /   Môn học của thầy cô   /   10–12</a:t>
+              <a:t>BiliClass   /   Toán · ví dụ minh họa   /   </a:t>
             </a:r>
           </a:p>
         </p:txBody>
@@ -6349,7 +6077,7 @@
           <p:cNvPr id="2" name="explanation-1">
             <a:extLst xmlns:a="http://schemas.openxmlformats.org/drawingml/2006/main">
               <a:ext uri="{FF2B5EF4-FFF2-40B4-BE49-F238E27FC236}">
-                <a16:creationId xmlns:a16="http://schemas.microsoft.com/office/drawing/2014/main" id="{1A4BB6A0-513E-43D4-8C50-E411C77FA012}"/>
+                <a16:creationId xmlns:a16="http://schemas.microsoft.com/office/drawing/2014/main" id="{6DB45660-D3D1-4CA1-8621-2A56A334A1D1}"/>
               </a:ext>
             </a:extLst>
           </p:cNvPr>
@@ -6396,7 +6124,7 @@
                 <a:ea typeface="Arial"/>
                 <a:cs typeface="Arial"/>
               </a:rPr>
-              <a:t>Mẫu bài giảng song ngữ</a:t>
+              <a:t>Diện tích hình chữ nhật</a:t>
             </a:r>
           </a:p>
         </p:txBody>
@@ -6406,7 +6134,7 @@
           <p:cNvPr id="3" name="explanation-2">
             <a:extLst xmlns:a="http://schemas.openxmlformats.org/drawingml/2006/main">
               <a:ext uri="{FF2B5EF4-FFF2-40B4-BE49-F238E27FC236}">
-                <a16:creationId xmlns:a16="http://schemas.microsoft.com/office/drawing/2014/main" id="{1E7CFE1B-9474-4472-AA8A-6294226698E2}"/>
+                <a16:creationId xmlns:a16="http://schemas.microsoft.com/office/drawing/2014/main" id="{527A6143-E5C5-4E94-8FED-C58891DD003B}"/>
               </a:ext>
             </a:extLst>
           </p:cNvPr>
@@ -6463,7 +6191,7 @@
           <p:cNvPr id="4" name="explanation-3">
             <a:extLst xmlns:a="http://schemas.openxmlformats.org/drawingml/2006/main">
               <a:ext uri="{FF2B5EF4-FFF2-40B4-BE49-F238E27FC236}">
-                <a16:creationId xmlns:a16="http://schemas.microsoft.com/office/drawing/2014/main" id="{5B5AB308-01B7-41A9-8D39-CA0216A2BB67}"/>
+                <a16:creationId xmlns:a16="http://schemas.microsoft.com/office/drawing/2014/main" id="{47E13482-78C3-4719-A387-29918BDED9CB}"/>
               </a:ext>
             </a:extLst>
           </p:cNvPr>
@@ -6510,7 +6238,7 @@
                 <a:ea typeface="Arial"/>
                 <a:cs typeface="Arial"/>
               </a:rPr>
-              <a:t>Mẫu cấu trúc · Thay bằng nội dung bài học</a:t>
+              <a:t>Ví dụ để xem thiết kế · Bài của thầy cô dùng nội dung và hình từ nguồn</a:t>
             </a:r>
           </a:p>
         </p:txBody>
@@ -6520,7 +6248,7 @@
           <p:cNvPr id="5" name="explanation-4">
             <a:extLst xmlns:a="http://schemas.openxmlformats.org/drawingml/2006/main">
               <a:ext uri="{FF2B5EF4-FFF2-40B4-BE49-F238E27FC236}">
-                <a16:creationId xmlns:a16="http://schemas.microsoft.com/office/drawing/2014/main" id="{5647BD0B-C118-462A-A184-89C97B644097}"/>
+                <a16:creationId xmlns:a16="http://schemas.microsoft.com/office/drawing/2014/main" id="{02B2AF36-5073-446B-80D0-497DC6935060}"/>
               </a:ext>
             </a:extLst>
           </p:cNvPr>
@@ -6532,24 +6260,24 @@
         <p:spPr>
           <a:xfrm xmlns:a="http://schemas.openxmlformats.org/drawingml/2006/main">
             <a:off x="609600" y="2038350"/>
-            <a:ext cx="10972800" cy="1790700"/>
-          </a:xfrm>
-          <a:prstGeom xmlns:a="http://schemas.openxmlformats.org/drawingml/2006/main" prst="rect">
-            <a:avLst/>
-          </a:prstGeom>
-          <a:noFill xmlns:a="http://schemas.openxmlformats.org/drawingml/2006/main"/>
-          <a:ln xmlns:a="http://schemas.openxmlformats.org/drawingml/2006/main" w="0">
-            <a:noFill/>
-          </a:ln>
-        </p:spPr>
-        <p:txBody>
-          <a:bodyPr xmlns:a="http://schemas.openxmlformats.org/drawingml/2006/main">
-            <a:noAutofit/>
-          </a:bodyPr>
-          <a:lstStyle xmlns:a="http://schemas.openxmlformats.org/drawingml/2006/main"/>
-          <a:p xmlns:a="http://schemas.openxmlformats.org/drawingml/2006/main">
-            <a:pPr algn="l">
-              <a:defRPr sz="2400" b="0" i="0">
+            <a:ext cx="5219700" cy="1790700"/>
+          </a:xfrm>
+          <a:prstGeom xmlns:a="http://schemas.openxmlformats.org/drawingml/2006/main" prst="rect">
+            <a:avLst/>
+          </a:prstGeom>
+          <a:noFill xmlns:a="http://schemas.openxmlformats.org/drawingml/2006/main"/>
+          <a:ln xmlns:a="http://schemas.openxmlformats.org/drawingml/2006/main" w="0">
+            <a:noFill/>
+          </a:ln>
+        </p:spPr>
+        <p:txBody>
+          <a:bodyPr xmlns:a="http://schemas.openxmlformats.org/drawingml/2006/main">
+            <a:noAutofit/>
+          </a:bodyPr>
+          <a:lstStyle xmlns:a="http://schemas.openxmlformats.org/drawingml/2006/main"/>
+          <a:p xmlns:a="http://schemas.openxmlformats.org/drawingml/2006/main">
+            <a:pPr algn="l">
+              <a:defRPr sz="2100" b="0" i="0">
                 <a:solidFill>
                   <a:srgbClr val="112650"/>
                 </a:solidFill>
@@ -6559,7 +6287,7 @@
               </a:defRPr>
             </a:pPr>
             <a:r>
-              <a:rPr sz="2400" b="0" i="0">
+              <a:rPr sz="2100" b="0" i="0">
                 <a:solidFill>
                   <a:srgbClr val="112650"/>
                 </a:solidFill>
@@ -6567,30 +6295,7 @@
                 <a:ea typeface="Arial"/>
                 <a:cs typeface="Arial"/>
               </a:rPr>
-              <a:t>[Ý chính cần giải thích]</a:t>
-            </a:r>
-          </a:p>
-          <a:p xmlns:a="http://schemas.openxmlformats.org/drawingml/2006/main">
-            <a:pPr algn="l">
-              <a:defRPr sz="2400" b="0" i="0">
-                <a:solidFill>
-                  <a:srgbClr val="112650"/>
-                </a:solidFill>
-                <a:latin typeface="Arial"/>
-                <a:ea typeface="Arial"/>
-                <a:cs typeface="Arial"/>
-              </a:defRPr>
-            </a:pPr>
-            <a:r>
-              <a:rPr sz="2400" b="0" i="0">
-                <a:solidFill>
-                  <a:srgbClr val="112650"/>
-                </a:solidFill>
-                <a:latin typeface="Arial"/>
-                <a:ea typeface="Arial"/>
-                <a:cs typeface="Arial"/>
-              </a:rPr>
-              <a:t>[Mối liên hệ trong nội dung bài học]</a:t>
+              <a:t>4 cột, mỗi cột có 3 ô vuông.</a:t>
             </a:r>
           </a:p>
         </p:txBody>
@@ -6600,7 +6305,7 @@
           <p:cNvPr id="6" name="explanation-5">
             <a:extLst xmlns:a="http://schemas.openxmlformats.org/drawingml/2006/main">
               <a:ext uri="{FF2B5EF4-FFF2-40B4-BE49-F238E27FC236}">
-                <a16:creationId xmlns:a16="http://schemas.microsoft.com/office/drawing/2014/main" id="{834B1187-8003-4381-A2DF-5F819276606B}"/>
+                <a16:creationId xmlns:a16="http://schemas.microsoft.com/office/drawing/2014/main" id="{4216225B-4186-4F3F-BAD7-FA64D39A499D}"/>
               </a:ext>
             </a:extLst>
           </p:cNvPr>
@@ -6612,24 +6317,24 @@
         <p:spPr>
           <a:xfrm xmlns:a="http://schemas.openxmlformats.org/drawingml/2006/main">
             <a:off x="609600" y="4152900"/>
-            <a:ext cx="10972800" cy="1790700"/>
-          </a:xfrm>
-          <a:prstGeom xmlns:a="http://schemas.openxmlformats.org/drawingml/2006/main" prst="rect">
-            <a:avLst/>
-          </a:prstGeom>
-          <a:noFill xmlns:a="http://schemas.openxmlformats.org/drawingml/2006/main"/>
-          <a:ln xmlns:a="http://schemas.openxmlformats.org/drawingml/2006/main" w="0">
-            <a:noFill/>
-          </a:ln>
-        </p:spPr>
-        <p:txBody>
-          <a:bodyPr xmlns:a="http://schemas.openxmlformats.org/drawingml/2006/main">
-            <a:noAutofit/>
-          </a:bodyPr>
-          <a:lstStyle xmlns:a="http://schemas.openxmlformats.org/drawingml/2006/main"/>
-          <a:p xmlns:a="http://schemas.openxmlformats.org/drawingml/2006/main">
-            <a:pPr algn="l">
-              <a:defRPr sz="2400" b="0" i="1">
+            <a:ext cx="5219700" cy="1790700"/>
+          </a:xfrm>
+          <a:prstGeom xmlns:a="http://schemas.openxmlformats.org/drawingml/2006/main" prst="rect">
+            <a:avLst/>
+          </a:prstGeom>
+          <a:noFill xmlns:a="http://schemas.openxmlformats.org/drawingml/2006/main"/>
+          <a:ln xmlns:a="http://schemas.openxmlformats.org/drawingml/2006/main" w="0">
+            <a:noFill/>
+          </a:ln>
+        </p:spPr>
+        <p:txBody>
+          <a:bodyPr xmlns:a="http://schemas.openxmlformats.org/drawingml/2006/main">
+            <a:noAutofit/>
+          </a:bodyPr>
+          <a:lstStyle xmlns:a="http://schemas.openxmlformats.org/drawingml/2006/main"/>
+          <a:p xmlns:a="http://schemas.openxmlformats.org/drawingml/2006/main">
+            <a:pPr algn="l">
+              <a:defRPr sz="2100" b="0" i="1">
                 <a:solidFill>
                   <a:srgbClr val="0869F9"/>
                 </a:solidFill>
@@ -6639,7 +6344,7 @@
               </a:defRPr>
             </a:pPr>
             <a:r>
-              <a:rPr sz="2400" b="0" i="1">
+              <a:rPr sz="2100" b="0" i="1">
                 <a:solidFill>
                   <a:srgbClr val="0869F9"/>
                 </a:solidFill>
@@ -6647,38 +6352,43 @@
                 <a:ea typeface="Arial"/>
                 <a:cs typeface="Arial"/>
               </a:rPr>
-              <a:t>[Main idea to explain]</a:t>
-            </a:r>
-          </a:p>
-          <a:p xmlns:a="http://schemas.openxmlformats.org/drawingml/2006/main">
-            <a:pPr algn="l">
-              <a:defRPr sz="2400" b="0" i="1">
-                <a:solidFill>
-                  <a:srgbClr val="0869F9"/>
-                </a:solidFill>
-                <a:latin typeface="Arial"/>
-                <a:ea typeface="Arial"/>
-                <a:cs typeface="Arial"/>
-              </a:defRPr>
-            </a:pPr>
-            <a:r>
-              <a:rPr sz="2400" b="0" i="1">
-                <a:solidFill>
-                  <a:srgbClr val="0869F9"/>
-                </a:solidFill>
-                <a:latin typeface="Arial"/>
-                <a:ea typeface="Arial"/>
-                <a:cs typeface="Arial"/>
-              </a:rPr>
-              <a:t>[Relationship within the lesson content]</a:t>
-            </a:r>
-          </a:p>
-        </p:txBody>
-      </p:sp>
+              <a:t>There are 4 columns of 3 squares.</a:t>
+            </a:r>
+          </a:p>
+        </p:txBody>
+      </p:sp>
+      <p:pic>
+        <p:nvPicPr>
+          <p:cNvPr id="14" name=""/>
+          <p:cNvPicPr>
+            <a:picLocks xmlns:a="http://schemas.openxmlformats.org/drawingml/2006/main" noChangeAspect="1"/>
+          </p:cNvPicPr>
+          <p:nvPr/>
+        </p:nvPicPr>
+        <p:blipFill>
+          <a:blip xmlns:r="http://schemas.openxmlformats.org/officeDocument/2006/relationships" xmlns:a="http://schemas.openxmlformats.org/drawingml/2006/main" r:embed="R0723f3d6434a4f1a">
+            <a:extLst>
+              <a:ext uri="{96DAC541-7B7A-43D3-8B79-37D633B846F1}">
+                <asvg:svgBlip xmlns:asvg="http://schemas.microsoft.com/office/drawing/2016/SVG/main" r:embed="R71cd0f201e8a42c5"/>
+              </a:ext>
+            </a:extLst>
+          </a:blip>
+          <a:stretch xmlns:a="http://schemas.openxmlformats.org/drawingml/2006/main"/>
+        </p:blipFill>
+        <p:spPr>
+          <a:xfrm xmlns:a="http://schemas.openxmlformats.org/drawingml/2006/main">
+            <a:off x="6629400" y="2038350"/>
+            <a:ext cx="4953000" cy="3905250"/>
+          </a:xfrm>
+          <a:prstGeom xmlns:a="http://schemas.openxmlformats.org/drawingml/2006/main" prst="rect">
+            <a:avLst/>
+          </a:prstGeom>
+        </p:spPr>
+      </p:pic>
     </p:spTree>
     <p:extLst>
       <p:ext uri="{BB962C8B-B14F-4D97-AF65-F5344CB8AC3E}">
-        <p14:creationId xmlns:p14="http://schemas.microsoft.com/office/powerpoint/2010/main" val="84581825"/>
+        <p14:creationId xmlns:p14="http://schemas.microsoft.com/office/powerpoint/2010/main" val="752050715"/>
       </p:ext>
     </p:extLst>
   </p:cSld>
@@ -6709,7 +6419,7 @@
           <p:cNvPr id="8" name="visual-0">
             <a:extLst xmlns:a="http://schemas.openxmlformats.org/drawingml/2006/main">
               <a:ext uri="{FF2B5EF4-FFF2-40B4-BE49-F238E27FC236}">
-                <a16:creationId xmlns:a16="http://schemas.microsoft.com/office/drawing/2014/main" id="{E990425D-3BFC-47D0-84C3-E5B6EEAC1170}"/>
+                <a16:creationId xmlns:a16="http://schemas.microsoft.com/office/drawing/2014/main" id="{D3B434FD-B83B-4085-9EC7-C6BFF57BE061}"/>
               </a:ext>
             </a:extLst>
           </p:cNvPr>
@@ -6756,7 +6466,7 @@
                 <a:ea typeface="Arial"/>
                 <a:cs typeface="Arial"/>
               </a:rPr>
-              <a:t>BiliClass   /   Môn học của thầy cô   /   10–12</a:t>
+              <a:t>BiliClass   /   Toán · ví dụ minh họa   /   </a:t>
             </a:r>
           </a:p>
         </p:txBody>
@@ -6766,7 +6476,7 @@
           <p:cNvPr id="2" name="visual-1">
             <a:extLst xmlns:a="http://schemas.openxmlformats.org/drawingml/2006/main">
               <a:ext uri="{FF2B5EF4-FFF2-40B4-BE49-F238E27FC236}">
-                <a16:creationId xmlns:a16="http://schemas.microsoft.com/office/drawing/2014/main" id="{07FB2304-1236-4D60-B6B9-A52E2CCCC5D3}"/>
+                <a16:creationId xmlns:a16="http://schemas.microsoft.com/office/drawing/2014/main" id="{81AC60C7-F134-4244-9EFA-E4A8519A6583}"/>
               </a:ext>
             </a:extLst>
           </p:cNvPr>
@@ -6813,7 +6523,7 @@
                 <a:ea typeface="Arial"/>
                 <a:cs typeface="Arial"/>
               </a:rPr>
-              <a:t>Mẫu bài giảng song ngữ</a:t>
+              <a:t>Diện tích hình chữ nhật</a:t>
             </a:r>
           </a:p>
         </p:txBody>
@@ -6823,7 +6533,7 @@
           <p:cNvPr id="3" name="visual-2">
             <a:extLst xmlns:a="http://schemas.openxmlformats.org/drawingml/2006/main">
               <a:ext uri="{FF2B5EF4-FFF2-40B4-BE49-F238E27FC236}">
-                <a16:creationId xmlns:a16="http://schemas.microsoft.com/office/drawing/2014/main" id="{2960EC28-22D3-4EE0-B939-EEB4D2CE304F}"/>
+                <a16:creationId xmlns:a16="http://schemas.microsoft.com/office/drawing/2014/main" id="{4AE7BD07-2CED-43C6-B6B3-0B064F984894}"/>
               </a:ext>
             </a:extLst>
           </p:cNvPr>
@@ -6880,7 +6590,7 @@
           <p:cNvPr id="4" name="visual-3">
             <a:extLst xmlns:a="http://schemas.openxmlformats.org/drawingml/2006/main">
               <a:ext uri="{FF2B5EF4-FFF2-40B4-BE49-F238E27FC236}">
-                <a16:creationId xmlns:a16="http://schemas.microsoft.com/office/drawing/2014/main" id="{C3271E9D-060C-4A2B-84D0-4E625BBC9896}"/>
+                <a16:creationId xmlns:a16="http://schemas.microsoft.com/office/drawing/2014/main" id="{259595DD-B53F-4040-9818-09954CE8E13E}"/>
               </a:ext>
             </a:extLst>
           </p:cNvPr>
@@ -6927,7 +6637,7 @@
                 <a:ea typeface="Arial"/>
                 <a:cs typeface="Arial"/>
               </a:rPr>
-              <a:t>Mẫu cấu trúc · Thay bằng nội dung bài học</a:t>
+              <a:t>Ví dụ để xem thiết kế · Bài của thầy cô dùng nội dung và hình từ nguồn</a:t>
             </a:r>
           </a:p>
         </p:txBody>
@@ -6937,87 +6647,7 @@
           <p:cNvPr id="5" name="visual-4">
             <a:extLst xmlns:a="http://schemas.openxmlformats.org/drawingml/2006/main">
               <a:ext uri="{FF2B5EF4-FFF2-40B4-BE49-F238E27FC236}">
-                <a16:creationId xmlns:a16="http://schemas.microsoft.com/office/drawing/2014/main" id="{F20C4877-E29E-4637-96E3-8208AAC7093B}"/>
-              </a:ext>
-            </a:extLst>
-          </p:cNvPr>
-          <p:cNvSpPr>
-            <a:spLocks xmlns:a="http://schemas.openxmlformats.org/drawingml/2006/main" noGrp="1"/>
-          </p:cNvSpPr>
-          <p:nvPr/>
-        </p:nvSpPr>
-        <p:spPr>
-          <a:xfrm xmlns:a="http://schemas.openxmlformats.org/drawingml/2006/main">
-            <a:off x="6934200" y="3048000"/>
-            <a:ext cx="4343400" cy="1714500"/>
-          </a:xfrm>
-          <a:prstGeom xmlns:a="http://schemas.openxmlformats.org/drawingml/2006/main" prst="rect">
-            <a:avLst/>
-          </a:prstGeom>
-          <a:noFill xmlns:a="http://schemas.openxmlformats.org/drawingml/2006/main"/>
-          <a:ln xmlns:a="http://schemas.openxmlformats.org/drawingml/2006/main" w="0">
-            <a:noFill/>
-          </a:ln>
-        </p:spPr>
-        <p:txBody>
-          <a:bodyPr xmlns:a="http://schemas.openxmlformats.org/drawingml/2006/main">
-            <a:noAutofit/>
-          </a:bodyPr>
-          <a:lstStyle xmlns:a="http://schemas.openxmlformats.org/drawingml/2006/main"/>
-          <a:p xmlns:a="http://schemas.openxmlformats.org/drawingml/2006/main">
-            <a:pPr algn="ctr">
-              <a:defRPr sz="2100" b="0" i="0">
-                <a:solidFill>
-                  <a:srgbClr val="667997"/>
-                </a:solidFill>
-                <a:latin typeface="Arial"/>
-                <a:ea typeface="Arial"/>
-                <a:cs typeface="Arial"/>
-              </a:defRPr>
-            </a:pPr>
-            <a:r>
-              <a:rPr sz="2100" b="0" i="0">
-                <a:solidFill>
-                  <a:srgbClr val="667997"/>
-                </a:solidFill>
-                <a:latin typeface="Arial"/>
-                <a:ea typeface="Arial"/>
-                <a:cs typeface="Arial"/>
-              </a:rPr>
-              <a:t>[Hình từ tài liệu bài học]</a:t>
-            </a:r>
-          </a:p>
-          <a:p xmlns:a="http://schemas.openxmlformats.org/drawingml/2006/main">
-            <a:pPr algn="ctr">
-              <a:defRPr sz="2100" b="0" i="0">
-                <a:solidFill>
-                  <a:srgbClr val="667997"/>
-                </a:solidFill>
-                <a:latin typeface="Arial"/>
-                <a:ea typeface="Arial"/>
-                <a:cs typeface="Arial"/>
-              </a:defRPr>
-            </a:pPr>
-            <a:r>
-              <a:rPr sz="2100" b="0" i="0">
-                <a:solidFill>
-                  <a:srgbClr val="667997"/>
-                </a:solidFill>
-                <a:latin typeface="Arial"/>
-                <a:ea typeface="Arial"/>
-                <a:cs typeface="Arial"/>
-              </a:rPr>
-              <a:t>[Image from the lesson source]</a:t>
-            </a:r>
-          </a:p>
-        </p:txBody>
-      </p:sp>
-      <p:sp>
-        <p:nvSpPr>
-          <p:cNvPr id="6" name="visual-5">
-            <a:extLst xmlns:a="http://schemas.openxmlformats.org/drawingml/2006/main">
-              <a:ext uri="{FF2B5EF4-FFF2-40B4-BE49-F238E27FC236}">
-                <a16:creationId xmlns:a16="http://schemas.microsoft.com/office/drawing/2014/main" id="{66161D3F-43F7-4DBD-B42D-A9ECBDE6369C}"/>
+                <a16:creationId xmlns:a16="http://schemas.microsoft.com/office/drawing/2014/main" id="{F8FCCF04-E040-4690-821C-2FCBF1FD4CF1}"/>
               </a:ext>
             </a:extLst>
           </p:cNvPr>
@@ -7046,7 +6676,7 @@
           <a:lstStyle xmlns:a="http://schemas.openxmlformats.org/drawingml/2006/main"/>
           <a:p xmlns:a="http://schemas.openxmlformats.org/drawingml/2006/main">
             <a:pPr algn="l">
-              <a:defRPr sz="2250" b="0" i="0">
+              <a:defRPr sz="2100" b="0" i="0">
                 <a:solidFill>
                   <a:srgbClr val="112650"/>
                 </a:solidFill>
@@ -7056,7 +6686,7 @@
               </a:defRPr>
             </a:pPr>
             <a:r>
-              <a:rPr sz="2250" b="0" i="0">
+              <a:rPr sz="2100" b="0" i="0">
                 <a:solidFill>
                   <a:srgbClr val="112650"/>
                 </a:solidFill>
@@ -7064,40 +6694,17 @@
                 <a:ea typeface="Arial"/>
                 <a:cs typeface="Arial"/>
               </a:rPr>
-              <a:t>[Điều cần quan sát trong hình]</a:t>
-            </a:r>
-          </a:p>
-          <a:p xmlns:a="http://schemas.openxmlformats.org/drawingml/2006/main">
-            <a:pPr algn="l">
-              <a:defRPr sz="2250" b="0" i="0">
-                <a:solidFill>
-                  <a:srgbClr val="112650"/>
-                </a:solidFill>
-                <a:latin typeface="Arial"/>
-                <a:ea typeface="Arial"/>
-                <a:cs typeface="Arial"/>
-              </a:defRPr>
-            </a:pPr>
-            <a:r>
-              <a:rPr sz="2250" b="0" i="0">
-                <a:solidFill>
-                  <a:srgbClr val="112650"/>
-                </a:solidFill>
-                <a:latin typeface="Arial"/>
-                <a:ea typeface="Arial"/>
-                <a:cs typeface="Arial"/>
-              </a:rPr>
-              <a:t>[Chú thích từ tài liệu nguồn]</a:t>
-            </a:r>
-          </a:p>
-        </p:txBody>
-      </p:sp>
-      <p:sp>
-        <p:nvSpPr>
-          <p:cNvPr id="7" name="visual-6">
-            <a:extLst xmlns:a="http://schemas.openxmlformats.org/drawingml/2006/main">
-              <a:ext uri="{FF2B5EF4-FFF2-40B4-BE49-F238E27FC236}">
-                <a16:creationId xmlns:a16="http://schemas.microsoft.com/office/drawing/2014/main" id="{F61F0D52-D219-4593-ABBB-DC5AF677FBEF}"/>
+              <a:t>Quan sát hình 4 cm × 3 cm.</a:t>
+            </a:r>
+          </a:p>
+        </p:txBody>
+      </p:sp>
+      <p:sp>
+        <p:nvSpPr>
+          <p:cNvPr id="6" name="visual-5">
+            <a:extLst xmlns:a="http://schemas.openxmlformats.org/drawingml/2006/main">
+              <a:ext uri="{FF2B5EF4-FFF2-40B4-BE49-F238E27FC236}">
+                <a16:creationId xmlns:a16="http://schemas.microsoft.com/office/drawing/2014/main" id="{19179ECB-CE39-4B6B-882E-0D0493490472}"/>
               </a:ext>
             </a:extLst>
           </p:cNvPr>
@@ -7126,7 +6733,7 @@
           <a:lstStyle xmlns:a="http://schemas.openxmlformats.org/drawingml/2006/main"/>
           <a:p xmlns:a="http://schemas.openxmlformats.org/drawingml/2006/main">
             <a:pPr algn="l">
-              <a:defRPr sz="2250" b="0" i="1">
+              <a:defRPr sz="2100" b="0" i="1">
                 <a:solidFill>
                   <a:srgbClr val="0869F9"/>
                 </a:solidFill>
@@ -7136,7 +6743,7 @@
               </a:defRPr>
             </a:pPr>
             <a:r>
-              <a:rPr sz="2250" b="0" i="1">
+              <a:rPr sz="2100" b="0" i="1">
                 <a:solidFill>
                   <a:srgbClr val="0869F9"/>
                 </a:solidFill>
@@ -7144,38 +6751,43 @@
                 <a:ea typeface="Arial"/>
                 <a:cs typeface="Arial"/>
               </a:rPr>
-              <a:t>[What to observe in the image]</a:t>
-            </a:r>
-          </a:p>
-          <a:p xmlns:a="http://schemas.openxmlformats.org/drawingml/2006/main">
-            <a:pPr algn="l">
-              <a:defRPr sz="2250" b="0" i="1">
-                <a:solidFill>
-                  <a:srgbClr val="0869F9"/>
-                </a:solidFill>
-                <a:latin typeface="Arial"/>
-                <a:ea typeface="Arial"/>
-                <a:cs typeface="Arial"/>
-              </a:defRPr>
-            </a:pPr>
-            <a:r>
-              <a:rPr sz="2250" b="0" i="1">
-                <a:solidFill>
-                  <a:srgbClr val="0869F9"/>
-                </a:solidFill>
-                <a:latin typeface="Arial"/>
-                <a:ea typeface="Arial"/>
-                <a:cs typeface="Arial"/>
-              </a:rPr>
-              <a:t>[Caption from the source document]</a:t>
-            </a:r>
-          </a:p>
-        </p:txBody>
-      </p:sp>
+              <a:t>Observe the 4 cm × 3 cm rectangle.</a:t>
+            </a:r>
+          </a:p>
+        </p:txBody>
+      </p:sp>
+      <p:pic>
+        <p:nvPicPr>
+          <p:cNvPr id="14" name=""/>
+          <p:cNvPicPr>
+            <a:picLocks xmlns:a="http://schemas.openxmlformats.org/drawingml/2006/main" noChangeAspect="1"/>
+          </p:cNvPicPr>
+          <p:nvPr/>
+        </p:nvPicPr>
+        <p:blipFill>
+          <a:blip xmlns:r="http://schemas.openxmlformats.org/officeDocument/2006/relationships" xmlns:a="http://schemas.openxmlformats.org/drawingml/2006/main" r:embed="R99e064cc6c1d4e48">
+            <a:extLst>
+              <a:ext uri="{96DAC541-7B7A-43D3-8B79-37D633B846F1}">
+                <asvg:svgBlip xmlns:asvg="http://schemas.microsoft.com/office/drawing/2016/SVG/main" r:embed="R2424a24957e541c3"/>
+              </a:ext>
+            </a:extLst>
+          </a:blip>
+          <a:stretch xmlns:a="http://schemas.openxmlformats.org/drawingml/2006/main"/>
+        </p:blipFill>
+        <p:spPr>
+          <a:xfrm xmlns:a="http://schemas.openxmlformats.org/drawingml/2006/main">
+            <a:off x="6629400" y="2038350"/>
+            <a:ext cx="4953000" cy="3905250"/>
+          </a:xfrm>
+          <a:prstGeom xmlns:a="http://schemas.openxmlformats.org/drawingml/2006/main" prst="rect">
+            <a:avLst/>
+          </a:prstGeom>
+        </p:spPr>
+      </p:pic>
     </p:spTree>
     <p:extLst>
       <p:ext uri="{BB962C8B-B14F-4D97-AF65-F5344CB8AC3E}">
-        <p14:creationId xmlns:p14="http://schemas.microsoft.com/office/powerpoint/2010/main" val="1572666566"/>
+        <p14:creationId xmlns:p14="http://schemas.microsoft.com/office/powerpoint/2010/main" val="2117549529"/>
       </p:ext>
     </p:extLst>
   </p:cSld>
@@ -7203,10 +6815,10 @@
       </p:grpSpPr>
       <p:sp>
         <p:nvSpPr>
-          <p:cNvPr id="7" name="compare-0">
-            <a:extLst xmlns:a="http://schemas.openxmlformats.org/drawingml/2006/main">
-              <a:ext uri="{FF2B5EF4-FFF2-40B4-BE49-F238E27FC236}">
-                <a16:creationId xmlns:a16="http://schemas.microsoft.com/office/drawing/2014/main" id="{F8FB01E3-10D9-4E0E-9953-E0E3BC0773E1}"/>
+          <p:cNvPr id="8" name="compare-0">
+            <a:extLst xmlns:a="http://schemas.openxmlformats.org/drawingml/2006/main">
+              <a:ext uri="{FF2B5EF4-FFF2-40B4-BE49-F238E27FC236}">
+                <a16:creationId xmlns:a16="http://schemas.microsoft.com/office/drawing/2014/main" id="{CADA6F12-D3DA-4622-849F-8377A96436E5}"/>
               </a:ext>
             </a:extLst>
           </p:cNvPr>
@@ -7253,7 +6865,7 @@
                 <a:ea typeface="Arial"/>
                 <a:cs typeface="Arial"/>
               </a:rPr>
-              <a:t>BiliClass   /   Môn học của thầy cô   /   10–12</a:t>
+              <a:t>BiliClass   /   Toán · ví dụ minh họa   /   </a:t>
             </a:r>
           </a:p>
         </p:txBody>
@@ -7263,7 +6875,7 @@
           <p:cNvPr id="2" name="compare-1">
             <a:extLst xmlns:a="http://schemas.openxmlformats.org/drawingml/2006/main">
               <a:ext uri="{FF2B5EF4-FFF2-40B4-BE49-F238E27FC236}">
-                <a16:creationId xmlns:a16="http://schemas.microsoft.com/office/drawing/2014/main" id="{1E04B051-7B9C-455C-8BA9-4C0AC5603351}"/>
+                <a16:creationId xmlns:a16="http://schemas.microsoft.com/office/drawing/2014/main" id="{3BD56277-AD95-47AE-A29E-F7A88B0FB88B}"/>
               </a:ext>
             </a:extLst>
           </p:cNvPr>
@@ -7310,7 +6922,7 @@
                 <a:ea typeface="Arial"/>
                 <a:cs typeface="Arial"/>
               </a:rPr>
-              <a:t>Mẫu bài giảng song ngữ</a:t>
+              <a:t>Diện tích hình chữ nhật</a:t>
             </a:r>
           </a:p>
         </p:txBody>
@@ -7320,7 +6932,7 @@
           <p:cNvPr id="3" name="compare-2">
             <a:extLst xmlns:a="http://schemas.openxmlformats.org/drawingml/2006/main">
               <a:ext uri="{FF2B5EF4-FFF2-40B4-BE49-F238E27FC236}">
-                <a16:creationId xmlns:a16="http://schemas.microsoft.com/office/drawing/2014/main" id="{45DA15F2-D79B-44A3-B282-CD20FAA201F6}"/>
+                <a16:creationId xmlns:a16="http://schemas.microsoft.com/office/drawing/2014/main" id="{BC0EFA3A-8369-43B2-AB93-958AD8CAA0EE}"/>
               </a:ext>
             </a:extLst>
           </p:cNvPr>
@@ -7377,7 +6989,7 @@
           <p:cNvPr id="4" name="compare-3">
             <a:extLst xmlns:a="http://schemas.openxmlformats.org/drawingml/2006/main">
               <a:ext uri="{FF2B5EF4-FFF2-40B4-BE49-F238E27FC236}">
-                <a16:creationId xmlns:a16="http://schemas.microsoft.com/office/drawing/2014/main" id="{B732920E-4259-4851-AD0C-E0D077CD2101}"/>
+                <a16:creationId xmlns:a16="http://schemas.microsoft.com/office/drawing/2014/main" id="{8F6E2776-D4A9-4B3C-A243-3916801EED5B}"/>
               </a:ext>
             </a:extLst>
           </p:cNvPr>
@@ -7424,7 +7036,7 @@
                 <a:ea typeface="Arial"/>
                 <a:cs typeface="Arial"/>
               </a:rPr>
-              <a:t>Mẫu cấu trúc · Thay bằng nội dung bài học</a:t>
+              <a:t>Ví dụ để xem thiết kế · Bài của thầy cô dùng nội dung và hình từ nguồn</a:t>
             </a:r>
           </a:p>
         </p:txBody>
@@ -7434,7 +7046,7 @@
           <p:cNvPr id="5" name="compare-4">
             <a:extLst xmlns:a="http://schemas.openxmlformats.org/drawingml/2006/main">
               <a:ext uri="{FF2B5EF4-FFF2-40B4-BE49-F238E27FC236}">
-                <a16:creationId xmlns:a16="http://schemas.microsoft.com/office/drawing/2014/main" id="{60B95D63-FE3A-47CF-9589-25CFE6F9A61A}"/>
+                <a16:creationId xmlns:a16="http://schemas.microsoft.com/office/drawing/2014/main" id="{D22910F1-99D7-4E97-BA9F-BF0190796AB6}"/>
               </a:ext>
             </a:extLst>
           </p:cNvPr>
@@ -7446,24 +7058,24 @@
         <p:spPr>
           <a:xfrm xmlns:a="http://schemas.openxmlformats.org/drawingml/2006/main">
             <a:off x="609600" y="2038350"/>
-            <a:ext cx="10972800" cy="1790700"/>
-          </a:xfrm>
-          <a:prstGeom xmlns:a="http://schemas.openxmlformats.org/drawingml/2006/main" prst="rect">
-            <a:avLst/>
-          </a:prstGeom>
-          <a:noFill xmlns:a="http://schemas.openxmlformats.org/drawingml/2006/main"/>
-          <a:ln xmlns:a="http://schemas.openxmlformats.org/drawingml/2006/main" w="0">
-            <a:noFill/>
-          </a:ln>
-        </p:spPr>
-        <p:txBody>
-          <a:bodyPr xmlns:a="http://schemas.openxmlformats.org/drawingml/2006/main">
-            <a:noAutofit/>
-          </a:bodyPr>
-          <a:lstStyle xmlns:a="http://schemas.openxmlformats.org/drawingml/2006/main"/>
-          <a:p xmlns:a="http://schemas.openxmlformats.org/drawingml/2006/main">
-            <a:pPr algn="l">
-              <a:defRPr sz="2400" b="0" i="0">
+            <a:ext cx="5219700" cy="1790700"/>
+          </a:xfrm>
+          <a:prstGeom xmlns:a="http://schemas.openxmlformats.org/drawingml/2006/main" prst="rect">
+            <a:avLst/>
+          </a:prstGeom>
+          <a:noFill xmlns:a="http://schemas.openxmlformats.org/drawingml/2006/main"/>
+          <a:ln xmlns:a="http://schemas.openxmlformats.org/drawingml/2006/main" w="0">
+            <a:noFill/>
+          </a:ln>
+        </p:spPr>
+        <p:txBody>
+          <a:bodyPr xmlns:a="http://schemas.openxmlformats.org/drawingml/2006/main">
+            <a:noAutofit/>
+          </a:bodyPr>
+          <a:lstStyle xmlns:a="http://schemas.openxmlformats.org/drawingml/2006/main"/>
+          <a:p xmlns:a="http://schemas.openxmlformats.org/drawingml/2006/main">
+            <a:pPr algn="l">
+              <a:defRPr sz="2100" b="0" i="0">
                 <a:solidFill>
                   <a:srgbClr val="112650"/>
                 </a:solidFill>
@@ -7473,7 +7085,7 @@
               </a:defRPr>
             </a:pPr>
             <a:r>
-              <a:rPr sz="2400" b="0" i="0">
+              <a:rPr sz="2100" b="0" i="0">
                 <a:solidFill>
                   <a:srgbClr val="112650"/>
                 </a:solidFill>
@@ -7481,53 +7093,7 @@
                 <a:ea typeface="Arial"/>
                 <a:cs typeface="Arial"/>
               </a:rPr>
-              <a:t>[Tiêu chí so sánh]</a:t>
-            </a:r>
-          </a:p>
-          <a:p xmlns:a="http://schemas.openxmlformats.org/drawingml/2006/main">
-            <a:pPr algn="l">
-              <a:defRPr sz="2400" b="0" i="0">
-                <a:solidFill>
-                  <a:srgbClr val="112650"/>
-                </a:solidFill>
-                <a:latin typeface="Arial"/>
-                <a:ea typeface="Arial"/>
-                <a:cs typeface="Arial"/>
-              </a:defRPr>
-            </a:pPr>
-            <a:r>
-              <a:rPr sz="2400" b="0" i="0">
-                <a:solidFill>
-                  <a:srgbClr val="112650"/>
-                </a:solidFill>
-                <a:latin typeface="Arial"/>
-                <a:ea typeface="Arial"/>
-                <a:cs typeface="Arial"/>
-              </a:rPr>
-              <a:t>[Điểm giống nhau]</a:t>
-            </a:r>
-          </a:p>
-          <a:p xmlns:a="http://schemas.openxmlformats.org/drawingml/2006/main">
-            <a:pPr algn="l">
-              <a:defRPr sz="2400" b="0" i="0">
-                <a:solidFill>
-                  <a:srgbClr val="112650"/>
-                </a:solidFill>
-                <a:latin typeface="Arial"/>
-                <a:ea typeface="Arial"/>
-                <a:cs typeface="Arial"/>
-              </a:defRPr>
-            </a:pPr>
-            <a:r>
-              <a:rPr sz="2400" b="0" i="0">
-                <a:solidFill>
-                  <a:srgbClr val="112650"/>
-                </a:solidFill>
-                <a:latin typeface="Arial"/>
-                <a:ea typeface="Arial"/>
-                <a:cs typeface="Arial"/>
-              </a:rPr>
-              <a:t>[Điểm khác nhau]</a:t>
+              <a:t>Chu vi đo đường bao; diện tích đo bề mặt.</a:t>
             </a:r>
           </a:p>
         </p:txBody>
@@ -7537,7 +7103,7 @@
           <p:cNvPr id="6" name="compare-5">
             <a:extLst xmlns:a="http://schemas.openxmlformats.org/drawingml/2006/main">
               <a:ext uri="{FF2B5EF4-FFF2-40B4-BE49-F238E27FC236}">
-                <a16:creationId xmlns:a16="http://schemas.microsoft.com/office/drawing/2014/main" id="{6A4C728D-6850-4B5B-A470-3DBC51659C62}"/>
+                <a16:creationId xmlns:a16="http://schemas.microsoft.com/office/drawing/2014/main" id="{2DF08AB7-A328-4912-B394-3E69BF61477C}"/>
               </a:ext>
             </a:extLst>
           </p:cNvPr>
@@ -7549,24 +7115,24 @@
         <p:spPr>
           <a:xfrm xmlns:a="http://schemas.openxmlformats.org/drawingml/2006/main">
             <a:off x="609600" y="4152900"/>
-            <a:ext cx="10972800" cy="1790700"/>
-          </a:xfrm>
-          <a:prstGeom xmlns:a="http://schemas.openxmlformats.org/drawingml/2006/main" prst="rect">
-            <a:avLst/>
-          </a:prstGeom>
-          <a:noFill xmlns:a="http://schemas.openxmlformats.org/drawingml/2006/main"/>
-          <a:ln xmlns:a="http://schemas.openxmlformats.org/drawingml/2006/main" w="0">
-            <a:noFill/>
-          </a:ln>
-        </p:spPr>
-        <p:txBody>
-          <a:bodyPr xmlns:a="http://schemas.openxmlformats.org/drawingml/2006/main">
-            <a:noAutofit/>
-          </a:bodyPr>
-          <a:lstStyle xmlns:a="http://schemas.openxmlformats.org/drawingml/2006/main"/>
-          <a:p xmlns:a="http://schemas.openxmlformats.org/drawingml/2006/main">
-            <a:pPr algn="l">
-              <a:defRPr sz="2400" b="0" i="1">
+            <a:ext cx="5219700" cy="1790700"/>
+          </a:xfrm>
+          <a:prstGeom xmlns:a="http://schemas.openxmlformats.org/drawingml/2006/main" prst="rect">
+            <a:avLst/>
+          </a:prstGeom>
+          <a:noFill xmlns:a="http://schemas.openxmlformats.org/drawingml/2006/main"/>
+          <a:ln xmlns:a="http://schemas.openxmlformats.org/drawingml/2006/main" w="0">
+            <a:noFill/>
+          </a:ln>
+        </p:spPr>
+        <p:txBody>
+          <a:bodyPr xmlns:a="http://schemas.openxmlformats.org/drawingml/2006/main">
+            <a:noAutofit/>
+          </a:bodyPr>
+          <a:lstStyle xmlns:a="http://schemas.openxmlformats.org/drawingml/2006/main"/>
+          <a:p xmlns:a="http://schemas.openxmlformats.org/drawingml/2006/main">
+            <a:pPr algn="l">
+              <a:defRPr sz="2100" b="0" i="1">
                 <a:solidFill>
                   <a:srgbClr val="0869F9"/>
                 </a:solidFill>
@@ -7576,7 +7142,7 @@
               </a:defRPr>
             </a:pPr>
             <a:r>
-              <a:rPr sz="2400" b="0" i="1">
+              <a:rPr sz="2100" b="0" i="1">
                 <a:solidFill>
                   <a:srgbClr val="0869F9"/>
                 </a:solidFill>
@@ -7584,61 +7150,43 @@
                 <a:ea typeface="Arial"/>
                 <a:cs typeface="Arial"/>
               </a:rPr>
-              <a:t>[Comparison criterion]</a:t>
-            </a:r>
-          </a:p>
-          <a:p xmlns:a="http://schemas.openxmlformats.org/drawingml/2006/main">
-            <a:pPr algn="l">
-              <a:defRPr sz="2400" b="0" i="1">
-                <a:solidFill>
-                  <a:srgbClr val="0869F9"/>
-                </a:solidFill>
-                <a:latin typeface="Arial"/>
-                <a:ea typeface="Arial"/>
-                <a:cs typeface="Arial"/>
-              </a:defRPr>
-            </a:pPr>
-            <a:r>
-              <a:rPr sz="2400" b="0" i="1">
-                <a:solidFill>
-                  <a:srgbClr val="0869F9"/>
-                </a:solidFill>
-                <a:latin typeface="Arial"/>
-                <a:ea typeface="Arial"/>
-                <a:cs typeface="Arial"/>
-              </a:rPr>
-              <a:t>[Similarities]</a:t>
-            </a:r>
-          </a:p>
-          <a:p xmlns:a="http://schemas.openxmlformats.org/drawingml/2006/main">
-            <a:pPr algn="l">
-              <a:defRPr sz="2400" b="0" i="1">
-                <a:solidFill>
-                  <a:srgbClr val="0869F9"/>
-                </a:solidFill>
-                <a:latin typeface="Arial"/>
-                <a:ea typeface="Arial"/>
-                <a:cs typeface="Arial"/>
-              </a:defRPr>
-            </a:pPr>
-            <a:r>
-              <a:rPr sz="2400" b="0" i="1">
-                <a:solidFill>
-                  <a:srgbClr val="0869F9"/>
-                </a:solidFill>
-                <a:latin typeface="Arial"/>
-                <a:ea typeface="Arial"/>
-                <a:cs typeface="Arial"/>
-              </a:rPr>
-              <a:t>[Differences]</a:t>
-            </a:r>
-          </a:p>
-        </p:txBody>
-      </p:sp>
+              <a:t>Perimeter measures the boundary; area measures the surface.</a:t>
+            </a:r>
+          </a:p>
+        </p:txBody>
+      </p:sp>
+      <p:pic>
+        <p:nvPicPr>
+          <p:cNvPr id="14" name=""/>
+          <p:cNvPicPr>
+            <a:picLocks xmlns:a="http://schemas.openxmlformats.org/drawingml/2006/main" noChangeAspect="1"/>
+          </p:cNvPicPr>
+          <p:nvPr/>
+        </p:nvPicPr>
+        <p:blipFill>
+          <a:blip xmlns:r="http://schemas.openxmlformats.org/officeDocument/2006/relationships" xmlns:a="http://schemas.openxmlformats.org/drawingml/2006/main" r:embed="R27312915e8ed416f">
+            <a:extLst>
+              <a:ext uri="{96DAC541-7B7A-43D3-8B79-37D633B846F1}">
+                <asvg:svgBlip xmlns:asvg="http://schemas.microsoft.com/office/drawing/2016/SVG/main" r:embed="R442b711bcef34ca2"/>
+              </a:ext>
+            </a:extLst>
+          </a:blip>
+          <a:stretch xmlns:a="http://schemas.openxmlformats.org/drawingml/2006/main"/>
+        </p:blipFill>
+        <p:spPr>
+          <a:xfrm xmlns:a="http://schemas.openxmlformats.org/drawingml/2006/main">
+            <a:off x="6629400" y="2038350"/>
+            <a:ext cx="4953000" cy="3905250"/>
+          </a:xfrm>
+          <a:prstGeom xmlns:a="http://schemas.openxmlformats.org/drawingml/2006/main" prst="rect">
+            <a:avLst/>
+          </a:prstGeom>
+        </p:spPr>
+      </p:pic>
     </p:spTree>
     <p:extLst>
       <p:ext uri="{BB962C8B-B14F-4D97-AF65-F5344CB8AC3E}">
-        <p14:creationId xmlns:p14="http://schemas.microsoft.com/office/powerpoint/2010/main" val="491747211"/>
+        <p14:creationId xmlns:p14="http://schemas.microsoft.com/office/powerpoint/2010/main" val="1506693141"/>
       </p:ext>
     </p:extLst>
   </p:cSld>
@@ -7666,10 +7214,10 @@
       </p:grpSpPr>
       <p:sp>
         <p:nvSpPr>
-          <p:cNvPr id="7" name="formula-0">
-            <a:extLst xmlns:a="http://schemas.openxmlformats.org/drawingml/2006/main">
-              <a:ext uri="{FF2B5EF4-FFF2-40B4-BE49-F238E27FC236}">
-                <a16:creationId xmlns:a16="http://schemas.microsoft.com/office/drawing/2014/main" id="{5ADE5D3C-4086-4224-AD0F-323E55E09703}"/>
+          <p:cNvPr id="8" name="formula-0">
+            <a:extLst xmlns:a="http://schemas.openxmlformats.org/drawingml/2006/main">
+              <a:ext uri="{FF2B5EF4-FFF2-40B4-BE49-F238E27FC236}">
+                <a16:creationId xmlns:a16="http://schemas.microsoft.com/office/drawing/2014/main" id="{EC1592FB-F1B1-40DE-AEC4-E92CEAB48879}"/>
               </a:ext>
             </a:extLst>
           </p:cNvPr>
@@ -7716,7 +7264,7 @@
                 <a:ea typeface="Arial"/>
                 <a:cs typeface="Arial"/>
               </a:rPr>
-              <a:t>BiliClass   /   Môn học của thầy cô   /   10–12</a:t>
+              <a:t>BiliClass   /   Toán · ví dụ minh họa   /   </a:t>
             </a:r>
           </a:p>
         </p:txBody>
@@ -7726,7 +7274,7 @@
           <p:cNvPr id="2" name="formula-1">
             <a:extLst xmlns:a="http://schemas.openxmlformats.org/drawingml/2006/main">
               <a:ext uri="{FF2B5EF4-FFF2-40B4-BE49-F238E27FC236}">
-                <a16:creationId xmlns:a16="http://schemas.microsoft.com/office/drawing/2014/main" id="{2FF91076-B08D-40C1-BC52-4FA75A3EE15C}"/>
+                <a16:creationId xmlns:a16="http://schemas.microsoft.com/office/drawing/2014/main" id="{8425D683-CED0-4AE1-9CEC-3A364632498F}"/>
               </a:ext>
             </a:extLst>
           </p:cNvPr>
@@ -7773,7 +7321,7 @@
                 <a:ea typeface="Arial"/>
                 <a:cs typeface="Arial"/>
               </a:rPr>
-              <a:t>Mẫu bài giảng song ngữ</a:t>
+              <a:t>Diện tích hình chữ nhật</a:t>
             </a:r>
           </a:p>
         </p:txBody>
@@ -7783,7 +7331,7 @@
           <p:cNvPr id="3" name="formula-2">
             <a:extLst xmlns:a="http://schemas.openxmlformats.org/drawingml/2006/main">
               <a:ext uri="{FF2B5EF4-FFF2-40B4-BE49-F238E27FC236}">
-                <a16:creationId xmlns:a16="http://schemas.microsoft.com/office/drawing/2014/main" id="{1C2F9B44-3BCA-4416-ADA8-D60B45303493}"/>
+                <a16:creationId xmlns:a16="http://schemas.microsoft.com/office/drawing/2014/main" id="{2FBBB01D-94D0-47E8-A2BE-4486D8182340}"/>
               </a:ext>
             </a:extLst>
           </p:cNvPr>
@@ -7840,7 +7388,7 @@
           <p:cNvPr id="4" name="formula-3">
             <a:extLst xmlns:a="http://schemas.openxmlformats.org/drawingml/2006/main">
               <a:ext uri="{FF2B5EF4-FFF2-40B4-BE49-F238E27FC236}">
-                <a16:creationId xmlns:a16="http://schemas.microsoft.com/office/drawing/2014/main" id="{99F2E0F4-5C1F-419F-B678-942959392CAD}"/>
+                <a16:creationId xmlns:a16="http://schemas.microsoft.com/office/drawing/2014/main" id="{99E95F46-0C23-4B66-A15A-206A2AF7191C}"/>
               </a:ext>
             </a:extLst>
           </p:cNvPr>
@@ -7887,7 +7435,7 @@
                 <a:ea typeface="Arial"/>
                 <a:cs typeface="Arial"/>
               </a:rPr>
-              <a:t>Mẫu cấu trúc · Thay bằng nội dung bài học</a:t>
+              <a:t>Ví dụ để xem thiết kế · Bài của thầy cô dùng nội dung và hình từ nguồn</a:t>
             </a:r>
           </a:p>
         </p:txBody>
@@ -7897,7 +7445,7 @@
           <p:cNvPr id="5" name="formula-4">
             <a:extLst xmlns:a="http://schemas.openxmlformats.org/drawingml/2006/main">
               <a:ext uri="{FF2B5EF4-FFF2-40B4-BE49-F238E27FC236}">
-                <a16:creationId xmlns:a16="http://schemas.microsoft.com/office/drawing/2014/main" id="{6DBAF697-C1B3-46D4-A5FB-EDFCCC20A439}"/>
+                <a16:creationId xmlns:a16="http://schemas.microsoft.com/office/drawing/2014/main" id="{02FC7888-37C4-4559-A54A-100B8B89073C}"/>
               </a:ext>
             </a:extLst>
           </p:cNvPr>
@@ -7909,7 +7457,7 @@
         <p:spPr>
           <a:xfrm xmlns:a="http://schemas.openxmlformats.org/drawingml/2006/main">
             <a:off x="609600" y="2038350"/>
-            <a:ext cx="10972800" cy="1790700"/>
+            <a:ext cx="5219700" cy="1790700"/>
           </a:xfrm>
           <a:prstGeom xmlns:a="http://schemas.openxmlformats.org/drawingml/2006/main" prst="rect">
             <a:avLst/>
@@ -7926,7 +7474,7 @@
           <a:lstStyle xmlns:a="http://schemas.openxmlformats.org/drawingml/2006/main"/>
           <a:p xmlns:a="http://schemas.openxmlformats.org/drawingml/2006/main">
             <a:pPr algn="ctr">
-              <a:defRPr sz="3150" b="1" i="0">
+              <a:defRPr sz="2100" b="1" i="0">
                 <a:solidFill>
                   <a:srgbClr val="112650"/>
                 </a:solidFill>
@@ -7936,7 +7484,7 @@
               </a:defRPr>
             </a:pPr>
             <a:r>
-              <a:rPr sz="3150" b="1" i="0">
+              <a:rPr sz="2100" b="1" i="0">
                 <a:solidFill>
                   <a:srgbClr val="112650"/>
                 </a:solidFill>
@@ -7944,12 +7492,12 @@
                 <a:ea typeface="Arial"/>
                 <a:cs typeface="Arial"/>
               </a:rPr>
-              <a:t>[Công thức hoặc quy tắc]</a:t>
+              <a:t>S = a × b</a:t>
             </a:r>
           </a:p>
           <a:p xmlns:a="http://schemas.openxmlformats.org/drawingml/2006/main">
             <a:pPr algn="ctr">
-              <a:defRPr sz="3150" b="1" i="0">
+              <a:defRPr sz="2100" b="1" i="0">
                 <a:solidFill>
                   <a:srgbClr val="112650"/>
                 </a:solidFill>
@@ -7959,7 +7507,7 @@
               </a:defRPr>
             </a:pPr>
             <a:r>
-              <a:rPr sz="3150" b="1" i="0">
+              <a:rPr sz="2100" b="1" i="0">
                 <a:solidFill>
                   <a:srgbClr val="112650"/>
                 </a:solidFill>
@@ -7967,7 +7515,7 @@
                 <a:ea typeface="Arial"/>
                 <a:cs typeface="Arial"/>
               </a:rPr>
-              <a:t>[Điều kiện áp dụng]</a:t>
+              <a:t>a, b cùng đơn vị đo.</a:t>
             </a:r>
           </a:p>
         </p:txBody>
@@ -7977,7 +7525,7 @@
           <p:cNvPr id="6" name="formula-5">
             <a:extLst xmlns:a="http://schemas.openxmlformats.org/drawingml/2006/main">
               <a:ext uri="{FF2B5EF4-FFF2-40B4-BE49-F238E27FC236}">
-                <a16:creationId xmlns:a16="http://schemas.microsoft.com/office/drawing/2014/main" id="{24C6BBB7-B09F-4A80-80BD-B02F30DD6DBB}"/>
+                <a16:creationId xmlns:a16="http://schemas.microsoft.com/office/drawing/2014/main" id="{E38C9105-9B1B-492D-AC3C-8973DAD8316D}"/>
               </a:ext>
             </a:extLst>
           </p:cNvPr>
@@ -7989,7 +7537,7 @@
         <p:spPr>
           <a:xfrm xmlns:a="http://schemas.openxmlformats.org/drawingml/2006/main">
             <a:off x="609600" y="4152900"/>
-            <a:ext cx="10972800" cy="1790700"/>
+            <a:ext cx="5219700" cy="1790700"/>
           </a:xfrm>
           <a:prstGeom xmlns:a="http://schemas.openxmlformats.org/drawingml/2006/main" prst="rect">
             <a:avLst/>
@@ -8006,7 +7554,7 @@
           <a:lstStyle xmlns:a="http://schemas.openxmlformats.org/drawingml/2006/main"/>
           <a:p xmlns:a="http://schemas.openxmlformats.org/drawingml/2006/main">
             <a:pPr algn="ctr">
-              <a:defRPr sz="3150" b="1" i="1">
+              <a:defRPr sz="2100" b="1" i="1">
                 <a:solidFill>
                   <a:srgbClr val="0869F9"/>
                 </a:solidFill>
@@ -8016,7 +7564,7 @@
               </a:defRPr>
             </a:pPr>
             <a:r>
-              <a:rPr sz="3150" b="1" i="1">
+              <a:rPr sz="2100" b="1" i="1">
                 <a:solidFill>
                   <a:srgbClr val="0869F9"/>
                 </a:solidFill>
@@ -8024,12 +7572,12 @@
                 <a:ea typeface="Arial"/>
                 <a:cs typeface="Arial"/>
               </a:rPr>
-              <a:t>[Formula or rule]</a:t>
+              <a:t>A = length × width</a:t>
             </a:r>
           </a:p>
           <a:p xmlns:a="http://schemas.openxmlformats.org/drawingml/2006/main">
             <a:pPr algn="ctr">
-              <a:defRPr sz="3150" b="1" i="1">
+              <a:defRPr sz="2100" b="1" i="1">
                 <a:solidFill>
                   <a:srgbClr val="0869F9"/>
                 </a:solidFill>
@@ -8039,7 +7587,7 @@
               </a:defRPr>
             </a:pPr>
             <a:r>
-              <a:rPr sz="3150" b="1" i="1">
+              <a:rPr sz="2100" b="1" i="1">
                 <a:solidFill>
                   <a:srgbClr val="0869F9"/>
                 </a:solidFill>
@@ -8047,15 +7595,43 @@
                 <a:ea typeface="Arial"/>
                 <a:cs typeface="Arial"/>
               </a:rPr>
-              <a:t>[Conditions of use]</a:t>
-            </a:r>
-          </a:p>
-        </p:txBody>
-      </p:sp>
+              <a:t>Use the same length unit.</a:t>
+            </a:r>
+          </a:p>
+        </p:txBody>
+      </p:sp>
+      <p:pic>
+        <p:nvPicPr>
+          <p:cNvPr id="14" name=""/>
+          <p:cNvPicPr>
+            <a:picLocks xmlns:a="http://schemas.openxmlformats.org/drawingml/2006/main" noChangeAspect="1"/>
+          </p:cNvPicPr>
+          <p:nvPr/>
+        </p:nvPicPr>
+        <p:blipFill>
+          <a:blip xmlns:r="http://schemas.openxmlformats.org/officeDocument/2006/relationships" xmlns:a="http://schemas.openxmlformats.org/drawingml/2006/main" r:embed="R93fb71e0cdb845d1">
+            <a:extLst>
+              <a:ext uri="{96DAC541-7B7A-43D3-8B79-37D633B846F1}">
+                <asvg:svgBlip xmlns:asvg="http://schemas.microsoft.com/office/drawing/2016/SVG/main" r:embed="Rf9bed5cb6c7d4ce0"/>
+              </a:ext>
+            </a:extLst>
+          </a:blip>
+          <a:stretch xmlns:a="http://schemas.openxmlformats.org/drawingml/2006/main"/>
+        </p:blipFill>
+        <p:spPr>
+          <a:xfrm xmlns:a="http://schemas.openxmlformats.org/drawingml/2006/main">
+            <a:off x="6629400" y="2038350"/>
+            <a:ext cx="4953000" cy="3905250"/>
+          </a:xfrm>
+          <a:prstGeom xmlns:a="http://schemas.openxmlformats.org/drawingml/2006/main" prst="rect">
+            <a:avLst/>
+          </a:prstGeom>
+        </p:spPr>
+      </p:pic>
     </p:spTree>
     <p:extLst>
       <p:ext uri="{BB962C8B-B14F-4D97-AF65-F5344CB8AC3E}">
-        <p14:creationId xmlns:p14="http://schemas.microsoft.com/office/powerpoint/2010/main" val="1982673516"/>
+        <p14:creationId xmlns:p14="http://schemas.microsoft.com/office/powerpoint/2010/main" val="1878313871"/>
       </p:ext>
     </p:extLst>
   </p:cSld>
